--- a/structure.pptx
+++ b/structure.pptx
@@ -104,6 +104,11 @@
       </a:defRPr>
     </a:lvl9pPr>
   </p:defaultTextStyle>
+  <p:extLst>
+    <p:ext uri="{EFAFB233-063F-42B5-8137-9DF3F51BA10A}">
+      <p15:sldGuideLst xmlns:p15="http://schemas.microsoft.com/office/powerpoint/2012/main"/>
+    </p:ext>
+  </p:extLst>
 </p:presentation>
 </file>
 
@@ -254,7 +259,7 @@
           <a:p>
             <a:fld id="{505BB82E-C503-4E54-B9F4-7F874FE65A6C}" type="datetimeFigureOut">
               <a:rPr lang="ko-KR" altLang="en-US" smtClean="0"/>
-              <a:t>2025-06-28</a:t>
+              <a:t>2025-07-13</a:t>
             </a:fld>
             <a:endParaRPr lang="ko-KR" altLang="en-US"/>
           </a:p>
@@ -452,7 +457,7 @@
           <a:p>
             <a:fld id="{505BB82E-C503-4E54-B9F4-7F874FE65A6C}" type="datetimeFigureOut">
               <a:rPr lang="ko-KR" altLang="en-US" smtClean="0"/>
-              <a:t>2025-06-28</a:t>
+              <a:t>2025-07-13</a:t>
             </a:fld>
             <a:endParaRPr lang="ko-KR" altLang="en-US"/>
           </a:p>
@@ -660,7 +665,7 @@
           <a:p>
             <a:fld id="{505BB82E-C503-4E54-B9F4-7F874FE65A6C}" type="datetimeFigureOut">
               <a:rPr lang="ko-KR" altLang="en-US" smtClean="0"/>
-              <a:t>2025-06-28</a:t>
+              <a:t>2025-07-13</a:t>
             </a:fld>
             <a:endParaRPr lang="ko-KR" altLang="en-US"/>
           </a:p>
@@ -858,7 +863,7 @@
           <a:p>
             <a:fld id="{505BB82E-C503-4E54-B9F4-7F874FE65A6C}" type="datetimeFigureOut">
               <a:rPr lang="ko-KR" altLang="en-US" smtClean="0"/>
-              <a:t>2025-06-28</a:t>
+              <a:t>2025-07-13</a:t>
             </a:fld>
             <a:endParaRPr lang="ko-KR" altLang="en-US"/>
           </a:p>
@@ -1133,7 +1138,7 @@
           <a:p>
             <a:fld id="{505BB82E-C503-4E54-B9F4-7F874FE65A6C}" type="datetimeFigureOut">
               <a:rPr lang="ko-KR" altLang="en-US" smtClean="0"/>
-              <a:t>2025-06-28</a:t>
+              <a:t>2025-07-13</a:t>
             </a:fld>
             <a:endParaRPr lang="ko-KR" altLang="en-US"/>
           </a:p>
@@ -1398,7 +1403,7 @@
           <a:p>
             <a:fld id="{505BB82E-C503-4E54-B9F4-7F874FE65A6C}" type="datetimeFigureOut">
               <a:rPr lang="ko-KR" altLang="en-US" smtClean="0"/>
-              <a:t>2025-06-28</a:t>
+              <a:t>2025-07-13</a:t>
             </a:fld>
             <a:endParaRPr lang="ko-KR" altLang="en-US"/>
           </a:p>
@@ -1810,7 +1815,7 @@
           <a:p>
             <a:fld id="{505BB82E-C503-4E54-B9F4-7F874FE65A6C}" type="datetimeFigureOut">
               <a:rPr lang="ko-KR" altLang="en-US" smtClean="0"/>
-              <a:t>2025-06-28</a:t>
+              <a:t>2025-07-13</a:t>
             </a:fld>
             <a:endParaRPr lang="ko-KR" altLang="en-US"/>
           </a:p>
@@ -1951,7 +1956,7 @@
           <a:p>
             <a:fld id="{505BB82E-C503-4E54-B9F4-7F874FE65A6C}" type="datetimeFigureOut">
               <a:rPr lang="ko-KR" altLang="en-US" smtClean="0"/>
-              <a:t>2025-06-28</a:t>
+              <a:t>2025-07-13</a:t>
             </a:fld>
             <a:endParaRPr lang="ko-KR" altLang="en-US"/>
           </a:p>
@@ -2064,7 +2069,7 @@
           <a:p>
             <a:fld id="{505BB82E-C503-4E54-B9F4-7F874FE65A6C}" type="datetimeFigureOut">
               <a:rPr lang="ko-KR" altLang="en-US" smtClean="0"/>
-              <a:t>2025-06-28</a:t>
+              <a:t>2025-07-13</a:t>
             </a:fld>
             <a:endParaRPr lang="ko-KR" altLang="en-US"/>
           </a:p>
@@ -2375,7 +2380,7 @@
           <a:p>
             <a:fld id="{505BB82E-C503-4E54-B9F4-7F874FE65A6C}" type="datetimeFigureOut">
               <a:rPr lang="ko-KR" altLang="en-US" smtClean="0"/>
-              <a:t>2025-06-28</a:t>
+              <a:t>2025-07-13</a:t>
             </a:fld>
             <a:endParaRPr lang="ko-KR" altLang="en-US"/>
           </a:p>
@@ -2663,7 +2668,7 @@
           <a:p>
             <a:fld id="{505BB82E-C503-4E54-B9F4-7F874FE65A6C}" type="datetimeFigureOut">
               <a:rPr lang="ko-KR" altLang="en-US" smtClean="0"/>
-              <a:t>2025-06-28</a:t>
+              <a:t>2025-07-13</a:t>
             </a:fld>
             <a:endParaRPr lang="ko-KR" altLang="en-US"/>
           </a:p>
@@ -2904,7 +2909,7 @@
           <a:p>
             <a:fld id="{505BB82E-C503-4E54-B9F4-7F874FE65A6C}" type="datetimeFigureOut">
               <a:rPr lang="ko-KR" altLang="en-US" smtClean="0"/>
-              <a:t>2025-06-28</a:t>
+              <a:t>2025-07-13</a:t>
             </a:fld>
             <a:endParaRPr lang="ko-KR" altLang="en-US"/>
           </a:p>
@@ -3321,802 +3326,782 @@
           <a:chExt cx="0" cy="0"/>
         </a:xfrm>
       </p:grpSpPr>
-      <p:sp>
-        <p:nvSpPr>
-          <p:cNvPr id="28" name="직사각형 27">
-            <a:extLst>
-              <a:ext uri="{FF2B5EF4-FFF2-40B4-BE49-F238E27FC236}">
-                <a16:creationId xmlns:a16="http://schemas.microsoft.com/office/drawing/2014/main" id="{E03C45FA-99B8-13A2-A4C5-89430D8E89C1}"/>
-              </a:ext>
-            </a:extLst>
-          </p:cNvPr>
-          <p:cNvSpPr/>
+      <p:grpSp>
+        <p:nvGrpSpPr>
+          <p:cNvPr id="2" name="그룹 1">
+            <a:extLst>
+              <a:ext uri="{FF2B5EF4-FFF2-40B4-BE49-F238E27FC236}">
+                <a16:creationId xmlns:a16="http://schemas.microsoft.com/office/drawing/2014/main" id="{7A2945B6-BB87-2A20-807C-C95B5E924B53}"/>
+              </a:ext>
+            </a:extLst>
+          </p:cNvPr>
+          <p:cNvGrpSpPr/>
           <p:nvPr/>
-        </p:nvSpPr>
-        <p:spPr>
-          <a:xfrm>
-            <a:off x="9411119" y="1400421"/>
-            <a:ext cx="1980000" cy="1800000"/>
-          </a:xfrm>
-          <a:prstGeom prst="rect">
-            <a:avLst/>
-          </a:prstGeom>
-          <a:noFill/>
-          <a:ln>
-            <a:solidFill>
-              <a:schemeClr val="tx1"/>
-            </a:solidFill>
-            <a:prstDash val="dash"/>
-          </a:ln>
-        </p:spPr>
-        <p:style>
-          <a:lnRef idx="2">
-            <a:schemeClr val="accent1">
-              <a:shade val="15000"/>
-            </a:schemeClr>
-          </a:lnRef>
-          <a:fillRef idx="1">
-            <a:schemeClr val="accent1"/>
-          </a:fillRef>
-          <a:effectRef idx="0">
-            <a:schemeClr val="accent1"/>
-          </a:effectRef>
-          <a:fontRef idx="minor">
-            <a:schemeClr val="lt1"/>
-          </a:fontRef>
-        </p:style>
-        <p:txBody>
-          <a:bodyPr rtlCol="0" anchor="ctr"/>
-          <a:lstStyle/>
-          <a:p>
-            <a:pPr algn="ctr"/>
-            <a:endParaRPr lang="ko-KR" altLang="en-US"/>
-          </a:p>
-        </p:txBody>
-      </p:sp>
-      <p:sp>
-        <p:nvSpPr>
-          <p:cNvPr id="15" name="직사각형 14">
-            <a:extLst>
-              <a:ext uri="{FF2B5EF4-FFF2-40B4-BE49-F238E27FC236}">
-                <a16:creationId xmlns:a16="http://schemas.microsoft.com/office/drawing/2014/main" id="{24595EF0-3261-AC50-5D2E-FABAE0E0B1D9}"/>
-              </a:ext>
-            </a:extLst>
-          </p:cNvPr>
-          <p:cNvSpPr/>
-          <p:nvPr/>
-        </p:nvSpPr>
-        <p:spPr>
+        </p:nvGrpSpPr>
+        <p:grpSpPr>
           <a:xfrm>
             <a:off x="764771" y="1052944"/>
-            <a:ext cx="6480000" cy="4320000"/>
+            <a:ext cx="10626348" cy="4320000"/>
+            <a:chOff x="764771" y="1052944"/>
+            <a:chExt cx="10626348" cy="4320000"/>
           </a:xfrm>
-          <a:prstGeom prst="rect">
-            <a:avLst/>
-          </a:prstGeom>
-          <a:solidFill>
-            <a:schemeClr val="bg1"/>
-          </a:solidFill>
-          <a:ln>
+        </p:grpSpPr>
+        <p:sp>
+          <p:nvSpPr>
+            <p:cNvPr id="28" name="직사각형 27">
+              <a:extLst>
+                <a:ext uri="{FF2B5EF4-FFF2-40B4-BE49-F238E27FC236}">
+                  <a16:creationId xmlns:a16="http://schemas.microsoft.com/office/drawing/2014/main" id="{E03C45FA-99B8-13A2-A4C5-89430D8E89C1}"/>
+                </a:ext>
+              </a:extLst>
+            </p:cNvPr>
+            <p:cNvSpPr/>
+            <p:nvPr/>
+          </p:nvSpPr>
+          <p:spPr>
+            <a:xfrm>
+              <a:off x="9411119" y="1400421"/>
+              <a:ext cx="1980000" cy="1800000"/>
+            </a:xfrm>
+            <a:prstGeom prst="rect">
+              <a:avLst/>
+            </a:prstGeom>
+            <a:noFill/>
+            <a:ln>
+              <a:solidFill>
+                <a:schemeClr val="tx1"/>
+              </a:solidFill>
+              <a:prstDash val="dash"/>
+            </a:ln>
+          </p:spPr>
+          <p:style>
+            <a:lnRef idx="2">
+              <a:schemeClr val="accent1">
+                <a:shade val="15000"/>
+              </a:schemeClr>
+            </a:lnRef>
+            <a:fillRef idx="1">
+              <a:schemeClr val="accent1"/>
+            </a:fillRef>
+            <a:effectRef idx="0">
+              <a:schemeClr val="accent1"/>
+            </a:effectRef>
+            <a:fontRef idx="minor">
+              <a:schemeClr val="lt1"/>
+            </a:fontRef>
+          </p:style>
+          <p:txBody>
+            <a:bodyPr rtlCol="0" anchor="ctr"/>
+            <a:lstStyle/>
+            <a:p>
+              <a:pPr algn="ctr"/>
+              <a:endParaRPr lang="ko-KR" altLang="en-US"/>
+            </a:p>
+          </p:txBody>
+        </p:sp>
+        <p:sp>
+          <p:nvSpPr>
+            <p:cNvPr id="15" name="직사각형 14">
+              <a:extLst>
+                <a:ext uri="{FF2B5EF4-FFF2-40B4-BE49-F238E27FC236}">
+                  <a16:creationId xmlns:a16="http://schemas.microsoft.com/office/drawing/2014/main" id="{24595EF0-3261-AC50-5D2E-FABAE0E0B1D9}"/>
+                </a:ext>
+              </a:extLst>
+            </p:cNvPr>
+            <p:cNvSpPr/>
+            <p:nvPr/>
+          </p:nvSpPr>
+          <p:spPr>
+            <a:xfrm>
+              <a:off x="764771" y="1052944"/>
+              <a:ext cx="6480000" cy="4320000"/>
+            </a:xfrm>
+            <a:prstGeom prst="rect">
+              <a:avLst/>
+            </a:prstGeom>
             <a:solidFill>
-              <a:schemeClr val="tx1"/>
+              <a:schemeClr val="bg1"/>
             </a:solidFill>
-          </a:ln>
-        </p:spPr>
-        <p:style>
-          <a:lnRef idx="2">
-            <a:schemeClr val="accent1">
-              <a:shade val="15000"/>
-            </a:schemeClr>
-          </a:lnRef>
-          <a:fillRef idx="1">
-            <a:schemeClr val="accent1"/>
-          </a:fillRef>
-          <a:effectRef idx="0">
-            <a:schemeClr val="accent1"/>
-          </a:effectRef>
-          <a:fontRef idx="minor">
-            <a:schemeClr val="lt1"/>
-          </a:fontRef>
-        </p:style>
-        <p:txBody>
-          <a:bodyPr rtlCol="0" anchor="ctr"/>
-          <a:lstStyle/>
-          <a:p>
-            <a:pPr algn="ctr"/>
-            <a:endParaRPr lang="ko-KR" altLang="en-US"/>
-          </a:p>
-        </p:txBody>
-      </p:sp>
-      <p:sp>
-        <p:nvSpPr>
-          <p:cNvPr id="27" name="직사각형 26">
-            <a:extLst>
-              <a:ext uri="{FF2B5EF4-FFF2-40B4-BE49-F238E27FC236}">
-                <a16:creationId xmlns:a16="http://schemas.microsoft.com/office/drawing/2014/main" id="{0C78ECE6-0CA1-3A5B-8983-82D515868208}"/>
-              </a:ext>
-            </a:extLst>
-          </p:cNvPr>
-          <p:cNvSpPr/>
-          <p:nvPr/>
-        </p:nvSpPr>
-        <p:spPr>
-          <a:xfrm>
-            <a:off x="1132944" y="1400421"/>
-            <a:ext cx="3648021" cy="1800000"/>
-          </a:xfrm>
-          <a:prstGeom prst="rect">
-            <a:avLst/>
-          </a:prstGeom>
-          <a:noFill/>
-          <a:ln>
+            <a:ln>
+              <a:solidFill>
+                <a:schemeClr val="tx1"/>
+              </a:solidFill>
+            </a:ln>
+          </p:spPr>
+          <p:style>
+            <a:lnRef idx="2">
+              <a:schemeClr val="accent1">
+                <a:shade val="15000"/>
+              </a:schemeClr>
+            </a:lnRef>
+            <a:fillRef idx="1">
+              <a:schemeClr val="accent1"/>
+            </a:fillRef>
+            <a:effectRef idx="0">
+              <a:schemeClr val="accent1"/>
+            </a:effectRef>
+            <a:fontRef idx="minor">
+              <a:schemeClr val="lt1"/>
+            </a:fontRef>
+          </p:style>
+          <p:txBody>
+            <a:bodyPr rtlCol="0" anchor="ctr"/>
+            <a:lstStyle/>
+            <a:p>
+              <a:pPr algn="ctr"/>
+              <a:endParaRPr lang="ko-KR" altLang="en-US"/>
+            </a:p>
+          </p:txBody>
+        </p:sp>
+        <p:sp>
+          <p:nvSpPr>
+            <p:cNvPr id="27" name="직사각형 26">
+              <a:extLst>
+                <a:ext uri="{FF2B5EF4-FFF2-40B4-BE49-F238E27FC236}">
+                  <a16:creationId xmlns:a16="http://schemas.microsoft.com/office/drawing/2014/main" id="{0C78ECE6-0CA1-3A5B-8983-82D515868208}"/>
+                </a:ext>
+              </a:extLst>
+            </p:cNvPr>
+            <p:cNvSpPr/>
+            <p:nvPr/>
+          </p:nvSpPr>
+          <p:spPr>
+            <a:xfrm>
+              <a:off x="1132944" y="1400421"/>
+              <a:ext cx="3648021" cy="1800000"/>
+            </a:xfrm>
+            <a:prstGeom prst="rect">
+              <a:avLst/>
+            </a:prstGeom>
+            <a:noFill/>
+            <a:ln>
+              <a:solidFill>
+                <a:schemeClr val="tx1"/>
+              </a:solidFill>
+              <a:prstDash val="dash"/>
+            </a:ln>
+          </p:spPr>
+          <p:style>
+            <a:lnRef idx="2">
+              <a:schemeClr val="accent1">
+                <a:shade val="15000"/>
+              </a:schemeClr>
+            </a:lnRef>
+            <a:fillRef idx="1">
+              <a:schemeClr val="accent1"/>
+            </a:fillRef>
+            <a:effectRef idx="0">
+              <a:schemeClr val="accent1"/>
+            </a:effectRef>
+            <a:fontRef idx="minor">
+              <a:schemeClr val="lt1"/>
+            </a:fontRef>
+          </p:style>
+          <p:txBody>
+            <a:bodyPr rtlCol="0" anchor="ctr"/>
+            <a:lstStyle/>
+            <a:p>
+              <a:pPr algn="ctr"/>
+              <a:endParaRPr lang="ko-KR" altLang="en-US"/>
+            </a:p>
+          </p:txBody>
+        </p:sp>
+        <p:sp>
+          <p:nvSpPr>
+            <p:cNvPr id="26" name="직사각형 25">
+              <a:extLst>
+                <a:ext uri="{FF2B5EF4-FFF2-40B4-BE49-F238E27FC236}">
+                  <a16:creationId xmlns:a16="http://schemas.microsoft.com/office/drawing/2014/main" id="{B5656CC1-B885-CECA-9699-C091A49D8AEF}"/>
+                </a:ext>
+              </a:extLst>
+            </p:cNvPr>
+            <p:cNvSpPr/>
+            <p:nvPr/>
+          </p:nvSpPr>
+          <p:spPr>
+            <a:xfrm>
+              <a:off x="4894974" y="1400421"/>
+              <a:ext cx="1980000" cy="3780000"/>
+            </a:xfrm>
+            <a:prstGeom prst="rect">
+              <a:avLst/>
+            </a:prstGeom>
+            <a:noFill/>
+            <a:ln>
+              <a:solidFill>
+                <a:schemeClr val="tx1"/>
+              </a:solidFill>
+              <a:prstDash val="dash"/>
+            </a:ln>
+          </p:spPr>
+          <p:style>
+            <a:lnRef idx="2">
+              <a:schemeClr val="accent1">
+                <a:shade val="15000"/>
+              </a:schemeClr>
+            </a:lnRef>
+            <a:fillRef idx="1">
+              <a:schemeClr val="accent1"/>
+            </a:fillRef>
+            <a:effectRef idx="0">
+              <a:schemeClr val="accent1"/>
+            </a:effectRef>
+            <a:fontRef idx="minor">
+              <a:schemeClr val="lt1"/>
+            </a:fontRef>
+          </p:style>
+          <p:txBody>
+            <a:bodyPr rtlCol="0" anchor="ctr"/>
+            <a:lstStyle/>
+            <a:p>
+              <a:pPr algn="ctr"/>
+              <a:endParaRPr lang="ko-KR" altLang="en-US"/>
+            </a:p>
+          </p:txBody>
+        </p:sp>
+        <p:sp>
+          <p:nvSpPr>
+            <p:cNvPr id="3" name="직사각형 2">
+              <a:extLst>
+                <a:ext uri="{FF2B5EF4-FFF2-40B4-BE49-F238E27FC236}">
+                  <a16:creationId xmlns:a16="http://schemas.microsoft.com/office/drawing/2014/main" id="{F380D10E-0A96-F1EA-722B-91DAC71FF2B9}"/>
+                </a:ext>
+              </a:extLst>
+            </p:cNvPr>
+            <p:cNvSpPr/>
+            <p:nvPr/>
+          </p:nvSpPr>
+          <p:spPr>
+            <a:xfrm>
+              <a:off x="5164974" y="1670422"/>
+              <a:ext cx="1440000" cy="1260000"/>
+            </a:xfrm>
+            <a:prstGeom prst="rect">
+              <a:avLst/>
+            </a:prstGeom>
             <a:solidFill>
-              <a:schemeClr val="tx1"/>
+              <a:schemeClr val="bg1"/>
             </a:solidFill>
-            <a:prstDash val="dash"/>
-          </a:ln>
-        </p:spPr>
-        <p:style>
-          <a:lnRef idx="2">
-            <a:schemeClr val="accent1">
-              <a:shade val="15000"/>
-            </a:schemeClr>
-          </a:lnRef>
-          <a:fillRef idx="1">
-            <a:schemeClr val="accent1"/>
-          </a:fillRef>
-          <a:effectRef idx="0">
-            <a:schemeClr val="accent1"/>
-          </a:effectRef>
-          <a:fontRef idx="minor">
-            <a:schemeClr val="lt1"/>
-          </a:fontRef>
-        </p:style>
-        <p:txBody>
-          <a:bodyPr rtlCol="0" anchor="ctr"/>
-          <a:lstStyle/>
-          <a:p>
-            <a:pPr algn="ctr"/>
-            <a:endParaRPr lang="ko-KR" altLang="en-US"/>
-          </a:p>
-        </p:txBody>
-      </p:sp>
-      <p:sp>
-        <p:nvSpPr>
-          <p:cNvPr id="26" name="직사각형 25">
-            <a:extLst>
-              <a:ext uri="{FF2B5EF4-FFF2-40B4-BE49-F238E27FC236}">
-                <a16:creationId xmlns:a16="http://schemas.microsoft.com/office/drawing/2014/main" id="{B5656CC1-B885-CECA-9699-C091A49D8AEF}"/>
-              </a:ext>
-            </a:extLst>
-          </p:cNvPr>
-          <p:cNvSpPr/>
-          <p:nvPr/>
-        </p:nvSpPr>
-        <p:spPr>
-          <a:xfrm>
-            <a:off x="4894974" y="1400421"/>
-            <a:ext cx="1980000" cy="3780000"/>
-          </a:xfrm>
-          <a:prstGeom prst="rect">
-            <a:avLst/>
-          </a:prstGeom>
-          <a:noFill/>
-          <a:ln>
-            <a:solidFill>
-              <a:schemeClr val="tx1"/>
-            </a:solidFill>
-            <a:prstDash val="dash"/>
-          </a:ln>
-        </p:spPr>
-        <p:style>
-          <a:lnRef idx="2">
-            <a:schemeClr val="accent1">
-              <a:shade val="15000"/>
-            </a:schemeClr>
-          </a:lnRef>
-          <a:fillRef idx="1">
-            <a:schemeClr val="accent1"/>
-          </a:fillRef>
-          <a:effectRef idx="0">
-            <a:schemeClr val="accent1"/>
-          </a:effectRef>
-          <a:fontRef idx="minor">
-            <a:schemeClr val="lt1"/>
-          </a:fontRef>
-        </p:style>
-        <p:txBody>
-          <a:bodyPr rtlCol="0" anchor="ctr"/>
-          <a:lstStyle/>
-          <a:p>
-            <a:pPr algn="ctr"/>
-            <a:endParaRPr lang="ko-KR" altLang="en-US"/>
-          </a:p>
-        </p:txBody>
-      </p:sp>
-      <p:sp>
-        <p:nvSpPr>
-          <p:cNvPr id="3" name="직사각형 2">
-            <a:extLst>
-              <a:ext uri="{FF2B5EF4-FFF2-40B4-BE49-F238E27FC236}">
-                <a16:creationId xmlns:a16="http://schemas.microsoft.com/office/drawing/2014/main" id="{F380D10E-0A96-F1EA-722B-91DAC71FF2B9}"/>
-              </a:ext>
-            </a:extLst>
-          </p:cNvPr>
-          <p:cNvSpPr/>
-          <p:nvPr/>
-        </p:nvSpPr>
-        <p:spPr>
-          <a:xfrm>
-            <a:off x="5164974" y="1670422"/>
-            <a:ext cx="1440000" cy="1260000"/>
-          </a:xfrm>
-          <a:prstGeom prst="rect">
-            <a:avLst/>
-          </a:prstGeom>
-          <a:solidFill>
-            <a:schemeClr val="bg1"/>
-          </a:solidFill>
-          <a:ln>
-            <a:solidFill>
-              <a:schemeClr val="tx1"/>
-            </a:solidFill>
-          </a:ln>
-        </p:spPr>
-        <p:style>
-          <a:lnRef idx="2">
-            <a:schemeClr val="accent1">
-              <a:shade val="15000"/>
-            </a:schemeClr>
-          </a:lnRef>
-          <a:fillRef idx="1">
-            <a:schemeClr val="accent1"/>
-          </a:fillRef>
-          <a:effectRef idx="0">
-            <a:schemeClr val="accent1"/>
-          </a:effectRef>
-          <a:fontRef idx="minor">
-            <a:schemeClr val="lt1"/>
-          </a:fontRef>
-        </p:style>
-        <p:txBody>
-          <a:bodyPr rtlCol="0" anchor="ctr"/>
-          <a:lstStyle/>
-          <a:p>
-            <a:pPr algn="ctr"/>
-            <a:r>
-              <a:rPr lang="en-US" altLang="ko-KR" dirty="0">
+            <a:ln>
+              <a:solidFill>
+                <a:schemeClr val="tx1"/>
+              </a:solidFill>
+            </a:ln>
+          </p:spPr>
+          <p:style>
+            <a:lnRef idx="2">
+              <a:schemeClr val="accent1">
+                <a:shade val="15000"/>
+              </a:schemeClr>
+            </a:lnRef>
+            <a:fillRef idx="1">
+              <a:schemeClr val="accent1"/>
+            </a:fillRef>
+            <a:effectRef idx="0">
+              <a:schemeClr val="accent1"/>
+            </a:effectRef>
+            <a:fontRef idx="minor">
+              <a:schemeClr val="lt1"/>
+            </a:fontRef>
+          </p:style>
+          <p:txBody>
+            <a:bodyPr rtlCol="0" anchor="ctr"/>
+            <a:lstStyle/>
+            <a:p>
+              <a:pPr algn="ctr"/>
+              <a:r>
+                <a:rPr lang="en-US" altLang="ko-KR" dirty="0">
+                  <a:solidFill>
+                    <a:sysClr val="windowText" lastClr="000000"/>
+                  </a:solidFill>
+                  <a:latin typeface="DengXian" panose="02010600030101010101" pitchFamily="2" charset="-122"/>
+                  <a:ea typeface="DengXian" panose="02010600030101010101" pitchFamily="2" charset="-122"/>
+                </a:rPr>
+                <a:t>Main</a:t>
+              </a:r>
+              <a:br>
+                <a:rPr lang="en-US" altLang="ko-KR" dirty="0">
+                  <a:solidFill>
+                    <a:sysClr val="windowText" lastClr="000000"/>
+                  </a:solidFill>
+                  <a:latin typeface="DengXian" panose="02010600030101010101" pitchFamily="2" charset="-122"/>
+                  <a:ea typeface="DengXian" panose="02010600030101010101" pitchFamily="2" charset="-122"/>
+                </a:rPr>
+              </a:br>
+              <a:r>
+                <a:rPr lang="en-US" altLang="ko-KR" dirty="0">
+                  <a:solidFill>
+                    <a:sysClr val="windowText" lastClr="000000"/>
+                  </a:solidFill>
+                  <a:latin typeface="DengXian" panose="02010600030101010101" pitchFamily="2" charset="-122"/>
+                  <a:ea typeface="DengXian" panose="02010600030101010101" pitchFamily="2" charset="-122"/>
+                </a:rPr>
+                <a:t>BE* Server</a:t>
+              </a:r>
+              <a:endParaRPr lang="ko-KR" altLang="en-US" dirty="0">
                 <a:solidFill>
                   <a:sysClr val="windowText" lastClr="000000"/>
                 </a:solidFill>
                 <a:latin typeface="DengXian" panose="02010600030101010101" pitchFamily="2" charset="-122"/>
-                <a:ea typeface="DengXian" panose="02010600030101010101" pitchFamily="2" charset="-122"/>
-              </a:rPr>
-              <a:t>Main</a:t>
-            </a:r>
-            <a:br>
-              <a:rPr lang="en-US" altLang="ko-KR" dirty="0">
+              </a:endParaRPr>
+            </a:p>
+          </p:txBody>
+        </p:sp>
+        <p:sp>
+          <p:nvSpPr>
+            <p:cNvPr id="4" name="직사각형 3">
+              <a:extLst>
+                <a:ext uri="{FF2B5EF4-FFF2-40B4-BE49-F238E27FC236}">
+                  <a16:creationId xmlns:a16="http://schemas.microsoft.com/office/drawing/2014/main" id="{B1352DE7-6DEF-24C5-D9C9-1F927B74F283}"/>
+                </a:ext>
+              </a:extLst>
+            </p:cNvPr>
+            <p:cNvSpPr/>
+            <p:nvPr/>
+          </p:nvSpPr>
+          <p:spPr>
+            <a:xfrm>
+              <a:off x="1368829" y="1670422"/>
+              <a:ext cx="1440000" cy="1260000"/>
+            </a:xfrm>
+            <a:prstGeom prst="rect">
+              <a:avLst/>
+            </a:prstGeom>
+            <a:solidFill>
+              <a:schemeClr val="bg1"/>
+            </a:solidFill>
+            <a:ln>
+              <a:solidFill>
+                <a:schemeClr val="tx1"/>
+              </a:solidFill>
+            </a:ln>
+          </p:spPr>
+          <p:style>
+            <a:lnRef idx="2">
+              <a:schemeClr val="accent1">
+                <a:shade val="15000"/>
+              </a:schemeClr>
+            </a:lnRef>
+            <a:fillRef idx="1">
+              <a:schemeClr val="accent1"/>
+            </a:fillRef>
+            <a:effectRef idx="0">
+              <a:schemeClr val="accent1"/>
+            </a:effectRef>
+            <a:fontRef idx="minor">
+              <a:schemeClr val="lt1"/>
+            </a:fontRef>
+          </p:style>
+          <p:txBody>
+            <a:bodyPr rtlCol="0" anchor="ctr"/>
+            <a:lstStyle/>
+            <a:p>
+              <a:pPr algn="ctr"/>
+              <a:r>
+                <a:rPr lang="en-US" altLang="ko-KR" dirty="0">
+                  <a:solidFill>
+                    <a:sysClr val="windowText" lastClr="000000"/>
+                  </a:solidFill>
+                  <a:latin typeface="DengXian" panose="02010600030101010101" pitchFamily="2" charset="-122"/>
+                  <a:ea typeface="DengXian" panose="02010600030101010101" pitchFamily="2" charset="-122"/>
+                </a:rPr>
+                <a:t>Bot Server</a:t>
+              </a:r>
+              <a:endParaRPr lang="ko-KR" altLang="en-US" dirty="0">
                 <a:solidFill>
                   <a:sysClr val="windowText" lastClr="000000"/>
                 </a:solidFill>
                 <a:latin typeface="DengXian" panose="02010600030101010101" pitchFamily="2" charset="-122"/>
-                <a:ea typeface="DengXian" panose="02010600030101010101" pitchFamily="2" charset="-122"/>
-              </a:rPr>
-            </a:br>
-            <a:r>
-              <a:rPr lang="en-US" altLang="ko-KR" dirty="0">
+              </a:endParaRPr>
+            </a:p>
+          </p:txBody>
+        </p:sp>
+        <p:sp>
+          <p:nvSpPr>
+            <p:cNvPr id="5" name="직사각형 4">
+              <a:extLst>
+                <a:ext uri="{FF2B5EF4-FFF2-40B4-BE49-F238E27FC236}">
+                  <a16:creationId xmlns:a16="http://schemas.microsoft.com/office/drawing/2014/main" id="{BD78AF27-28EB-EDBB-BDD9-7BDEDA5FBD76}"/>
+                </a:ext>
+              </a:extLst>
+            </p:cNvPr>
+            <p:cNvSpPr/>
+            <p:nvPr/>
+          </p:nvSpPr>
+          <p:spPr>
+            <a:xfrm>
+              <a:off x="9681119" y="1670422"/>
+              <a:ext cx="1440000" cy="1260000"/>
+            </a:xfrm>
+            <a:prstGeom prst="rect">
+              <a:avLst/>
+            </a:prstGeom>
+            <a:solidFill>
+              <a:schemeClr val="bg1"/>
+            </a:solidFill>
+            <a:ln>
+              <a:solidFill>
+                <a:schemeClr val="tx1"/>
+              </a:solidFill>
+            </a:ln>
+          </p:spPr>
+          <p:style>
+            <a:lnRef idx="2">
+              <a:schemeClr val="accent1">
+                <a:shade val="15000"/>
+              </a:schemeClr>
+            </a:lnRef>
+            <a:fillRef idx="1">
+              <a:schemeClr val="accent1"/>
+            </a:fillRef>
+            <a:effectRef idx="0">
+              <a:schemeClr val="accent1"/>
+            </a:effectRef>
+            <a:fontRef idx="minor">
+              <a:schemeClr val="lt1"/>
+            </a:fontRef>
+          </p:style>
+          <p:txBody>
+            <a:bodyPr rtlCol="0" anchor="ctr"/>
+            <a:lstStyle/>
+            <a:p>
+              <a:pPr algn="ctr"/>
+              <a:r>
+                <a:rPr lang="en-US" altLang="ko-KR" dirty="0">
+                  <a:solidFill>
+                    <a:sysClr val="windowText" lastClr="000000"/>
+                  </a:solidFill>
+                  <a:latin typeface="DengXian" panose="02010600030101010101" pitchFamily="2" charset="-122"/>
+                  <a:ea typeface="DengXian" panose="02010600030101010101" pitchFamily="2" charset="-122"/>
+                </a:rPr>
+                <a:t>BFF Server</a:t>
+              </a:r>
+              <a:endParaRPr lang="ko-KR" altLang="en-US" dirty="0">
                 <a:solidFill>
                   <a:sysClr val="windowText" lastClr="000000"/>
                 </a:solidFill>
                 <a:latin typeface="DengXian" panose="02010600030101010101" pitchFamily="2" charset="-122"/>
-                <a:ea typeface="DengXian" panose="02010600030101010101" pitchFamily="2" charset="-122"/>
-              </a:rPr>
-              <a:t>BE* Server</a:t>
-            </a:r>
-            <a:endParaRPr lang="ko-KR" altLang="en-US" dirty="0">
+              </a:endParaRPr>
+            </a:p>
+          </p:txBody>
+        </p:sp>
+        <p:cxnSp>
+          <p:nvCxnSpPr>
+            <p:cNvPr id="7" name="직선 화살표 연결선 6">
+              <a:extLst>
+                <a:ext uri="{FF2B5EF4-FFF2-40B4-BE49-F238E27FC236}">
+                  <a16:creationId xmlns:a16="http://schemas.microsoft.com/office/drawing/2014/main" id="{EB73D0C1-90F7-3B0C-BBEA-58F92E3E93F1}"/>
+                </a:ext>
+              </a:extLst>
+            </p:cNvPr>
+            <p:cNvCxnSpPr>
+              <a:stCxn id="3" idx="3"/>
+              <a:endCxn id="5" idx="1"/>
+            </p:cNvCxnSpPr>
+            <p:nvPr/>
+          </p:nvCxnSpPr>
+          <p:spPr>
+            <a:xfrm>
+              <a:off x="6604974" y="2300422"/>
+              <a:ext cx="3076145" cy="0"/>
+            </a:xfrm>
+            <a:prstGeom prst="straightConnector1">
+              <a:avLst/>
+            </a:prstGeom>
+            <a:ln w="12700">
               <a:solidFill>
-                <a:sysClr val="windowText" lastClr="000000"/>
+                <a:schemeClr val="tx1"/>
               </a:solidFill>
-              <a:latin typeface="DengXian" panose="02010600030101010101" pitchFamily="2" charset="-122"/>
-            </a:endParaRPr>
-          </a:p>
-        </p:txBody>
-      </p:sp>
-      <p:sp>
-        <p:nvSpPr>
-          <p:cNvPr id="4" name="직사각형 3">
-            <a:extLst>
-              <a:ext uri="{FF2B5EF4-FFF2-40B4-BE49-F238E27FC236}">
-                <a16:creationId xmlns:a16="http://schemas.microsoft.com/office/drawing/2014/main" id="{B1352DE7-6DEF-24C5-D9C9-1F927B74F283}"/>
-              </a:ext>
-            </a:extLst>
-          </p:cNvPr>
-          <p:cNvSpPr/>
-          <p:nvPr/>
-        </p:nvSpPr>
-        <p:spPr>
-          <a:xfrm>
-            <a:off x="1368829" y="1670422"/>
-            <a:ext cx="1440000" cy="1260000"/>
-          </a:xfrm>
-          <a:prstGeom prst="rect">
-            <a:avLst/>
-          </a:prstGeom>
-          <a:solidFill>
-            <a:schemeClr val="bg1"/>
-          </a:solidFill>
-          <a:ln>
+              <a:headEnd type="triangle"/>
+              <a:tailEnd type="triangle"/>
+            </a:ln>
+          </p:spPr>
+          <p:style>
+            <a:lnRef idx="1">
+              <a:schemeClr val="accent1"/>
+            </a:lnRef>
+            <a:fillRef idx="0">
+              <a:schemeClr val="accent1"/>
+            </a:fillRef>
+            <a:effectRef idx="0">
+              <a:schemeClr val="accent1"/>
+            </a:effectRef>
+            <a:fontRef idx="minor">
+              <a:schemeClr val="tx1"/>
+            </a:fontRef>
+          </p:style>
+        </p:cxnSp>
+        <p:cxnSp>
+          <p:nvCxnSpPr>
+            <p:cNvPr id="9" name="직선 화살표 연결선 8">
+              <a:extLst>
+                <a:ext uri="{FF2B5EF4-FFF2-40B4-BE49-F238E27FC236}">
+                  <a16:creationId xmlns:a16="http://schemas.microsoft.com/office/drawing/2014/main" id="{713B124D-B524-07D5-5E8D-AB1362574053}"/>
+                </a:ext>
+              </a:extLst>
+            </p:cNvPr>
+            <p:cNvCxnSpPr>
+              <a:stCxn id="4" idx="3"/>
+              <a:endCxn id="3" idx="1"/>
+            </p:cNvCxnSpPr>
+            <p:nvPr/>
+          </p:nvCxnSpPr>
+          <p:spPr>
+            <a:xfrm>
+              <a:off x="2808829" y="2300422"/>
+              <a:ext cx="2356145" cy="0"/>
+            </a:xfrm>
+            <a:prstGeom prst="straightConnector1">
+              <a:avLst/>
+            </a:prstGeom>
+            <a:ln w="12700">
+              <a:solidFill>
+                <a:schemeClr val="tx1"/>
+              </a:solidFill>
+              <a:headEnd type="triangle"/>
+              <a:tailEnd type="triangle"/>
+            </a:ln>
+          </p:spPr>
+          <p:style>
+            <a:lnRef idx="1">
+              <a:schemeClr val="accent1"/>
+            </a:lnRef>
+            <a:fillRef idx="0">
+              <a:schemeClr val="accent1"/>
+            </a:fillRef>
+            <a:effectRef idx="0">
+              <a:schemeClr val="accent1"/>
+            </a:effectRef>
+            <a:fontRef idx="minor">
+              <a:schemeClr val="tx1"/>
+            </a:fontRef>
+          </p:style>
+        </p:cxnSp>
+        <p:sp>
+          <p:nvSpPr>
+            <p:cNvPr id="10" name="원통형 9">
+              <a:extLst>
+                <a:ext uri="{FF2B5EF4-FFF2-40B4-BE49-F238E27FC236}">
+                  <a16:creationId xmlns:a16="http://schemas.microsoft.com/office/drawing/2014/main" id="{78F0731F-44E9-7768-60E2-4FD11815AC52}"/>
+                </a:ext>
+              </a:extLst>
+            </p:cNvPr>
+            <p:cNvSpPr/>
+            <p:nvPr/>
+          </p:nvSpPr>
+          <p:spPr>
+            <a:xfrm>
+              <a:off x="5164974" y="3560421"/>
+              <a:ext cx="1440000" cy="1260000"/>
+            </a:xfrm>
+            <a:prstGeom prst="can">
+              <a:avLst/>
+            </a:prstGeom>
             <a:solidFill>
-              <a:schemeClr val="tx1"/>
+              <a:schemeClr val="bg1"/>
             </a:solidFill>
-          </a:ln>
-        </p:spPr>
-        <p:style>
-          <a:lnRef idx="2">
-            <a:schemeClr val="accent1">
-              <a:shade val="15000"/>
-            </a:schemeClr>
-          </a:lnRef>
-          <a:fillRef idx="1">
-            <a:schemeClr val="accent1"/>
-          </a:fillRef>
-          <a:effectRef idx="0">
-            <a:schemeClr val="accent1"/>
-          </a:effectRef>
-          <a:fontRef idx="minor">
-            <a:schemeClr val="lt1"/>
-          </a:fontRef>
-        </p:style>
-        <p:txBody>
-          <a:bodyPr rtlCol="0" anchor="ctr"/>
-          <a:lstStyle/>
-          <a:p>
-            <a:pPr algn="ctr"/>
-            <a:r>
-              <a:rPr lang="en-US" altLang="ko-KR" dirty="0">
+            <a:ln>
+              <a:solidFill>
+                <a:schemeClr val="tx1"/>
+              </a:solidFill>
+            </a:ln>
+          </p:spPr>
+          <p:style>
+            <a:lnRef idx="2">
+              <a:schemeClr val="accent1">
+                <a:shade val="15000"/>
+              </a:schemeClr>
+            </a:lnRef>
+            <a:fillRef idx="1">
+              <a:schemeClr val="accent1"/>
+            </a:fillRef>
+            <a:effectRef idx="0">
+              <a:schemeClr val="accent1"/>
+            </a:effectRef>
+            <a:fontRef idx="minor">
+              <a:schemeClr val="lt1"/>
+            </a:fontRef>
+          </p:style>
+          <p:txBody>
+            <a:bodyPr rtlCol="0" anchor="ctr"/>
+            <a:lstStyle/>
+            <a:p>
+              <a:pPr algn="ctr"/>
+              <a:r>
+                <a:rPr lang="en-US" altLang="ko-KR" dirty="0">
+                  <a:solidFill>
+                    <a:sysClr val="windowText" lastClr="000000"/>
+                  </a:solidFill>
+                  <a:latin typeface="DengXian" panose="02010600030101010101" pitchFamily="2" charset="-122"/>
+                  <a:ea typeface="DengXian" panose="02010600030101010101" pitchFamily="2" charset="-122"/>
+                </a:rPr>
+                <a:t>DB</a:t>
+              </a:r>
+              <a:endParaRPr lang="ko-KR" altLang="en-US" dirty="0">
                 <a:solidFill>
                   <a:sysClr val="windowText" lastClr="000000"/>
                 </a:solidFill>
                 <a:latin typeface="DengXian" panose="02010600030101010101" pitchFamily="2" charset="-122"/>
-                <a:ea typeface="DengXian" panose="02010600030101010101" pitchFamily="2" charset="-122"/>
-              </a:rPr>
-              <a:t>Bot Server</a:t>
-            </a:r>
-            <a:endParaRPr lang="ko-KR" altLang="en-US" dirty="0">
+              </a:endParaRPr>
+            </a:p>
+          </p:txBody>
+        </p:sp>
+        <p:cxnSp>
+          <p:nvCxnSpPr>
+            <p:cNvPr id="12" name="직선 화살표 연결선 11">
+              <a:extLst>
+                <a:ext uri="{FF2B5EF4-FFF2-40B4-BE49-F238E27FC236}">
+                  <a16:creationId xmlns:a16="http://schemas.microsoft.com/office/drawing/2014/main" id="{E8DE0A0D-C59E-AEFE-BB41-0A97AAC5CD81}"/>
+                </a:ext>
+              </a:extLst>
+            </p:cNvPr>
+            <p:cNvCxnSpPr>
+              <a:stCxn id="3" idx="2"/>
+              <a:endCxn id="10" idx="1"/>
+            </p:cNvCxnSpPr>
+            <p:nvPr/>
+          </p:nvCxnSpPr>
+          <p:spPr>
+            <a:xfrm>
+              <a:off x="5884974" y="2930422"/>
+              <a:ext cx="0" cy="629999"/>
+            </a:xfrm>
+            <a:prstGeom prst="straightConnector1">
+              <a:avLst/>
+            </a:prstGeom>
+            <a:ln w="12700">
               <a:solidFill>
-                <a:sysClr val="windowText" lastClr="000000"/>
+                <a:schemeClr val="tx1"/>
               </a:solidFill>
-              <a:latin typeface="DengXian" panose="02010600030101010101" pitchFamily="2" charset="-122"/>
-            </a:endParaRPr>
-          </a:p>
-        </p:txBody>
-      </p:sp>
-      <p:sp>
-        <p:nvSpPr>
-          <p:cNvPr id="5" name="직사각형 4">
-            <a:extLst>
-              <a:ext uri="{FF2B5EF4-FFF2-40B4-BE49-F238E27FC236}">
-                <a16:creationId xmlns:a16="http://schemas.microsoft.com/office/drawing/2014/main" id="{BD78AF27-28EB-EDBB-BDD9-7BDEDA5FBD76}"/>
-              </a:ext>
-            </a:extLst>
-          </p:cNvPr>
-          <p:cNvSpPr/>
-          <p:nvPr/>
-        </p:nvSpPr>
-        <p:spPr>
-          <a:xfrm>
-            <a:off x="9681119" y="1670422"/>
-            <a:ext cx="1440000" cy="1260000"/>
-          </a:xfrm>
-          <a:prstGeom prst="rect">
-            <a:avLst/>
-          </a:prstGeom>
-          <a:solidFill>
-            <a:schemeClr val="bg1"/>
-          </a:solidFill>
-          <a:ln>
+              <a:headEnd type="triangle"/>
+              <a:tailEnd type="triangle"/>
+            </a:ln>
+          </p:spPr>
+          <p:style>
+            <a:lnRef idx="1">
+              <a:schemeClr val="accent1"/>
+            </a:lnRef>
+            <a:fillRef idx="0">
+              <a:schemeClr val="accent1"/>
+            </a:fillRef>
+            <a:effectRef idx="0">
+              <a:schemeClr val="accent1"/>
+            </a:effectRef>
+            <a:fontRef idx="minor">
+              <a:schemeClr val="tx1"/>
+            </a:fontRef>
+          </p:style>
+        </p:cxnSp>
+        <p:sp>
+          <p:nvSpPr>
+            <p:cNvPr id="14" name="직사각형 13">
+              <a:extLst>
+                <a:ext uri="{FF2B5EF4-FFF2-40B4-BE49-F238E27FC236}">
+                  <a16:creationId xmlns:a16="http://schemas.microsoft.com/office/drawing/2014/main" id="{7865EE4F-E217-8D60-114C-891BBBCDC0F5}"/>
+                </a:ext>
+              </a:extLst>
+            </p:cNvPr>
+            <p:cNvSpPr/>
+            <p:nvPr/>
+          </p:nvSpPr>
+          <p:spPr>
+            <a:xfrm>
+              <a:off x="3374771" y="2084421"/>
+              <a:ext cx="1260000" cy="432000"/>
+            </a:xfrm>
+            <a:prstGeom prst="rect">
+              <a:avLst/>
+            </a:prstGeom>
             <a:solidFill>
-              <a:schemeClr val="tx1"/>
+              <a:schemeClr val="bg1"/>
             </a:solidFill>
-          </a:ln>
-        </p:spPr>
-        <p:style>
-          <a:lnRef idx="2">
-            <a:schemeClr val="accent1">
-              <a:shade val="15000"/>
-            </a:schemeClr>
-          </a:lnRef>
-          <a:fillRef idx="1">
-            <a:schemeClr val="accent1"/>
-          </a:fillRef>
-          <a:effectRef idx="0">
-            <a:schemeClr val="accent1"/>
-          </a:effectRef>
-          <a:fontRef idx="minor">
-            <a:schemeClr val="lt1"/>
-          </a:fontRef>
-        </p:style>
-        <p:txBody>
-          <a:bodyPr rtlCol="0" anchor="ctr"/>
-          <a:lstStyle/>
-          <a:p>
-            <a:pPr algn="ctr"/>
-            <a:r>
-              <a:rPr lang="en-US" altLang="ko-KR" dirty="0">
+            <a:ln>
+              <a:solidFill>
+                <a:schemeClr val="tx1"/>
+              </a:solidFill>
+            </a:ln>
+          </p:spPr>
+          <p:style>
+            <a:lnRef idx="2">
+              <a:schemeClr val="accent1">
+                <a:shade val="15000"/>
+              </a:schemeClr>
+            </a:lnRef>
+            <a:fillRef idx="1">
+              <a:schemeClr val="accent1"/>
+            </a:fillRef>
+            <a:effectRef idx="0">
+              <a:schemeClr val="accent1"/>
+            </a:effectRef>
+            <a:fontRef idx="minor">
+              <a:schemeClr val="lt1"/>
+            </a:fontRef>
+          </p:style>
+          <p:txBody>
+            <a:bodyPr rtlCol="0" anchor="ctr"/>
+            <a:lstStyle/>
+            <a:p>
+              <a:pPr algn="ctr"/>
+              <a:r>
+                <a:rPr lang="en-US" altLang="ko-KR" sz="1600" dirty="0">
+                  <a:solidFill>
+                    <a:sysClr val="windowText" lastClr="000000"/>
+                  </a:solidFill>
+                  <a:latin typeface="DengXian" panose="02010600030101010101" pitchFamily="2" charset="-122"/>
+                  <a:ea typeface="DengXian" panose="02010600030101010101" pitchFamily="2" charset="-122"/>
+                </a:rPr>
+                <a:t>RabbitMQ</a:t>
+              </a:r>
+              <a:endParaRPr lang="ko-KR" altLang="en-US" sz="1600" dirty="0">
                 <a:solidFill>
                   <a:sysClr val="windowText" lastClr="000000"/>
                 </a:solidFill>
                 <a:latin typeface="DengXian" panose="02010600030101010101" pitchFamily="2" charset="-122"/>
-                <a:ea typeface="DengXian" panose="02010600030101010101" pitchFamily="2" charset="-122"/>
-              </a:rPr>
-              <a:t>Front End Server</a:t>
-            </a:r>
-            <a:endParaRPr lang="ko-KR" altLang="en-US" dirty="0">
-              <a:solidFill>
-                <a:sysClr val="windowText" lastClr="000000"/>
-              </a:solidFill>
-              <a:latin typeface="DengXian" panose="02010600030101010101" pitchFamily="2" charset="-122"/>
-            </a:endParaRPr>
-          </a:p>
-        </p:txBody>
-      </p:sp>
-      <p:cxnSp>
-        <p:nvCxnSpPr>
-          <p:cNvPr id="7" name="직선 화살표 연결선 6">
-            <a:extLst>
-              <a:ext uri="{FF2B5EF4-FFF2-40B4-BE49-F238E27FC236}">
-                <a16:creationId xmlns:a16="http://schemas.microsoft.com/office/drawing/2014/main" id="{EB73D0C1-90F7-3B0C-BBEA-58F92E3E93F1}"/>
-              </a:ext>
-            </a:extLst>
-          </p:cNvPr>
-          <p:cNvCxnSpPr>
-            <a:stCxn id="3" idx="3"/>
-            <a:endCxn id="5" idx="1"/>
-          </p:cNvCxnSpPr>
-          <p:nvPr/>
-        </p:nvCxnSpPr>
-        <p:spPr>
-          <a:xfrm>
-            <a:off x="6604974" y="2300422"/>
-            <a:ext cx="3076145" cy="0"/>
-          </a:xfrm>
-          <a:prstGeom prst="straightConnector1">
-            <a:avLst/>
-          </a:prstGeom>
-          <a:ln w="12700">
-            <a:solidFill>
-              <a:schemeClr val="tx1"/>
-            </a:solidFill>
-            <a:headEnd type="triangle"/>
-            <a:tailEnd type="triangle"/>
-          </a:ln>
-        </p:spPr>
-        <p:style>
-          <a:lnRef idx="1">
-            <a:schemeClr val="accent1"/>
-          </a:lnRef>
-          <a:fillRef idx="0">
-            <a:schemeClr val="accent1"/>
-          </a:fillRef>
-          <a:effectRef idx="0">
-            <a:schemeClr val="accent1"/>
-          </a:effectRef>
-          <a:fontRef idx="minor">
-            <a:schemeClr val="tx1"/>
-          </a:fontRef>
-        </p:style>
-      </p:cxnSp>
-      <p:cxnSp>
-        <p:nvCxnSpPr>
-          <p:cNvPr id="9" name="직선 화살표 연결선 8">
-            <a:extLst>
-              <a:ext uri="{FF2B5EF4-FFF2-40B4-BE49-F238E27FC236}">
-                <a16:creationId xmlns:a16="http://schemas.microsoft.com/office/drawing/2014/main" id="{713B124D-B524-07D5-5E8D-AB1362574053}"/>
-              </a:ext>
-            </a:extLst>
-          </p:cNvPr>
-          <p:cNvCxnSpPr>
-            <a:stCxn id="4" idx="3"/>
-            <a:endCxn id="3" idx="1"/>
-          </p:cNvCxnSpPr>
-          <p:nvPr/>
-        </p:nvCxnSpPr>
-        <p:spPr>
-          <a:xfrm>
-            <a:off x="2808829" y="2300422"/>
-            <a:ext cx="2356145" cy="0"/>
-          </a:xfrm>
-          <a:prstGeom prst="straightConnector1">
-            <a:avLst/>
-          </a:prstGeom>
-          <a:ln w="12700">
-            <a:solidFill>
-              <a:schemeClr val="tx1"/>
-            </a:solidFill>
-            <a:headEnd type="triangle"/>
-            <a:tailEnd type="triangle"/>
-          </a:ln>
-        </p:spPr>
-        <p:style>
-          <a:lnRef idx="1">
-            <a:schemeClr val="accent1"/>
-          </a:lnRef>
-          <a:fillRef idx="0">
-            <a:schemeClr val="accent1"/>
-          </a:fillRef>
-          <a:effectRef idx="0">
-            <a:schemeClr val="accent1"/>
-          </a:effectRef>
-          <a:fontRef idx="minor">
-            <a:schemeClr val="tx1"/>
-          </a:fontRef>
-        </p:style>
-      </p:cxnSp>
-      <p:sp>
-        <p:nvSpPr>
-          <p:cNvPr id="10" name="원통형 9">
-            <a:extLst>
-              <a:ext uri="{FF2B5EF4-FFF2-40B4-BE49-F238E27FC236}">
-                <a16:creationId xmlns:a16="http://schemas.microsoft.com/office/drawing/2014/main" id="{78F0731F-44E9-7768-60E2-4FD11815AC52}"/>
-              </a:ext>
-            </a:extLst>
-          </p:cNvPr>
-          <p:cNvSpPr/>
-          <p:nvPr/>
-        </p:nvSpPr>
-        <p:spPr>
-          <a:xfrm>
-            <a:off x="5164974" y="3560421"/>
-            <a:ext cx="1440000" cy="1260000"/>
-          </a:xfrm>
-          <a:prstGeom prst="can">
-            <a:avLst/>
-          </a:prstGeom>
-          <a:solidFill>
-            <a:schemeClr val="bg1"/>
-          </a:solidFill>
-          <a:ln>
-            <a:solidFill>
-              <a:schemeClr val="tx1"/>
-            </a:solidFill>
-          </a:ln>
-        </p:spPr>
-        <p:style>
-          <a:lnRef idx="2">
-            <a:schemeClr val="accent1">
-              <a:shade val="15000"/>
-            </a:schemeClr>
-          </a:lnRef>
-          <a:fillRef idx="1">
-            <a:schemeClr val="accent1"/>
-          </a:fillRef>
-          <a:effectRef idx="0">
-            <a:schemeClr val="accent1"/>
-          </a:effectRef>
-          <a:fontRef idx="minor">
-            <a:schemeClr val="lt1"/>
-          </a:fontRef>
-        </p:style>
-        <p:txBody>
-          <a:bodyPr rtlCol="0" anchor="ctr"/>
-          <a:lstStyle/>
-          <a:p>
-            <a:pPr algn="ctr"/>
-            <a:r>
-              <a:rPr lang="en-US" altLang="ko-KR" dirty="0">
-                <a:solidFill>
-                  <a:sysClr val="windowText" lastClr="000000"/>
-                </a:solidFill>
+              </a:endParaRPr>
+            </a:p>
+          </p:txBody>
+        </p:sp>
+        <p:sp>
+          <p:nvSpPr>
+            <p:cNvPr id="24" name="TextBox 23">
+              <a:extLst>
+                <a:ext uri="{FF2B5EF4-FFF2-40B4-BE49-F238E27FC236}">
+                  <a16:creationId xmlns:a16="http://schemas.microsoft.com/office/drawing/2014/main" id="{CF463833-0D55-AC43-0C4B-4A92F200020D}"/>
+                </a:ext>
+              </a:extLst>
+            </p:cNvPr>
+            <p:cNvSpPr txBox="1"/>
+            <p:nvPr/>
+          </p:nvSpPr>
+          <p:spPr>
+            <a:xfrm>
+              <a:off x="764771" y="4373613"/>
+              <a:ext cx="180000" cy="369332"/>
+            </a:xfrm>
+            <a:prstGeom prst="rect">
+              <a:avLst/>
+            </a:prstGeom>
+            <a:noFill/>
+          </p:spPr>
+          <p:txBody>
+            <a:bodyPr wrap="square" rtlCol="0">
+              <a:spAutoFit/>
+            </a:bodyPr>
+            <a:lstStyle/>
+            <a:p>
+              <a:r>
+                <a:rPr lang="en-US" altLang="ko-KR" dirty="0">
+                  <a:latin typeface="DengXian" panose="02010600030101010101" pitchFamily="2" charset="-122"/>
+                </a:rPr>
+                <a:t> </a:t>
+              </a:r>
+              <a:endParaRPr lang="ko-KR" altLang="en-US" dirty="0">
                 <a:latin typeface="DengXian" panose="02010600030101010101" pitchFamily="2" charset="-122"/>
-                <a:ea typeface="DengXian" panose="02010600030101010101" pitchFamily="2" charset="-122"/>
-              </a:rPr>
-              <a:t>DB</a:t>
-            </a:r>
-            <a:endParaRPr lang="ko-KR" altLang="en-US" dirty="0">
-              <a:solidFill>
-                <a:sysClr val="windowText" lastClr="000000"/>
-              </a:solidFill>
-              <a:latin typeface="DengXian" panose="02010600030101010101" pitchFamily="2" charset="-122"/>
-            </a:endParaRPr>
-          </a:p>
-        </p:txBody>
-      </p:sp>
-      <p:cxnSp>
-        <p:nvCxnSpPr>
-          <p:cNvPr id="12" name="직선 화살표 연결선 11">
-            <a:extLst>
-              <a:ext uri="{FF2B5EF4-FFF2-40B4-BE49-F238E27FC236}">
-                <a16:creationId xmlns:a16="http://schemas.microsoft.com/office/drawing/2014/main" id="{E8DE0A0D-C59E-AEFE-BB41-0A97AAC5CD81}"/>
-              </a:ext>
-            </a:extLst>
-          </p:cNvPr>
-          <p:cNvCxnSpPr>
-            <a:stCxn id="3" idx="2"/>
-            <a:endCxn id="10" idx="1"/>
-          </p:cNvCxnSpPr>
-          <p:nvPr/>
-        </p:nvCxnSpPr>
-        <p:spPr>
-          <a:xfrm>
-            <a:off x="5884974" y="2930422"/>
-            <a:ext cx="0" cy="629999"/>
-          </a:xfrm>
-          <a:prstGeom prst="straightConnector1">
-            <a:avLst/>
-          </a:prstGeom>
-          <a:ln w="12700">
-            <a:solidFill>
-              <a:schemeClr val="tx1"/>
-            </a:solidFill>
-            <a:headEnd type="triangle"/>
-            <a:tailEnd type="triangle"/>
-          </a:ln>
-        </p:spPr>
-        <p:style>
-          <a:lnRef idx="1">
-            <a:schemeClr val="accent1"/>
-          </a:lnRef>
-          <a:fillRef idx="0">
-            <a:schemeClr val="accent1"/>
-          </a:fillRef>
-          <a:effectRef idx="0">
-            <a:schemeClr val="accent1"/>
-          </a:effectRef>
-          <a:fontRef idx="minor">
-            <a:schemeClr val="tx1"/>
-          </a:fontRef>
-        </p:style>
-      </p:cxnSp>
-      <p:sp>
-        <p:nvSpPr>
-          <p:cNvPr id="14" name="직사각형 13">
-            <a:extLst>
-              <a:ext uri="{FF2B5EF4-FFF2-40B4-BE49-F238E27FC236}">
-                <a16:creationId xmlns:a16="http://schemas.microsoft.com/office/drawing/2014/main" id="{7865EE4F-E217-8D60-114C-891BBBCDC0F5}"/>
-              </a:ext>
-            </a:extLst>
-          </p:cNvPr>
-          <p:cNvSpPr/>
-          <p:nvPr/>
-        </p:nvSpPr>
-        <p:spPr>
-          <a:xfrm>
-            <a:off x="3374771" y="2084421"/>
-            <a:ext cx="1260000" cy="432000"/>
-          </a:xfrm>
-          <a:prstGeom prst="rect">
-            <a:avLst/>
-          </a:prstGeom>
-          <a:solidFill>
-            <a:schemeClr val="bg1"/>
-          </a:solidFill>
-          <a:ln>
-            <a:solidFill>
-              <a:schemeClr val="tx1"/>
-            </a:solidFill>
-          </a:ln>
-        </p:spPr>
-        <p:style>
-          <a:lnRef idx="2">
-            <a:schemeClr val="accent1">
-              <a:shade val="15000"/>
-            </a:schemeClr>
-          </a:lnRef>
-          <a:fillRef idx="1">
-            <a:schemeClr val="accent1"/>
-          </a:fillRef>
-          <a:effectRef idx="0">
-            <a:schemeClr val="accent1"/>
-          </a:effectRef>
-          <a:fontRef idx="minor">
-            <a:schemeClr val="lt1"/>
-          </a:fontRef>
-        </p:style>
-        <p:txBody>
-          <a:bodyPr rtlCol="0" anchor="ctr"/>
-          <a:lstStyle/>
-          <a:p>
-            <a:pPr algn="ctr"/>
-            <a:r>
-              <a:rPr lang="en-US" altLang="ko-KR" sz="1600" dirty="0">
-                <a:solidFill>
-                  <a:sysClr val="windowText" lastClr="000000"/>
-                </a:solidFill>
-                <a:latin typeface="DengXian" panose="02010600030101010101" pitchFamily="2" charset="-122"/>
-                <a:ea typeface="DengXian" panose="02010600030101010101" pitchFamily="2" charset="-122"/>
-              </a:rPr>
-              <a:t>RabbitMQ</a:t>
-            </a:r>
-            <a:endParaRPr lang="ko-KR" altLang="en-US" sz="1600" dirty="0">
-              <a:solidFill>
-                <a:sysClr val="windowText" lastClr="000000"/>
-              </a:solidFill>
-              <a:latin typeface="DengXian" panose="02010600030101010101" pitchFamily="2" charset="-122"/>
-            </a:endParaRPr>
-          </a:p>
-        </p:txBody>
-      </p:sp>
-      <p:sp>
-        <p:nvSpPr>
-          <p:cNvPr id="21" name="TextBox 20">
-            <a:extLst>
-              <a:ext uri="{FF2B5EF4-FFF2-40B4-BE49-F238E27FC236}">
-                <a16:creationId xmlns:a16="http://schemas.microsoft.com/office/drawing/2014/main" id="{37A20C1F-85BE-6623-1D92-B07251AB5AFB}"/>
-              </a:ext>
-            </a:extLst>
-          </p:cNvPr>
-          <p:cNvSpPr txBox="1"/>
-          <p:nvPr/>
-        </p:nvSpPr>
-        <p:spPr>
-          <a:xfrm>
-            <a:off x="944771" y="5003612"/>
-            <a:ext cx="2044058" cy="369332"/>
-          </a:xfrm>
-          <a:prstGeom prst="rect">
-            <a:avLst/>
-          </a:prstGeom>
-          <a:noFill/>
-        </p:spPr>
-        <p:txBody>
-          <a:bodyPr wrap="square" rtlCol="0">
-            <a:spAutoFit/>
-          </a:bodyPr>
-          <a:lstStyle/>
-          <a:p>
-            <a:r>
-              <a:rPr lang="en-US" altLang="ko-KR" dirty="0">
-                <a:latin typeface="DengXian" panose="02010600030101010101" pitchFamily="2" charset="-122"/>
-                <a:ea typeface="DengXian" panose="02010600030101010101" pitchFamily="2" charset="-122"/>
-              </a:rPr>
-              <a:t>Backend MSA</a:t>
-            </a:r>
-            <a:endParaRPr lang="ko-KR" altLang="en-US" dirty="0">
-              <a:latin typeface="DengXian" panose="02010600030101010101" pitchFamily="2" charset="-122"/>
-            </a:endParaRPr>
-          </a:p>
-        </p:txBody>
-      </p:sp>
-      <p:sp>
-        <p:nvSpPr>
-          <p:cNvPr id="24" name="TextBox 23">
-            <a:extLst>
-              <a:ext uri="{FF2B5EF4-FFF2-40B4-BE49-F238E27FC236}">
-                <a16:creationId xmlns:a16="http://schemas.microsoft.com/office/drawing/2014/main" id="{CF463833-0D55-AC43-0C4B-4A92F200020D}"/>
-              </a:ext>
-            </a:extLst>
-          </p:cNvPr>
-          <p:cNvSpPr txBox="1"/>
-          <p:nvPr/>
-        </p:nvSpPr>
-        <p:spPr>
-          <a:xfrm>
-            <a:off x="764771" y="4373613"/>
-            <a:ext cx="180000" cy="369332"/>
-          </a:xfrm>
-          <a:prstGeom prst="rect">
-            <a:avLst/>
-          </a:prstGeom>
-          <a:noFill/>
-        </p:spPr>
-        <p:txBody>
-          <a:bodyPr wrap="square" rtlCol="0">
-            <a:spAutoFit/>
-          </a:bodyPr>
-          <a:lstStyle/>
-          <a:p>
-            <a:r>
-              <a:rPr lang="en-US" altLang="ko-KR" dirty="0">
-                <a:latin typeface="DengXian" panose="02010600030101010101" pitchFamily="2" charset="-122"/>
-              </a:rPr>
-              <a:t> </a:t>
-            </a:r>
-            <a:endParaRPr lang="ko-KR" altLang="en-US" dirty="0">
-              <a:latin typeface="DengXian" panose="02010600030101010101" pitchFamily="2" charset="-122"/>
-            </a:endParaRPr>
-          </a:p>
-        </p:txBody>
-      </p:sp>
+              </a:endParaRPr>
+            </a:p>
+          </p:txBody>
+        </p:sp>
+      </p:grpSp>
       <p:sp>
         <p:nvSpPr>
           <p:cNvPr id="25" name="TextBox 24">

--- a/structure.pptx
+++ b/structure.pptx
@@ -2,18 +2,20 @@
 <file path=ppt/presentation.xml><?xml version="1.0" encoding="utf-8"?>
 <p:presentation xmlns:a="http://schemas.openxmlformats.org/drawingml/2006/main" xmlns:r="http://schemas.openxmlformats.org/officeDocument/2006/relationships" xmlns:p="http://schemas.openxmlformats.org/presentationml/2006/main" saveSubsetFonts="1">
   <p:sldMasterIdLst>
-    <p:sldMasterId id="2147483648" r:id="rId1"/>
+    <p:sldMasterId id="2147483660" r:id="rId1"/>
   </p:sldMasterIdLst>
   <p:sldIdLst>
     <p:sldId id="257" r:id="rId2"/>
+    <p:sldId id="258" r:id="rId3"/>
+    <p:sldId id="259" r:id="rId4"/>
   </p:sldIdLst>
-  <p:sldSz cx="12192000" cy="6858000"/>
+  <p:sldSz cx="21599525" cy="10799763"/>
   <p:notesSz cx="6858000" cy="9144000"/>
   <p:defaultTextStyle>
     <a:defPPr>
-      <a:defRPr lang="ko-KR"/>
+      <a:defRPr lang="en-US"/>
     </a:defPPr>
-    <a:lvl1pPr marL="0" algn="l" defTabSz="914400" rtl="0" eaLnBrk="1" latinLnBrk="1" hangingPunct="1">
+    <a:lvl1pPr marL="0" algn="l" defTabSz="457200" rtl="0" eaLnBrk="1" latinLnBrk="0" hangingPunct="1">
       <a:defRPr sz="1800" kern="1200">
         <a:solidFill>
           <a:schemeClr val="tx1"/>
@@ -23,7 +25,7 @@
         <a:cs typeface="+mn-cs"/>
       </a:defRPr>
     </a:lvl1pPr>
-    <a:lvl2pPr marL="457200" algn="l" defTabSz="914400" rtl="0" eaLnBrk="1" latinLnBrk="1" hangingPunct="1">
+    <a:lvl2pPr marL="457200" algn="l" defTabSz="457200" rtl="0" eaLnBrk="1" latinLnBrk="0" hangingPunct="1">
       <a:defRPr sz="1800" kern="1200">
         <a:solidFill>
           <a:schemeClr val="tx1"/>
@@ -33,7 +35,7 @@
         <a:cs typeface="+mn-cs"/>
       </a:defRPr>
     </a:lvl2pPr>
-    <a:lvl3pPr marL="914400" algn="l" defTabSz="914400" rtl="0" eaLnBrk="1" latinLnBrk="1" hangingPunct="1">
+    <a:lvl3pPr marL="914400" algn="l" defTabSz="457200" rtl="0" eaLnBrk="1" latinLnBrk="0" hangingPunct="1">
       <a:defRPr sz="1800" kern="1200">
         <a:solidFill>
           <a:schemeClr val="tx1"/>
@@ -43,7 +45,7 @@
         <a:cs typeface="+mn-cs"/>
       </a:defRPr>
     </a:lvl3pPr>
-    <a:lvl4pPr marL="1371600" algn="l" defTabSz="914400" rtl="0" eaLnBrk="1" latinLnBrk="1" hangingPunct="1">
+    <a:lvl4pPr marL="1371600" algn="l" defTabSz="457200" rtl="0" eaLnBrk="1" latinLnBrk="0" hangingPunct="1">
       <a:defRPr sz="1800" kern="1200">
         <a:solidFill>
           <a:schemeClr val="tx1"/>
@@ -53,7 +55,7 @@
         <a:cs typeface="+mn-cs"/>
       </a:defRPr>
     </a:lvl4pPr>
-    <a:lvl5pPr marL="1828800" algn="l" defTabSz="914400" rtl="0" eaLnBrk="1" latinLnBrk="1" hangingPunct="1">
+    <a:lvl5pPr marL="1828800" algn="l" defTabSz="457200" rtl="0" eaLnBrk="1" latinLnBrk="0" hangingPunct="1">
       <a:defRPr sz="1800" kern="1200">
         <a:solidFill>
           <a:schemeClr val="tx1"/>
@@ -63,7 +65,7 @@
         <a:cs typeface="+mn-cs"/>
       </a:defRPr>
     </a:lvl5pPr>
-    <a:lvl6pPr marL="2286000" algn="l" defTabSz="914400" rtl="0" eaLnBrk="1" latinLnBrk="1" hangingPunct="1">
+    <a:lvl6pPr marL="2286000" algn="l" defTabSz="457200" rtl="0" eaLnBrk="1" latinLnBrk="0" hangingPunct="1">
       <a:defRPr sz="1800" kern="1200">
         <a:solidFill>
           <a:schemeClr val="tx1"/>
@@ -73,7 +75,7 @@
         <a:cs typeface="+mn-cs"/>
       </a:defRPr>
     </a:lvl6pPr>
-    <a:lvl7pPr marL="2743200" algn="l" defTabSz="914400" rtl="0" eaLnBrk="1" latinLnBrk="1" hangingPunct="1">
+    <a:lvl7pPr marL="2743200" algn="l" defTabSz="457200" rtl="0" eaLnBrk="1" latinLnBrk="0" hangingPunct="1">
       <a:defRPr sz="1800" kern="1200">
         <a:solidFill>
           <a:schemeClr val="tx1"/>
@@ -83,7 +85,7 @@
         <a:cs typeface="+mn-cs"/>
       </a:defRPr>
     </a:lvl7pPr>
-    <a:lvl8pPr marL="3200400" algn="l" defTabSz="914400" rtl="0" eaLnBrk="1" latinLnBrk="1" hangingPunct="1">
+    <a:lvl8pPr marL="3200400" algn="l" defTabSz="457200" rtl="0" eaLnBrk="1" latinLnBrk="0" hangingPunct="1">
       <a:defRPr sz="1800" kern="1200">
         <a:solidFill>
           <a:schemeClr val="tx1"/>
@@ -93,7 +95,7 @@
         <a:cs typeface="+mn-cs"/>
       </a:defRPr>
     </a:lvl8pPr>
-    <a:lvl9pPr marL="3657600" algn="l" defTabSz="914400" rtl="0" eaLnBrk="1" latinLnBrk="1" hangingPunct="1">
+    <a:lvl9pPr marL="3657600" algn="l" defTabSz="457200" rtl="0" eaLnBrk="1" latinLnBrk="0" hangingPunct="1">
       <a:defRPr sz="1800" kern="1200">
         <a:solidFill>
           <a:schemeClr val="tx1"/>
@@ -131,13 +133,7 @@
       </p:grpSpPr>
       <p:sp>
         <p:nvSpPr>
-          <p:cNvPr id="2" name="제목 1">
-            <a:extLst>
-              <a:ext uri="{FF2B5EF4-FFF2-40B4-BE49-F238E27FC236}">
-                <a16:creationId xmlns:a16="http://schemas.microsoft.com/office/drawing/2014/main" id="{12C9F0D3-2353-BF60-F0EA-97B647D29041}"/>
-              </a:ext>
-            </a:extLst>
-          </p:cNvPr>
+          <p:cNvPr id="2" name="Title 1"/>
           <p:cNvSpPr>
             <a:spLocks noGrp="1"/>
           </p:cNvSpPr>
@@ -147,15 +143,15 @@
         </p:nvSpPr>
         <p:spPr>
           <a:xfrm>
-            <a:off x="1524000" y="1122363"/>
-            <a:ext cx="9144000" cy="2387600"/>
+            <a:off x="2699941" y="1767462"/>
+            <a:ext cx="16199644" cy="3759917"/>
           </a:xfrm>
         </p:spPr>
         <p:txBody>
           <a:bodyPr anchor="b"/>
           <a:lstStyle>
             <a:lvl1pPr algn="ctr">
-              <a:defRPr sz="6000"/>
+              <a:defRPr sz="9449"/>
             </a:lvl1pPr>
           </a:lstStyle>
           <a:p>
@@ -163,18 +159,13 @@
               <a:rPr lang="ko-KR" altLang="en-US"/>
               <a:t>마스터 제목 스타일 편집</a:t>
             </a:r>
-          </a:p>
-        </p:txBody>
-      </p:sp>
-      <p:sp>
-        <p:nvSpPr>
-          <p:cNvPr id="3" name="부제목 2">
-            <a:extLst>
-              <a:ext uri="{FF2B5EF4-FFF2-40B4-BE49-F238E27FC236}">
-                <a16:creationId xmlns:a16="http://schemas.microsoft.com/office/drawing/2014/main" id="{EDE93CDA-4D36-AF64-2AB5-BDA306F7A0AA}"/>
-              </a:ext>
-            </a:extLst>
-          </p:cNvPr>
+            <a:endParaRPr lang="en-US" dirty="0"/>
+          </a:p>
+        </p:txBody>
+      </p:sp>
+      <p:sp>
+        <p:nvSpPr>
+          <p:cNvPr id="3" name="Subtitle 2"/>
           <p:cNvSpPr>
             <a:spLocks noGrp="1"/>
           </p:cNvSpPr>
@@ -184,8 +175,8 @@
         </p:nvSpPr>
         <p:spPr>
           <a:xfrm>
-            <a:off x="1524000" y="3602038"/>
-            <a:ext cx="9144000" cy="1655762"/>
+            <a:off x="2699941" y="5672376"/>
+            <a:ext cx="16199644" cy="2607442"/>
           </a:xfrm>
         </p:spPr>
         <p:txBody>
@@ -193,39 +184,39 @@
           <a:lstStyle>
             <a:lvl1pPr marL="0" indent="0" algn="ctr">
               <a:buNone/>
-              <a:defRPr sz="2400"/>
+              <a:defRPr sz="3780"/>
             </a:lvl1pPr>
-            <a:lvl2pPr marL="457200" indent="0" algn="ctr">
+            <a:lvl2pPr marL="719999" indent="0" algn="ctr">
               <a:buNone/>
-              <a:defRPr sz="2000"/>
+              <a:defRPr sz="3150"/>
             </a:lvl2pPr>
-            <a:lvl3pPr marL="914400" indent="0" algn="ctr">
+            <a:lvl3pPr marL="1439997" indent="0" algn="ctr">
               <a:buNone/>
-              <a:defRPr sz="1800"/>
+              <a:defRPr sz="2835"/>
             </a:lvl3pPr>
-            <a:lvl4pPr marL="1371600" indent="0" algn="ctr">
+            <a:lvl4pPr marL="2159996" indent="0" algn="ctr">
               <a:buNone/>
-              <a:defRPr sz="1600"/>
+              <a:defRPr sz="2520"/>
             </a:lvl4pPr>
-            <a:lvl5pPr marL="1828800" indent="0" algn="ctr">
+            <a:lvl5pPr marL="2879994" indent="0" algn="ctr">
               <a:buNone/>
-              <a:defRPr sz="1600"/>
+              <a:defRPr sz="2520"/>
             </a:lvl5pPr>
-            <a:lvl6pPr marL="2286000" indent="0" algn="ctr">
+            <a:lvl6pPr marL="3599993" indent="0" algn="ctr">
               <a:buNone/>
-              <a:defRPr sz="1600"/>
+              <a:defRPr sz="2520"/>
             </a:lvl6pPr>
-            <a:lvl7pPr marL="2743200" indent="0" algn="ctr">
+            <a:lvl7pPr marL="4319991" indent="0" algn="ctr">
               <a:buNone/>
-              <a:defRPr sz="1600"/>
+              <a:defRPr sz="2520"/>
             </a:lvl7pPr>
-            <a:lvl8pPr marL="3200400" indent="0" algn="ctr">
+            <a:lvl8pPr marL="5039990" indent="0" algn="ctr">
               <a:buNone/>
-              <a:defRPr sz="1600"/>
+              <a:defRPr sz="2520"/>
             </a:lvl8pPr>
-            <a:lvl9pPr marL="3657600" indent="0" algn="ctr">
+            <a:lvl9pPr marL="5759988" indent="0" algn="ctr">
               <a:buNone/>
-              <a:defRPr sz="1600"/>
+              <a:defRPr sz="2520"/>
             </a:lvl9pPr>
           </a:lstStyle>
           <a:p>
@@ -233,18 +224,13 @@
               <a:rPr lang="ko-KR" altLang="en-US"/>
               <a:t>클릭하여 마스터 부제목 스타일 편집</a:t>
             </a:r>
-          </a:p>
-        </p:txBody>
-      </p:sp>
-      <p:sp>
-        <p:nvSpPr>
-          <p:cNvPr id="4" name="날짜 개체 틀 3">
-            <a:extLst>
-              <a:ext uri="{FF2B5EF4-FFF2-40B4-BE49-F238E27FC236}">
-                <a16:creationId xmlns:a16="http://schemas.microsoft.com/office/drawing/2014/main" id="{6551AAF7-5FF3-22B5-BB91-D200E341B34B}"/>
-              </a:ext>
-            </a:extLst>
-          </p:cNvPr>
+            <a:endParaRPr lang="en-US" dirty="0"/>
+          </a:p>
+        </p:txBody>
+      </p:sp>
+      <p:sp>
+        <p:nvSpPr>
+          <p:cNvPr id="4" name="Date Placeholder 3"/>
           <p:cNvSpPr>
             <a:spLocks noGrp="1"/>
           </p:cNvSpPr>
@@ -259,7 +245,7 @@
           <a:p>
             <a:fld id="{505BB82E-C503-4E54-B9F4-7F874FE65A6C}" type="datetimeFigureOut">
               <a:rPr lang="ko-KR" altLang="en-US" smtClean="0"/>
-              <a:t>2025-07-13</a:t>
+              <a:t>2025-09-01</a:t>
             </a:fld>
             <a:endParaRPr lang="ko-KR" altLang="en-US"/>
           </a:p>
@@ -267,13 +253,7 @@
       </p:sp>
       <p:sp>
         <p:nvSpPr>
-          <p:cNvPr id="5" name="바닥글 개체 틀 4">
-            <a:extLst>
-              <a:ext uri="{FF2B5EF4-FFF2-40B4-BE49-F238E27FC236}">
-                <a16:creationId xmlns:a16="http://schemas.microsoft.com/office/drawing/2014/main" id="{1598DB80-F793-5C11-FBF0-1A4BEA05076A}"/>
-              </a:ext>
-            </a:extLst>
-          </p:cNvPr>
+          <p:cNvPr id="5" name="Footer Placeholder 4"/>
           <p:cNvSpPr>
             <a:spLocks noGrp="1"/>
           </p:cNvSpPr>
@@ -292,13 +272,7 @@
       </p:sp>
       <p:sp>
         <p:nvSpPr>
-          <p:cNvPr id="6" name="슬라이드 번호 개체 틀 5">
-            <a:extLst>
-              <a:ext uri="{FF2B5EF4-FFF2-40B4-BE49-F238E27FC236}">
-                <a16:creationId xmlns:a16="http://schemas.microsoft.com/office/drawing/2014/main" id="{019725F5-81C2-0BA7-6A20-84DA41CE5D76}"/>
-              </a:ext>
-            </a:extLst>
-          </p:cNvPr>
+          <p:cNvPr id="6" name="Slide Number Placeholder 5"/>
           <p:cNvSpPr>
             <a:spLocks noGrp="1"/>
           </p:cNvSpPr>
@@ -322,7 +296,7 @@
     </p:spTree>
     <p:extLst>
       <p:ext uri="{BB962C8B-B14F-4D97-AF65-F5344CB8AC3E}">
-        <p14:creationId xmlns:p14="http://schemas.microsoft.com/office/powerpoint/2010/main" val="1877117747"/>
+        <p14:creationId xmlns:p14="http://schemas.microsoft.com/office/powerpoint/2010/main" val="4155293032"/>
       </p:ext>
     </p:extLst>
   </p:cSld>
@@ -351,13 +325,7 @@
       </p:grpSpPr>
       <p:sp>
         <p:nvSpPr>
-          <p:cNvPr id="2" name="제목 1">
-            <a:extLst>
-              <a:ext uri="{FF2B5EF4-FFF2-40B4-BE49-F238E27FC236}">
-                <a16:creationId xmlns:a16="http://schemas.microsoft.com/office/drawing/2014/main" id="{4849B1DD-6A07-F6F9-1AA6-61429A104235}"/>
-              </a:ext>
-            </a:extLst>
-          </p:cNvPr>
+          <p:cNvPr id="2" name="Title 1"/>
           <p:cNvSpPr>
             <a:spLocks noGrp="1"/>
           </p:cNvSpPr>
@@ -374,18 +342,13 @@
               <a:rPr lang="ko-KR" altLang="en-US"/>
               <a:t>마스터 제목 스타일 편집</a:t>
             </a:r>
-          </a:p>
-        </p:txBody>
-      </p:sp>
-      <p:sp>
-        <p:nvSpPr>
-          <p:cNvPr id="3" name="세로 텍스트 개체 틀 2">
-            <a:extLst>
-              <a:ext uri="{FF2B5EF4-FFF2-40B4-BE49-F238E27FC236}">
-                <a16:creationId xmlns:a16="http://schemas.microsoft.com/office/drawing/2014/main" id="{B18966DA-3330-7B0E-20F4-9DEDB16334BE}"/>
-              </a:ext>
-            </a:extLst>
-          </p:cNvPr>
+            <a:endParaRPr lang="en-US" dirty="0"/>
+          </a:p>
+        </p:txBody>
+      </p:sp>
+      <p:sp>
+        <p:nvSpPr>
+          <p:cNvPr id="3" name="Vertical Text Placeholder 2"/>
           <p:cNvSpPr>
             <a:spLocks noGrp="1"/>
           </p:cNvSpPr>
@@ -431,18 +394,13 @@
               <a:rPr lang="ko-KR" altLang="en-US"/>
               <a:t>다섯 번째 수준</a:t>
             </a:r>
-          </a:p>
-        </p:txBody>
-      </p:sp>
-      <p:sp>
-        <p:nvSpPr>
-          <p:cNvPr id="4" name="날짜 개체 틀 3">
-            <a:extLst>
-              <a:ext uri="{FF2B5EF4-FFF2-40B4-BE49-F238E27FC236}">
-                <a16:creationId xmlns:a16="http://schemas.microsoft.com/office/drawing/2014/main" id="{0F1FFC96-39D1-2E52-D567-E2A78B166F2E}"/>
-              </a:ext>
-            </a:extLst>
-          </p:cNvPr>
+            <a:endParaRPr lang="en-US" dirty="0"/>
+          </a:p>
+        </p:txBody>
+      </p:sp>
+      <p:sp>
+        <p:nvSpPr>
+          <p:cNvPr id="4" name="Date Placeholder 3"/>
           <p:cNvSpPr>
             <a:spLocks noGrp="1"/>
           </p:cNvSpPr>
@@ -457,7 +415,7 @@
           <a:p>
             <a:fld id="{505BB82E-C503-4E54-B9F4-7F874FE65A6C}" type="datetimeFigureOut">
               <a:rPr lang="ko-KR" altLang="en-US" smtClean="0"/>
-              <a:t>2025-07-13</a:t>
+              <a:t>2025-09-01</a:t>
             </a:fld>
             <a:endParaRPr lang="ko-KR" altLang="en-US"/>
           </a:p>
@@ -465,13 +423,7 @@
       </p:sp>
       <p:sp>
         <p:nvSpPr>
-          <p:cNvPr id="5" name="바닥글 개체 틀 4">
-            <a:extLst>
-              <a:ext uri="{FF2B5EF4-FFF2-40B4-BE49-F238E27FC236}">
-                <a16:creationId xmlns:a16="http://schemas.microsoft.com/office/drawing/2014/main" id="{C8D0362E-70B2-7657-4174-308151556A24}"/>
-              </a:ext>
-            </a:extLst>
-          </p:cNvPr>
+          <p:cNvPr id="5" name="Footer Placeholder 4"/>
           <p:cNvSpPr>
             <a:spLocks noGrp="1"/>
           </p:cNvSpPr>
@@ -490,13 +442,7 @@
       </p:sp>
       <p:sp>
         <p:nvSpPr>
-          <p:cNvPr id="6" name="슬라이드 번호 개체 틀 5">
-            <a:extLst>
-              <a:ext uri="{FF2B5EF4-FFF2-40B4-BE49-F238E27FC236}">
-                <a16:creationId xmlns:a16="http://schemas.microsoft.com/office/drawing/2014/main" id="{36841ED2-2BAB-0535-B218-E4B2F7EC4957}"/>
-              </a:ext>
-            </a:extLst>
-          </p:cNvPr>
+          <p:cNvPr id="6" name="Slide Number Placeholder 5"/>
           <p:cNvSpPr>
             <a:spLocks noGrp="1"/>
           </p:cNvSpPr>
@@ -520,7 +466,7 @@
     </p:spTree>
     <p:extLst>
       <p:ext uri="{BB962C8B-B14F-4D97-AF65-F5344CB8AC3E}">
-        <p14:creationId xmlns:p14="http://schemas.microsoft.com/office/powerpoint/2010/main" val="2521223270"/>
+        <p14:creationId xmlns:p14="http://schemas.microsoft.com/office/powerpoint/2010/main" val="731816100"/>
       </p:ext>
     </p:extLst>
   </p:cSld>
@@ -549,13 +495,7 @@
       </p:grpSpPr>
       <p:sp>
         <p:nvSpPr>
-          <p:cNvPr id="2" name="세로 제목 1">
-            <a:extLst>
-              <a:ext uri="{FF2B5EF4-FFF2-40B4-BE49-F238E27FC236}">
-                <a16:creationId xmlns:a16="http://schemas.microsoft.com/office/drawing/2014/main" id="{41DD1FF6-EA39-499A-6EAD-A7429C188FFF}"/>
-              </a:ext>
-            </a:extLst>
-          </p:cNvPr>
+          <p:cNvPr id="2" name="Vertical Title 1"/>
           <p:cNvSpPr>
             <a:spLocks noGrp="1"/>
           </p:cNvSpPr>
@@ -565,8 +505,8 @@
         </p:nvSpPr>
         <p:spPr>
           <a:xfrm>
-            <a:off x="8724900" y="365125"/>
-            <a:ext cx="2628900" cy="5811838"/>
+            <a:off x="15457160" y="574987"/>
+            <a:ext cx="4657398" cy="9152300"/>
           </a:xfrm>
         </p:spPr>
         <p:txBody>
@@ -577,18 +517,13 @@
               <a:rPr lang="ko-KR" altLang="en-US"/>
               <a:t>마스터 제목 스타일 편집</a:t>
             </a:r>
-          </a:p>
-        </p:txBody>
-      </p:sp>
-      <p:sp>
-        <p:nvSpPr>
-          <p:cNvPr id="3" name="세로 텍스트 개체 틀 2">
-            <a:extLst>
-              <a:ext uri="{FF2B5EF4-FFF2-40B4-BE49-F238E27FC236}">
-                <a16:creationId xmlns:a16="http://schemas.microsoft.com/office/drawing/2014/main" id="{73E17756-E4AC-B48C-51AC-0C9ABE2E5D79}"/>
-              </a:ext>
-            </a:extLst>
-          </p:cNvPr>
+            <a:endParaRPr lang="en-US" dirty="0"/>
+          </a:p>
+        </p:txBody>
+      </p:sp>
+      <p:sp>
+        <p:nvSpPr>
+          <p:cNvPr id="3" name="Vertical Text Placeholder 2"/>
           <p:cNvSpPr>
             <a:spLocks noGrp="1"/>
           </p:cNvSpPr>
@@ -598,8 +533,8 @@
         </p:nvSpPr>
         <p:spPr>
           <a:xfrm>
-            <a:off x="838200" y="365125"/>
-            <a:ext cx="7734300" cy="5811838"/>
+            <a:off x="1484967" y="574987"/>
+            <a:ext cx="13702199" cy="9152300"/>
           </a:xfrm>
         </p:spPr>
         <p:txBody>
@@ -639,18 +574,13 @@
               <a:rPr lang="ko-KR" altLang="en-US"/>
               <a:t>다섯 번째 수준</a:t>
             </a:r>
-          </a:p>
-        </p:txBody>
-      </p:sp>
-      <p:sp>
-        <p:nvSpPr>
-          <p:cNvPr id="4" name="날짜 개체 틀 3">
-            <a:extLst>
-              <a:ext uri="{FF2B5EF4-FFF2-40B4-BE49-F238E27FC236}">
-                <a16:creationId xmlns:a16="http://schemas.microsoft.com/office/drawing/2014/main" id="{9B5A076E-D706-7768-BD55-8334B0C879B4}"/>
-              </a:ext>
-            </a:extLst>
-          </p:cNvPr>
+            <a:endParaRPr lang="en-US" dirty="0"/>
+          </a:p>
+        </p:txBody>
+      </p:sp>
+      <p:sp>
+        <p:nvSpPr>
+          <p:cNvPr id="4" name="Date Placeholder 3"/>
           <p:cNvSpPr>
             <a:spLocks noGrp="1"/>
           </p:cNvSpPr>
@@ -665,7 +595,7 @@
           <a:p>
             <a:fld id="{505BB82E-C503-4E54-B9F4-7F874FE65A6C}" type="datetimeFigureOut">
               <a:rPr lang="ko-KR" altLang="en-US" smtClean="0"/>
-              <a:t>2025-07-13</a:t>
+              <a:t>2025-09-01</a:t>
             </a:fld>
             <a:endParaRPr lang="ko-KR" altLang="en-US"/>
           </a:p>
@@ -673,13 +603,7 @@
       </p:sp>
       <p:sp>
         <p:nvSpPr>
-          <p:cNvPr id="5" name="바닥글 개체 틀 4">
-            <a:extLst>
-              <a:ext uri="{FF2B5EF4-FFF2-40B4-BE49-F238E27FC236}">
-                <a16:creationId xmlns:a16="http://schemas.microsoft.com/office/drawing/2014/main" id="{81A314BC-3D36-5A00-DDB6-E1C63FE25CFE}"/>
-              </a:ext>
-            </a:extLst>
-          </p:cNvPr>
+          <p:cNvPr id="5" name="Footer Placeholder 4"/>
           <p:cNvSpPr>
             <a:spLocks noGrp="1"/>
           </p:cNvSpPr>
@@ -698,13 +622,7 @@
       </p:sp>
       <p:sp>
         <p:nvSpPr>
-          <p:cNvPr id="6" name="슬라이드 번호 개체 틀 5">
-            <a:extLst>
-              <a:ext uri="{FF2B5EF4-FFF2-40B4-BE49-F238E27FC236}">
-                <a16:creationId xmlns:a16="http://schemas.microsoft.com/office/drawing/2014/main" id="{F74A0568-9BCA-8E99-E1E8-455A9F3022A1}"/>
-              </a:ext>
-            </a:extLst>
-          </p:cNvPr>
+          <p:cNvPr id="6" name="Slide Number Placeholder 5"/>
           <p:cNvSpPr>
             <a:spLocks noGrp="1"/>
           </p:cNvSpPr>
@@ -728,7 +646,7 @@
     </p:spTree>
     <p:extLst>
       <p:ext uri="{BB962C8B-B14F-4D97-AF65-F5344CB8AC3E}">
-        <p14:creationId xmlns:p14="http://schemas.microsoft.com/office/powerpoint/2010/main" val="2133785304"/>
+        <p14:creationId xmlns:p14="http://schemas.microsoft.com/office/powerpoint/2010/main" val="3042813413"/>
       </p:ext>
     </p:extLst>
   </p:cSld>
@@ -757,13 +675,7 @@
       </p:grpSpPr>
       <p:sp>
         <p:nvSpPr>
-          <p:cNvPr id="2" name="제목 1">
-            <a:extLst>
-              <a:ext uri="{FF2B5EF4-FFF2-40B4-BE49-F238E27FC236}">
-                <a16:creationId xmlns:a16="http://schemas.microsoft.com/office/drawing/2014/main" id="{AE5AFC6E-DF0C-E99E-BE4C-6915EAEEC0D9}"/>
-              </a:ext>
-            </a:extLst>
-          </p:cNvPr>
+          <p:cNvPr id="2" name="Title 1"/>
           <p:cNvSpPr>
             <a:spLocks noGrp="1"/>
           </p:cNvSpPr>
@@ -780,18 +692,13 @@
               <a:rPr lang="ko-KR" altLang="en-US"/>
               <a:t>마스터 제목 스타일 편집</a:t>
             </a:r>
-          </a:p>
-        </p:txBody>
-      </p:sp>
-      <p:sp>
-        <p:nvSpPr>
-          <p:cNvPr id="3" name="내용 개체 틀 2">
-            <a:extLst>
-              <a:ext uri="{FF2B5EF4-FFF2-40B4-BE49-F238E27FC236}">
-                <a16:creationId xmlns:a16="http://schemas.microsoft.com/office/drawing/2014/main" id="{F816AFAD-54F1-557B-9C38-645D5DAB7A4A}"/>
-              </a:ext>
-            </a:extLst>
-          </p:cNvPr>
+            <a:endParaRPr lang="en-US" dirty="0"/>
+          </a:p>
+        </p:txBody>
+      </p:sp>
+      <p:sp>
+        <p:nvSpPr>
+          <p:cNvPr id="3" name="Content Placeholder 2"/>
           <p:cNvSpPr>
             <a:spLocks noGrp="1"/>
           </p:cNvSpPr>
@@ -837,18 +744,13 @@
               <a:rPr lang="ko-KR" altLang="en-US"/>
               <a:t>다섯 번째 수준</a:t>
             </a:r>
-          </a:p>
-        </p:txBody>
-      </p:sp>
-      <p:sp>
-        <p:nvSpPr>
-          <p:cNvPr id="4" name="날짜 개체 틀 3">
-            <a:extLst>
-              <a:ext uri="{FF2B5EF4-FFF2-40B4-BE49-F238E27FC236}">
-                <a16:creationId xmlns:a16="http://schemas.microsoft.com/office/drawing/2014/main" id="{F6A15D8F-C261-D276-F09E-6C6AC3ECFA7C}"/>
-              </a:ext>
-            </a:extLst>
-          </p:cNvPr>
+            <a:endParaRPr lang="en-US" dirty="0"/>
+          </a:p>
+        </p:txBody>
+      </p:sp>
+      <p:sp>
+        <p:nvSpPr>
+          <p:cNvPr id="4" name="Date Placeholder 3"/>
           <p:cNvSpPr>
             <a:spLocks noGrp="1"/>
           </p:cNvSpPr>
@@ -863,7 +765,7 @@
           <a:p>
             <a:fld id="{505BB82E-C503-4E54-B9F4-7F874FE65A6C}" type="datetimeFigureOut">
               <a:rPr lang="ko-KR" altLang="en-US" smtClean="0"/>
-              <a:t>2025-07-13</a:t>
+              <a:t>2025-09-01</a:t>
             </a:fld>
             <a:endParaRPr lang="ko-KR" altLang="en-US"/>
           </a:p>
@@ -871,13 +773,7 @@
       </p:sp>
       <p:sp>
         <p:nvSpPr>
-          <p:cNvPr id="5" name="바닥글 개체 틀 4">
-            <a:extLst>
-              <a:ext uri="{FF2B5EF4-FFF2-40B4-BE49-F238E27FC236}">
-                <a16:creationId xmlns:a16="http://schemas.microsoft.com/office/drawing/2014/main" id="{CF0E788C-D8AD-15B6-2F0A-FD86D6438A6F}"/>
-              </a:ext>
-            </a:extLst>
-          </p:cNvPr>
+          <p:cNvPr id="5" name="Footer Placeholder 4"/>
           <p:cNvSpPr>
             <a:spLocks noGrp="1"/>
           </p:cNvSpPr>
@@ -896,13 +792,7 @@
       </p:sp>
       <p:sp>
         <p:nvSpPr>
-          <p:cNvPr id="6" name="슬라이드 번호 개체 틀 5">
-            <a:extLst>
-              <a:ext uri="{FF2B5EF4-FFF2-40B4-BE49-F238E27FC236}">
-                <a16:creationId xmlns:a16="http://schemas.microsoft.com/office/drawing/2014/main" id="{32174412-53C8-D3E5-0FC6-5FF3D98DDDF0}"/>
-              </a:ext>
-            </a:extLst>
-          </p:cNvPr>
+          <p:cNvPr id="6" name="Slide Number Placeholder 5"/>
           <p:cNvSpPr>
             <a:spLocks noGrp="1"/>
           </p:cNvSpPr>
@@ -926,7 +816,7 @@
     </p:spTree>
     <p:extLst>
       <p:ext uri="{BB962C8B-B14F-4D97-AF65-F5344CB8AC3E}">
-        <p14:creationId xmlns:p14="http://schemas.microsoft.com/office/powerpoint/2010/main" val="3867630579"/>
+        <p14:creationId xmlns:p14="http://schemas.microsoft.com/office/powerpoint/2010/main" val="2876325475"/>
       </p:ext>
     </p:extLst>
   </p:cSld>
@@ -955,13 +845,7 @@
       </p:grpSpPr>
       <p:sp>
         <p:nvSpPr>
-          <p:cNvPr id="2" name="제목 1">
-            <a:extLst>
-              <a:ext uri="{FF2B5EF4-FFF2-40B4-BE49-F238E27FC236}">
-                <a16:creationId xmlns:a16="http://schemas.microsoft.com/office/drawing/2014/main" id="{66F8261A-994A-7118-A05A-681BAAEE2F8C}"/>
-              </a:ext>
-            </a:extLst>
-          </p:cNvPr>
+          <p:cNvPr id="2" name="Title 1"/>
           <p:cNvSpPr>
             <a:spLocks noGrp="1"/>
           </p:cNvSpPr>
@@ -971,15 +855,15 @@
         </p:nvSpPr>
         <p:spPr>
           <a:xfrm>
-            <a:off x="831850" y="1709738"/>
-            <a:ext cx="10515600" cy="2852737"/>
+            <a:off x="1473718" y="2692442"/>
+            <a:ext cx="18629590" cy="4492401"/>
           </a:xfrm>
         </p:spPr>
         <p:txBody>
           <a:bodyPr anchor="b"/>
           <a:lstStyle>
             <a:lvl1pPr>
-              <a:defRPr sz="6000"/>
+              <a:defRPr sz="9449"/>
             </a:lvl1pPr>
           </a:lstStyle>
           <a:p>
@@ -987,18 +871,13 @@
               <a:rPr lang="ko-KR" altLang="en-US"/>
               <a:t>마스터 제목 스타일 편집</a:t>
             </a:r>
-          </a:p>
-        </p:txBody>
-      </p:sp>
-      <p:sp>
-        <p:nvSpPr>
-          <p:cNvPr id="3" name="텍스트 개체 틀 2">
-            <a:extLst>
-              <a:ext uri="{FF2B5EF4-FFF2-40B4-BE49-F238E27FC236}">
-                <a16:creationId xmlns:a16="http://schemas.microsoft.com/office/drawing/2014/main" id="{54460FE4-07D0-A181-69F9-BE41F0A09A21}"/>
-              </a:ext>
-            </a:extLst>
-          </p:cNvPr>
+            <a:endParaRPr lang="en-US" dirty="0"/>
+          </a:p>
+        </p:txBody>
+      </p:sp>
+      <p:sp>
+        <p:nvSpPr>
+          <p:cNvPr id="3" name="Text Placeholder 2"/>
           <p:cNvSpPr>
             <a:spLocks noGrp="1"/>
           </p:cNvSpPr>
@@ -1008,8 +887,8 @@
         </p:nvSpPr>
         <p:spPr>
           <a:xfrm>
-            <a:off x="831850" y="4589463"/>
-            <a:ext cx="10515600" cy="1500187"/>
+            <a:off x="1473718" y="7227343"/>
+            <a:ext cx="18629590" cy="2362447"/>
           </a:xfrm>
         </p:spPr>
         <p:txBody>
@@ -1017,7 +896,7 @@
           <a:lstStyle>
             <a:lvl1pPr marL="0" indent="0">
               <a:buNone/>
-              <a:defRPr sz="2400">
+              <a:defRPr sz="3780">
                 <a:solidFill>
                   <a:schemeClr val="tx1">
                     <a:tint val="75000"/>
@@ -1025,9 +904,9 @@
                 </a:solidFill>
               </a:defRPr>
             </a:lvl1pPr>
-            <a:lvl2pPr marL="457200" indent="0">
+            <a:lvl2pPr marL="719999" indent="0">
               <a:buNone/>
-              <a:defRPr sz="2000">
+              <a:defRPr sz="3150">
                 <a:solidFill>
                   <a:schemeClr val="tx1">
                     <a:tint val="75000"/>
@@ -1035,9 +914,9 @@
                 </a:solidFill>
               </a:defRPr>
             </a:lvl2pPr>
-            <a:lvl3pPr marL="914400" indent="0">
+            <a:lvl3pPr marL="1439997" indent="0">
               <a:buNone/>
-              <a:defRPr sz="1800">
+              <a:defRPr sz="2835">
                 <a:solidFill>
                   <a:schemeClr val="tx1">
                     <a:tint val="75000"/>
@@ -1045,9 +924,9 @@
                 </a:solidFill>
               </a:defRPr>
             </a:lvl3pPr>
-            <a:lvl4pPr marL="1371600" indent="0">
+            <a:lvl4pPr marL="2159996" indent="0">
               <a:buNone/>
-              <a:defRPr sz="1600">
+              <a:defRPr sz="2520">
                 <a:solidFill>
                   <a:schemeClr val="tx1">
                     <a:tint val="75000"/>
@@ -1055,9 +934,9 @@
                 </a:solidFill>
               </a:defRPr>
             </a:lvl4pPr>
-            <a:lvl5pPr marL="1828800" indent="0">
+            <a:lvl5pPr marL="2879994" indent="0">
               <a:buNone/>
-              <a:defRPr sz="1600">
+              <a:defRPr sz="2520">
                 <a:solidFill>
                   <a:schemeClr val="tx1">
                     <a:tint val="75000"/>
@@ -1065,9 +944,9 @@
                 </a:solidFill>
               </a:defRPr>
             </a:lvl5pPr>
-            <a:lvl6pPr marL="2286000" indent="0">
+            <a:lvl6pPr marL="3599993" indent="0">
               <a:buNone/>
-              <a:defRPr sz="1600">
+              <a:defRPr sz="2520">
                 <a:solidFill>
                   <a:schemeClr val="tx1">
                     <a:tint val="75000"/>
@@ -1075,9 +954,9 @@
                 </a:solidFill>
               </a:defRPr>
             </a:lvl6pPr>
-            <a:lvl7pPr marL="2743200" indent="0">
+            <a:lvl7pPr marL="4319991" indent="0">
               <a:buNone/>
-              <a:defRPr sz="1600">
+              <a:defRPr sz="2520">
                 <a:solidFill>
                   <a:schemeClr val="tx1">
                     <a:tint val="75000"/>
@@ -1085,9 +964,9 @@
                 </a:solidFill>
               </a:defRPr>
             </a:lvl7pPr>
-            <a:lvl8pPr marL="3200400" indent="0">
+            <a:lvl8pPr marL="5039990" indent="0">
               <a:buNone/>
-              <a:defRPr sz="1600">
+              <a:defRPr sz="2520">
                 <a:solidFill>
                   <a:schemeClr val="tx1">
                     <a:tint val="75000"/>
@@ -1095,9 +974,9 @@
                 </a:solidFill>
               </a:defRPr>
             </a:lvl8pPr>
-            <a:lvl9pPr marL="3657600" indent="0">
+            <a:lvl9pPr marL="5759988" indent="0">
               <a:buNone/>
-              <a:defRPr sz="1600">
+              <a:defRPr sz="2520">
                 <a:solidFill>
                   <a:schemeClr val="tx1">
                     <a:tint val="75000"/>
@@ -1117,13 +996,7 @@
       </p:sp>
       <p:sp>
         <p:nvSpPr>
-          <p:cNvPr id="4" name="날짜 개체 틀 3">
-            <a:extLst>
-              <a:ext uri="{FF2B5EF4-FFF2-40B4-BE49-F238E27FC236}">
-                <a16:creationId xmlns:a16="http://schemas.microsoft.com/office/drawing/2014/main" id="{40C85852-E4E7-5234-79CD-A11A093F84EA}"/>
-              </a:ext>
-            </a:extLst>
-          </p:cNvPr>
+          <p:cNvPr id="4" name="Date Placeholder 3"/>
           <p:cNvSpPr>
             <a:spLocks noGrp="1"/>
           </p:cNvSpPr>
@@ -1138,7 +1011,7 @@
           <a:p>
             <a:fld id="{505BB82E-C503-4E54-B9F4-7F874FE65A6C}" type="datetimeFigureOut">
               <a:rPr lang="ko-KR" altLang="en-US" smtClean="0"/>
-              <a:t>2025-07-13</a:t>
+              <a:t>2025-09-01</a:t>
             </a:fld>
             <a:endParaRPr lang="ko-KR" altLang="en-US"/>
           </a:p>
@@ -1146,13 +1019,7 @@
       </p:sp>
       <p:sp>
         <p:nvSpPr>
-          <p:cNvPr id="5" name="바닥글 개체 틀 4">
-            <a:extLst>
-              <a:ext uri="{FF2B5EF4-FFF2-40B4-BE49-F238E27FC236}">
-                <a16:creationId xmlns:a16="http://schemas.microsoft.com/office/drawing/2014/main" id="{1F76C98B-0CF1-4D05-A341-FE883322B567}"/>
-              </a:ext>
-            </a:extLst>
-          </p:cNvPr>
+          <p:cNvPr id="5" name="Footer Placeholder 4"/>
           <p:cNvSpPr>
             <a:spLocks noGrp="1"/>
           </p:cNvSpPr>
@@ -1171,13 +1038,7 @@
       </p:sp>
       <p:sp>
         <p:nvSpPr>
-          <p:cNvPr id="6" name="슬라이드 번호 개체 틀 5">
-            <a:extLst>
-              <a:ext uri="{FF2B5EF4-FFF2-40B4-BE49-F238E27FC236}">
-                <a16:creationId xmlns:a16="http://schemas.microsoft.com/office/drawing/2014/main" id="{44641D5E-5401-AA9B-9EC0-2A137D4E5013}"/>
-              </a:ext>
-            </a:extLst>
-          </p:cNvPr>
+          <p:cNvPr id="6" name="Slide Number Placeholder 5"/>
           <p:cNvSpPr>
             <a:spLocks noGrp="1"/>
           </p:cNvSpPr>
@@ -1201,7 +1062,7 @@
     </p:spTree>
     <p:extLst>
       <p:ext uri="{BB962C8B-B14F-4D97-AF65-F5344CB8AC3E}">
-        <p14:creationId xmlns:p14="http://schemas.microsoft.com/office/powerpoint/2010/main" val="1033498373"/>
+        <p14:creationId xmlns:p14="http://schemas.microsoft.com/office/powerpoint/2010/main" val="1686731457"/>
       </p:ext>
     </p:extLst>
   </p:cSld>
@@ -1230,13 +1091,7 @@
       </p:grpSpPr>
       <p:sp>
         <p:nvSpPr>
-          <p:cNvPr id="2" name="제목 1">
-            <a:extLst>
-              <a:ext uri="{FF2B5EF4-FFF2-40B4-BE49-F238E27FC236}">
-                <a16:creationId xmlns:a16="http://schemas.microsoft.com/office/drawing/2014/main" id="{829A8BC2-C82C-C59D-889E-C1EE845E42A7}"/>
-              </a:ext>
-            </a:extLst>
-          </p:cNvPr>
+          <p:cNvPr id="2" name="Title 1"/>
           <p:cNvSpPr>
             <a:spLocks noGrp="1"/>
           </p:cNvSpPr>
@@ -1253,18 +1108,13 @@
               <a:rPr lang="ko-KR" altLang="en-US"/>
               <a:t>마스터 제목 스타일 편집</a:t>
             </a:r>
-          </a:p>
-        </p:txBody>
-      </p:sp>
-      <p:sp>
-        <p:nvSpPr>
-          <p:cNvPr id="3" name="내용 개체 틀 2">
-            <a:extLst>
-              <a:ext uri="{FF2B5EF4-FFF2-40B4-BE49-F238E27FC236}">
-                <a16:creationId xmlns:a16="http://schemas.microsoft.com/office/drawing/2014/main" id="{A79B660C-EA65-FC6F-15AC-EA282188B918}"/>
-              </a:ext>
-            </a:extLst>
-          </p:cNvPr>
+            <a:endParaRPr lang="en-US" dirty="0"/>
+          </a:p>
+        </p:txBody>
+      </p:sp>
+      <p:sp>
+        <p:nvSpPr>
+          <p:cNvPr id="3" name="Content Placeholder 2"/>
           <p:cNvSpPr>
             <a:spLocks noGrp="1"/>
           </p:cNvSpPr>
@@ -1274,8 +1124,8 @@
         </p:nvSpPr>
         <p:spPr>
           <a:xfrm>
-            <a:off x="838200" y="1825625"/>
-            <a:ext cx="5181600" cy="4351338"/>
+            <a:off x="1484967" y="2874937"/>
+            <a:ext cx="9179798" cy="6852350"/>
           </a:xfrm>
         </p:spPr>
         <p:txBody>
@@ -1315,18 +1165,13 @@
               <a:rPr lang="ko-KR" altLang="en-US"/>
               <a:t>다섯 번째 수준</a:t>
             </a:r>
-          </a:p>
-        </p:txBody>
-      </p:sp>
-      <p:sp>
-        <p:nvSpPr>
-          <p:cNvPr id="4" name="내용 개체 틀 3">
-            <a:extLst>
-              <a:ext uri="{FF2B5EF4-FFF2-40B4-BE49-F238E27FC236}">
-                <a16:creationId xmlns:a16="http://schemas.microsoft.com/office/drawing/2014/main" id="{C9D37972-A3E5-A174-E031-CE439F895E05}"/>
-              </a:ext>
-            </a:extLst>
-          </p:cNvPr>
+            <a:endParaRPr lang="en-US" dirty="0"/>
+          </a:p>
+        </p:txBody>
+      </p:sp>
+      <p:sp>
+        <p:nvSpPr>
+          <p:cNvPr id="4" name="Content Placeholder 3"/>
           <p:cNvSpPr>
             <a:spLocks noGrp="1"/>
           </p:cNvSpPr>
@@ -1336,8 +1181,8 @@
         </p:nvSpPr>
         <p:spPr>
           <a:xfrm>
-            <a:off x="6172200" y="1825625"/>
-            <a:ext cx="5181600" cy="4351338"/>
+            <a:off x="10934760" y="2874937"/>
+            <a:ext cx="9179798" cy="6852350"/>
           </a:xfrm>
         </p:spPr>
         <p:txBody>
@@ -1377,18 +1222,13 @@
               <a:rPr lang="ko-KR" altLang="en-US"/>
               <a:t>다섯 번째 수준</a:t>
             </a:r>
-          </a:p>
-        </p:txBody>
-      </p:sp>
-      <p:sp>
-        <p:nvSpPr>
-          <p:cNvPr id="5" name="날짜 개체 틀 4">
-            <a:extLst>
-              <a:ext uri="{FF2B5EF4-FFF2-40B4-BE49-F238E27FC236}">
-                <a16:creationId xmlns:a16="http://schemas.microsoft.com/office/drawing/2014/main" id="{E77833A5-B629-1B6D-B1D1-4C29E69F5F07}"/>
-              </a:ext>
-            </a:extLst>
-          </p:cNvPr>
+            <a:endParaRPr lang="en-US" dirty="0"/>
+          </a:p>
+        </p:txBody>
+      </p:sp>
+      <p:sp>
+        <p:nvSpPr>
+          <p:cNvPr id="5" name="Date Placeholder 4"/>
           <p:cNvSpPr>
             <a:spLocks noGrp="1"/>
           </p:cNvSpPr>
@@ -1403,7 +1243,7 @@
           <a:p>
             <a:fld id="{505BB82E-C503-4E54-B9F4-7F874FE65A6C}" type="datetimeFigureOut">
               <a:rPr lang="ko-KR" altLang="en-US" smtClean="0"/>
-              <a:t>2025-07-13</a:t>
+              <a:t>2025-09-01</a:t>
             </a:fld>
             <a:endParaRPr lang="ko-KR" altLang="en-US"/>
           </a:p>
@@ -1411,13 +1251,7 @@
       </p:sp>
       <p:sp>
         <p:nvSpPr>
-          <p:cNvPr id="6" name="바닥글 개체 틀 5">
-            <a:extLst>
-              <a:ext uri="{FF2B5EF4-FFF2-40B4-BE49-F238E27FC236}">
-                <a16:creationId xmlns:a16="http://schemas.microsoft.com/office/drawing/2014/main" id="{A185B38C-417D-A27F-B50D-72334D9EAAF4}"/>
-              </a:ext>
-            </a:extLst>
-          </p:cNvPr>
+          <p:cNvPr id="6" name="Footer Placeholder 5"/>
           <p:cNvSpPr>
             <a:spLocks noGrp="1"/>
           </p:cNvSpPr>
@@ -1436,13 +1270,7 @@
       </p:sp>
       <p:sp>
         <p:nvSpPr>
-          <p:cNvPr id="7" name="슬라이드 번호 개체 틀 6">
-            <a:extLst>
-              <a:ext uri="{FF2B5EF4-FFF2-40B4-BE49-F238E27FC236}">
-                <a16:creationId xmlns:a16="http://schemas.microsoft.com/office/drawing/2014/main" id="{80E84750-8563-B089-5FA2-21157F8AEB0B}"/>
-              </a:ext>
-            </a:extLst>
-          </p:cNvPr>
+          <p:cNvPr id="7" name="Slide Number Placeholder 6"/>
           <p:cNvSpPr>
             <a:spLocks noGrp="1"/>
           </p:cNvSpPr>
@@ -1466,7 +1294,7 @@
     </p:spTree>
     <p:extLst>
       <p:ext uri="{BB962C8B-B14F-4D97-AF65-F5344CB8AC3E}">
-        <p14:creationId xmlns:p14="http://schemas.microsoft.com/office/powerpoint/2010/main" val="2884352207"/>
+        <p14:creationId xmlns:p14="http://schemas.microsoft.com/office/powerpoint/2010/main" val="1325342440"/>
       </p:ext>
     </p:extLst>
   </p:cSld>
@@ -1495,13 +1323,7 @@
       </p:grpSpPr>
       <p:sp>
         <p:nvSpPr>
-          <p:cNvPr id="2" name="제목 1">
-            <a:extLst>
-              <a:ext uri="{FF2B5EF4-FFF2-40B4-BE49-F238E27FC236}">
-                <a16:creationId xmlns:a16="http://schemas.microsoft.com/office/drawing/2014/main" id="{AC0BDD40-E350-310B-C85F-65E6A0492318}"/>
-              </a:ext>
-            </a:extLst>
-          </p:cNvPr>
+          <p:cNvPr id="2" name="Title 1"/>
           <p:cNvSpPr>
             <a:spLocks noGrp="1"/>
           </p:cNvSpPr>
@@ -1511,8 +1333,8 @@
         </p:nvSpPr>
         <p:spPr>
           <a:xfrm>
-            <a:off x="839788" y="365125"/>
-            <a:ext cx="10515600" cy="1325563"/>
+            <a:off x="1487781" y="574988"/>
+            <a:ext cx="18629590" cy="2087455"/>
           </a:xfrm>
         </p:spPr>
         <p:txBody>
@@ -1523,18 +1345,13 @@
               <a:rPr lang="ko-KR" altLang="en-US"/>
               <a:t>마스터 제목 스타일 편집</a:t>
             </a:r>
-          </a:p>
-        </p:txBody>
-      </p:sp>
-      <p:sp>
-        <p:nvSpPr>
-          <p:cNvPr id="3" name="텍스트 개체 틀 2">
-            <a:extLst>
-              <a:ext uri="{FF2B5EF4-FFF2-40B4-BE49-F238E27FC236}">
-                <a16:creationId xmlns:a16="http://schemas.microsoft.com/office/drawing/2014/main" id="{73F169F1-B280-0E2A-240B-CE6AF428655B}"/>
-              </a:ext>
-            </a:extLst>
-          </p:cNvPr>
+            <a:endParaRPr lang="en-US" dirty="0"/>
+          </a:p>
+        </p:txBody>
+      </p:sp>
+      <p:sp>
+        <p:nvSpPr>
+          <p:cNvPr id="3" name="Text Placeholder 2"/>
           <p:cNvSpPr>
             <a:spLocks noGrp="1"/>
           </p:cNvSpPr>
@@ -1544,8 +1361,8 @@
         </p:nvSpPr>
         <p:spPr>
           <a:xfrm>
-            <a:off x="839788" y="1681163"/>
-            <a:ext cx="5157787" cy="823912"/>
+            <a:off x="1487781" y="2647443"/>
+            <a:ext cx="9137611" cy="1297471"/>
           </a:xfrm>
         </p:spPr>
         <p:txBody>
@@ -1553,39 +1370,39 @@
           <a:lstStyle>
             <a:lvl1pPr marL="0" indent="0">
               <a:buNone/>
-              <a:defRPr sz="2400" b="1"/>
+              <a:defRPr sz="3780" b="1"/>
             </a:lvl1pPr>
-            <a:lvl2pPr marL="457200" indent="0">
+            <a:lvl2pPr marL="719999" indent="0">
               <a:buNone/>
-              <a:defRPr sz="2000" b="1"/>
+              <a:defRPr sz="3150" b="1"/>
             </a:lvl2pPr>
-            <a:lvl3pPr marL="914400" indent="0">
+            <a:lvl3pPr marL="1439997" indent="0">
               <a:buNone/>
-              <a:defRPr sz="1800" b="1"/>
+              <a:defRPr sz="2835" b="1"/>
             </a:lvl3pPr>
-            <a:lvl4pPr marL="1371600" indent="0">
+            <a:lvl4pPr marL="2159996" indent="0">
               <a:buNone/>
-              <a:defRPr sz="1600" b="1"/>
+              <a:defRPr sz="2520" b="1"/>
             </a:lvl4pPr>
-            <a:lvl5pPr marL="1828800" indent="0">
+            <a:lvl5pPr marL="2879994" indent="0">
               <a:buNone/>
-              <a:defRPr sz="1600" b="1"/>
+              <a:defRPr sz="2520" b="1"/>
             </a:lvl5pPr>
-            <a:lvl6pPr marL="2286000" indent="0">
+            <a:lvl6pPr marL="3599993" indent="0">
               <a:buNone/>
-              <a:defRPr sz="1600" b="1"/>
+              <a:defRPr sz="2520" b="1"/>
             </a:lvl6pPr>
-            <a:lvl7pPr marL="2743200" indent="0">
+            <a:lvl7pPr marL="4319991" indent="0">
               <a:buNone/>
-              <a:defRPr sz="1600" b="1"/>
+              <a:defRPr sz="2520" b="1"/>
             </a:lvl7pPr>
-            <a:lvl8pPr marL="3200400" indent="0">
+            <a:lvl8pPr marL="5039990" indent="0">
               <a:buNone/>
-              <a:defRPr sz="1600" b="1"/>
+              <a:defRPr sz="2520" b="1"/>
             </a:lvl8pPr>
-            <a:lvl9pPr marL="3657600" indent="0">
+            <a:lvl9pPr marL="5759988" indent="0">
               <a:buNone/>
-              <a:defRPr sz="1600" b="1"/>
+              <a:defRPr sz="2520" b="1"/>
             </a:lvl9pPr>
           </a:lstStyle>
           <a:p>
@@ -1599,13 +1416,7 @@
       </p:sp>
       <p:sp>
         <p:nvSpPr>
-          <p:cNvPr id="4" name="내용 개체 틀 3">
-            <a:extLst>
-              <a:ext uri="{FF2B5EF4-FFF2-40B4-BE49-F238E27FC236}">
-                <a16:creationId xmlns:a16="http://schemas.microsoft.com/office/drawing/2014/main" id="{10453745-B490-E0EF-E4D6-33A6122C969F}"/>
-              </a:ext>
-            </a:extLst>
-          </p:cNvPr>
+          <p:cNvPr id="4" name="Content Placeholder 3"/>
           <p:cNvSpPr>
             <a:spLocks noGrp="1"/>
           </p:cNvSpPr>
@@ -1615,8 +1426,8 @@
         </p:nvSpPr>
         <p:spPr>
           <a:xfrm>
-            <a:off x="839788" y="2505075"/>
-            <a:ext cx="5157787" cy="3684588"/>
+            <a:off x="1487781" y="3944914"/>
+            <a:ext cx="9137611" cy="5802373"/>
           </a:xfrm>
         </p:spPr>
         <p:txBody>
@@ -1656,18 +1467,13 @@
               <a:rPr lang="ko-KR" altLang="en-US"/>
               <a:t>다섯 번째 수준</a:t>
             </a:r>
-          </a:p>
-        </p:txBody>
-      </p:sp>
-      <p:sp>
-        <p:nvSpPr>
-          <p:cNvPr id="5" name="텍스트 개체 틀 4">
-            <a:extLst>
-              <a:ext uri="{FF2B5EF4-FFF2-40B4-BE49-F238E27FC236}">
-                <a16:creationId xmlns:a16="http://schemas.microsoft.com/office/drawing/2014/main" id="{1B8DB9ED-728C-945C-FC49-0AC4592317F5}"/>
-              </a:ext>
-            </a:extLst>
-          </p:cNvPr>
+            <a:endParaRPr lang="en-US" dirty="0"/>
+          </a:p>
+        </p:txBody>
+      </p:sp>
+      <p:sp>
+        <p:nvSpPr>
+          <p:cNvPr id="5" name="Text Placeholder 4"/>
           <p:cNvSpPr>
             <a:spLocks noGrp="1"/>
           </p:cNvSpPr>
@@ -1677,8 +1483,8 @@
         </p:nvSpPr>
         <p:spPr>
           <a:xfrm>
-            <a:off x="6172200" y="1681163"/>
-            <a:ext cx="5183188" cy="823912"/>
+            <a:off x="10934760" y="2647443"/>
+            <a:ext cx="9182611" cy="1297471"/>
           </a:xfrm>
         </p:spPr>
         <p:txBody>
@@ -1686,39 +1492,39 @@
           <a:lstStyle>
             <a:lvl1pPr marL="0" indent="0">
               <a:buNone/>
-              <a:defRPr sz="2400" b="1"/>
+              <a:defRPr sz="3780" b="1"/>
             </a:lvl1pPr>
-            <a:lvl2pPr marL="457200" indent="0">
+            <a:lvl2pPr marL="719999" indent="0">
               <a:buNone/>
-              <a:defRPr sz="2000" b="1"/>
+              <a:defRPr sz="3150" b="1"/>
             </a:lvl2pPr>
-            <a:lvl3pPr marL="914400" indent="0">
+            <a:lvl3pPr marL="1439997" indent="0">
               <a:buNone/>
-              <a:defRPr sz="1800" b="1"/>
+              <a:defRPr sz="2835" b="1"/>
             </a:lvl3pPr>
-            <a:lvl4pPr marL="1371600" indent="0">
+            <a:lvl4pPr marL="2159996" indent="0">
               <a:buNone/>
-              <a:defRPr sz="1600" b="1"/>
+              <a:defRPr sz="2520" b="1"/>
             </a:lvl4pPr>
-            <a:lvl5pPr marL="1828800" indent="0">
+            <a:lvl5pPr marL="2879994" indent="0">
               <a:buNone/>
-              <a:defRPr sz="1600" b="1"/>
+              <a:defRPr sz="2520" b="1"/>
             </a:lvl5pPr>
-            <a:lvl6pPr marL="2286000" indent="0">
+            <a:lvl6pPr marL="3599993" indent="0">
               <a:buNone/>
-              <a:defRPr sz="1600" b="1"/>
+              <a:defRPr sz="2520" b="1"/>
             </a:lvl6pPr>
-            <a:lvl7pPr marL="2743200" indent="0">
+            <a:lvl7pPr marL="4319991" indent="0">
               <a:buNone/>
-              <a:defRPr sz="1600" b="1"/>
+              <a:defRPr sz="2520" b="1"/>
             </a:lvl7pPr>
-            <a:lvl8pPr marL="3200400" indent="0">
+            <a:lvl8pPr marL="5039990" indent="0">
               <a:buNone/>
-              <a:defRPr sz="1600" b="1"/>
+              <a:defRPr sz="2520" b="1"/>
             </a:lvl8pPr>
-            <a:lvl9pPr marL="3657600" indent="0">
+            <a:lvl9pPr marL="5759988" indent="0">
               <a:buNone/>
-              <a:defRPr sz="1600" b="1"/>
+              <a:defRPr sz="2520" b="1"/>
             </a:lvl9pPr>
           </a:lstStyle>
           <a:p>
@@ -1732,13 +1538,7 @@
       </p:sp>
       <p:sp>
         <p:nvSpPr>
-          <p:cNvPr id="6" name="내용 개체 틀 5">
-            <a:extLst>
-              <a:ext uri="{FF2B5EF4-FFF2-40B4-BE49-F238E27FC236}">
-                <a16:creationId xmlns:a16="http://schemas.microsoft.com/office/drawing/2014/main" id="{9A7D7B09-B821-4C01-0E09-2DFE81F743EB}"/>
-              </a:ext>
-            </a:extLst>
-          </p:cNvPr>
+          <p:cNvPr id="6" name="Content Placeholder 5"/>
           <p:cNvSpPr>
             <a:spLocks noGrp="1"/>
           </p:cNvSpPr>
@@ -1748,8 +1548,8 @@
         </p:nvSpPr>
         <p:spPr>
           <a:xfrm>
-            <a:off x="6172200" y="2505075"/>
-            <a:ext cx="5183188" cy="3684588"/>
+            <a:off x="10934760" y="3944914"/>
+            <a:ext cx="9182611" cy="5802373"/>
           </a:xfrm>
         </p:spPr>
         <p:txBody>
@@ -1789,18 +1589,13 @@
               <a:rPr lang="ko-KR" altLang="en-US"/>
               <a:t>다섯 번째 수준</a:t>
             </a:r>
-          </a:p>
-        </p:txBody>
-      </p:sp>
-      <p:sp>
-        <p:nvSpPr>
-          <p:cNvPr id="7" name="날짜 개체 틀 6">
-            <a:extLst>
-              <a:ext uri="{FF2B5EF4-FFF2-40B4-BE49-F238E27FC236}">
-                <a16:creationId xmlns:a16="http://schemas.microsoft.com/office/drawing/2014/main" id="{22B25B46-43E7-AA44-3CB8-9B3949EEF28B}"/>
-              </a:ext>
-            </a:extLst>
-          </p:cNvPr>
+            <a:endParaRPr lang="en-US" dirty="0"/>
+          </a:p>
+        </p:txBody>
+      </p:sp>
+      <p:sp>
+        <p:nvSpPr>
+          <p:cNvPr id="7" name="Date Placeholder 6"/>
           <p:cNvSpPr>
             <a:spLocks noGrp="1"/>
           </p:cNvSpPr>
@@ -1815,7 +1610,7 @@
           <a:p>
             <a:fld id="{505BB82E-C503-4E54-B9F4-7F874FE65A6C}" type="datetimeFigureOut">
               <a:rPr lang="ko-KR" altLang="en-US" smtClean="0"/>
-              <a:t>2025-07-13</a:t>
+              <a:t>2025-09-01</a:t>
             </a:fld>
             <a:endParaRPr lang="ko-KR" altLang="en-US"/>
           </a:p>
@@ -1823,13 +1618,7 @@
       </p:sp>
       <p:sp>
         <p:nvSpPr>
-          <p:cNvPr id="8" name="바닥글 개체 틀 7">
-            <a:extLst>
-              <a:ext uri="{FF2B5EF4-FFF2-40B4-BE49-F238E27FC236}">
-                <a16:creationId xmlns:a16="http://schemas.microsoft.com/office/drawing/2014/main" id="{758DC48F-BC3B-6C46-7B81-D100A88431C1}"/>
-              </a:ext>
-            </a:extLst>
-          </p:cNvPr>
+          <p:cNvPr id="8" name="Footer Placeholder 7"/>
           <p:cNvSpPr>
             <a:spLocks noGrp="1"/>
           </p:cNvSpPr>
@@ -1848,13 +1637,7 @@
       </p:sp>
       <p:sp>
         <p:nvSpPr>
-          <p:cNvPr id="9" name="슬라이드 번호 개체 틀 8">
-            <a:extLst>
-              <a:ext uri="{FF2B5EF4-FFF2-40B4-BE49-F238E27FC236}">
-                <a16:creationId xmlns:a16="http://schemas.microsoft.com/office/drawing/2014/main" id="{0F663113-9917-1777-5CAF-306F6CE67ABA}"/>
-              </a:ext>
-            </a:extLst>
-          </p:cNvPr>
+          <p:cNvPr id="9" name="Slide Number Placeholder 8"/>
           <p:cNvSpPr>
             <a:spLocks noGrp="1"/>
           </p:cNvSpPr>
@@ -1878,7 +1661,7 @@
     </p:spTree>
     <p:extLst>
       <p:ext uri="{BB962C8B-B14F-4D97-AF65-F5344CB8AC3E}">
-        <p14:creationId xmlns:p14="http://schemas.microsoft.com/office/powerpoint/2010/main" val="2063803197"/>
+        <p14:creationId xmlns:p14="http://schemas.microsoft.com/office/powerpoint/2010/main" val="2883175892"/>
       </p:ext>
     </p:extLst>
   </p:cSld>
@@ -1907,13 +1690,7 @@
       </p:grpSpPr>
       <p:sp>
         <p:nvSpPr>
-          <p:cNvPr id="2" name="제목 1">
-            <a:extLst>
-              <a:ext uri="{FF2B5EF4-FFF2-40B4-BE49-F238E27FC236}">
-                <a16:creationId xmlns:a16="http://schemas.microsoft.com/office/drawing/2014/main" id="{AEBFA351-7263-3261-3592-7C56469D9BA4}"/>
-              </a:ext>
-            </a:extLst>
-          </p:cNvPr>
+          <p:cNvPr id="2" name="Title 1"/>
           <p:cNvSpPr>
             <a:spLocks noGrp="1"/>
           </p:cNvSpPr>
@@ -1930,18 +1707,13 @@
               <a:rPr lang="ko-KR" altLang="en-US"/>
               <a:t>마스터 제목 스타일 편집</a:t>
             </a:r>
-          </a:p>
-        </p:txBody>
-      </p:sp>
-      <p:sp>
-        <p:nvSpPr>
-          <p:cNvPr id="3" name="날짜 개체 틀 2">
-            <a:extLst>
-              <a:ext uri="{FF2B5EF4-FFF2-40B4-BE49-F238E27FC236}">
-                <a16:creationId xmlns:a16="http://schemas.microsoft.com/office/drawing/2014/main" id="{9DFF8196-069E-A86E-24E9-B9CB6DFAD375}"/>
-              </a:ext>
-            </a:extLst>
-          </p:cNvPr>
+            <a:endParaRPr lang="en-US" dirty="0"/>
+          </a:p>
+        </p:txBody>
+      </p:sp>
+      <p:sp>
+        <p:nvSpPr>
+          <p:cNvPr id="3" name="Date Placeholder 2"/>
           <p:cNvSpPr>
             <a:spLocks noGrp="1"/>
           </p:cNvSpPr>
@@ -1956,7 +1728,7 @@
           <a:p>
             <a:fld id="{505BB82E-C503-4E54-B9F4-7F874FE65A6C}" type="datetimeFigureOut">
               <a:rPr lang="ko-KR" altLang="en-US" smtClean="0"/>
-              <a:t>2025-07-13</a:t>
+              <a:t>2025-09-01</a:t>
             </a:fld>
             <a:endParaRPr lang="ko-KR" altLang="en-US"/>
           </a:p>
@@ -1964,13 +1736,7 @@
       </p:sp>
       <p:sp>
         <p:nvSpPr>
-          <p:cNvPr id="4" name="바닥글 개체 틀 3">
-            <a:extLst>
-              <a:ext uri="{FF2B5EF4-FFF2-40B4-BE49-F238E27FC236}">
-                <a16:creationId xmlns:a16="http://schemas.microsoft.com/office/drawing/2014/main" id="{CA36F197-59CB-181A-F763-297488274091}"/>
-              </a:ext>
-            </a:extLst>
-          </p:cNvPr>
+          <p:cNvPr id="4" name="Footer Placeholder 3"/>
           <p:cNvSpPr>
             <a:spLocks noGrp="1"/>
           </p:cNvSpPr>
@@ -1989,13 +1755,7 @@
       </p:sp>
       <p:sp>
         <p:nvSpPr>
-          <p:cNvPr id="5" name="슬라이드 번호 개체 틀 4">
-            <a:extLst>
-              <a:ext uri="{FF2B5EF4-FFF2-40B4-BE49-F238E27FC236}">
-                <a16:creationId xmlns:a16="http://schemas.microsoft.com/office/drawing/2014/main" id="{637C4F8B-A0A2-C214-AABF-9C4034C4714C}"/>
-              </a:ext>
-            </a:extLst>
-          </p:cNvPr>
+          <p:cNvPr id="5" name="Slide Number Placeholder 4"/>
           <p:cNvSpPr>
             <a:spLocks noGrp="1"/>
           </p:cNvSpPr>
@@ -2019,7 +1779,7 @@
     </p:spTree>
     <p:extLst>
       <p:ext uri="{BB962C8B-B14F-4D97-AF65-F5344CB8AC3E}">
-        <p14:creationId xmlns:p14="http://schemas.microsoft.com/office/powerpoint/2010/main" val="1618159111"/>
+        <p14:creationId xmlns:p14="http://schemas.microsoft.com/office/powerpoint/2010/main" val="2379026741"/>
       </p:ext>
     </p:extLst>
   </p:cSld>
@@ -2048,13 +1808,7 @@
       </p:grpSpPr>
       <p:sp>
         <p:nvSpPr>
-          <p:cNvPr id="2" name="날짜 개체 틀 1">
-            <a:extLst>
-              <a:ext uri="{FF2B5EF4-FFF2-40B4-BE49-F238E27FC236}">
-                <a16:creationId xmlns:a16="http://schemas.microsoft.com/office/drawing/2014/main" id="{E8C326B4-D0CA-7A66-FF0F-32A83C53B767}"/>
-              </a:ext>
-            </a:extLst>
-          </p:cNvPr>
+          <p:cNvPr id="2" name="Date Placeholder 1"/>
           <p:cNvSpPr>
             <a:spLocks noGrp="1"/>
           </p:cNvSpPr>
@@ -2069,7 +1823,7 @@
           <a:p>
             <a:fld id="{505BB82E-C503-4E54-B9F4-7F874FE65A6C}" type="datetimeFigureOut">
               <a:rPr lang="ko-KR" altLang="en-US" smtClean="0"/>
-              <a:t>2025-07-13</a:t>
+              <a:t>2025-09-01</a:t>
             </a:fld>
             <a:endParaRPr lang="ko-KR" altLang="en-US"/>
           </a:p>
@@ -2077,13 +1831,7 @@
       </p:sp>
       <p:sp>
         <p:nvSpPr>
-          <p:cNvPr id="3" name="바닥글 개체 틀 2">
-            <a:extLst>
-              <a:ext uri="{FF2B5EF4-FFF2-40B4-BE49-F238E27FC236}">
-                <a16:creationId xmlns:a16="http://schemas.microsoft.com/office/drawing/2014/main" id="{A0905BFF-1A9C-F400-BC99-4D8357969AB2}"/>
-              </a:ext>
-            </a:extLst>
-          </p:cNvPr>
+          <p:cNvPr id="3" name="Footer Placeholder 2"/>
           <p:cNvSpPr>
             <a:spLocks noGrp="1"/>
           </p:cNvSpPr>
@@ -2102,13 +1850,7 @@
       </p:sp>
       <p:sp>
         <p:nvSpPr>
-          <p:cNvPr id="4" name="슬라이드 번호 개체 틀 3">
-            <a:extLst>
-              <a:ext uri="{FF2B5EF4-FFF2-40B4-BE49-F238E27FC236}">
-                <a16:creationId xmlns:a16="http://schemas.microsoft.com/office/drawing/2014/main" id="{16C53D39-42FC-8D7F-A9F8-46CF85337A36}"/>
-              </a:ext>
-            </a:extLst>
-          </p:cNvPr>
+          <p:cNvPr id="4" name="Slide Number Placeholder 3"/>
           <p:cNvSpPr>
             <a:spLocks noGrp="1"/>
           </p:cNvSpPr>
@@ -2132,7 +1874,7 @@
     </p:spTree>
     <p:extLst>
       <p:ext uri="{BB962C8B-B14F-4D97-AF65-F5344CB8AC3E}">
-        <p14:creationId xmlns:p14="http://schemas.microsoft.com/office/powerpoint/2010/main" val="2608826998"/>
+        <p14:creationId xmlns:p14="http://schemas.microsoft.com/office/powerpoint/2010/main" val="1755325118"/>
       </p:ext>
     </p:extLst>
   </p:cSld>
@@ -2161,13 +1903,7 @@
       </p:grpSpPr>
       <p:sp>
         <p:nvSpPr>
-          <p:cNvPr id="2" name="제목 1">
-            <a:extLst>
-              <a:ext uri="{FF2B5EF4-FFF2-40B4-BE49-F238E27FC236}">
-                <a16:creationId xmlns:a16="http://schemas.microsoft.com/office/drawing/2014/main" id="{18939A32-9687-F005-2D10-EC951608B175}"/>
-              </a:ext>
-            </a:extLst>
-          </p:cNvPr>
+          <p:cNvPr id="2" name="Title 1"/>
           <p:cNvSpPr>
             <a:spLocks noGrp="1"/>
           </p:cNvSpPr>
@@ -2177,15 +1913,15 @@
         </p:nvSpPr>
         <p:spPr>
           <a:xfrm>
-            <a:off x="839788" y="457200"/>
-            <a:ext cx="3932237" cy="1600200"/>
+            <a:off x="1487782" y="719984"/>
+            <a:ext cx="6966408" cy="2519945"/>
           </a:xfrm>
         </p:spPr>
         <p:txBody>
           <a:bodyPr anchor="b"/>
           <a:lstStyle>
             <a:lvl1pPr>
-              <a:defRPr sz="3200"/>
+              <a:defRPr sz="5039"/>
             </a:lvl1pPr>
           </a:lstStyle>
           <a:p>
@@ -2193,18 +1929,13 @@
               <a:rPr lang="ko-KR" altLang="en-US"/>
               <a:t>마스터 제목 스타일 편집</a:t>
             </a:r>
-          </a:p>
-        </p:txBody>
-      </p:sp>
-      <p:sp>
-        <p:nvSpPr>
-          <p:cNvPr id="3" name="내용 개체 틀 2">
-            <a:extLst>
-              <a:ext uri="{FF2B5EF4-FFF2-40B4-BE49-F238E27FC236}">
-                <a16:creationId xmlns:a16="http://schemas.microsoft.com/office/drawing/2014/main" id="{9F732B2B-98FD-F32F-6021-9EF288803076}"/>
-              </a:ext>
-            </a:extLst>
-          </p:cNvPr>
+            <a:endParaRPr lang="en-US" dirty="0"/>
+          </a:p>
+        </p:txBody>
+      </p:sp>
+      <p:sp>
+        <p:nvSpPr>
+          <p:cNvPr id="3" name="Content Placeholder 2"/>
           <p:cNvSpPr>
             <a:spLocks noGrp="1"/>
           </p:cNvSpPr>
@@ -2214,39 +1945,39 @@
         </p:nvSpPr>
         <p:spPr>
           <a:xfrm>
-            <a:off x="5183188" y="987425"/>
-            <a:ext cx="6172200" cy="4873625"/>
+            <a:off x="9182611" y="1554966"/>
+            <a:ext cx="10934760" cy="7674832"/>
           </a:xfrm>
         </p:spPr>
         <p:txBody>
           <a:bodyPr/>
           <a:lstStyle>
             <a:lvl1pPr>
-              <a:defRPr sz="3200"/>
+              <a:defRPr sz="5039"/>
             </a:lvl1pPr>
             <a:lvl2pPr>
-              <a:defRPr sz="2800"/>
+              <a:defRPr sz="4409"/>
             </a:lvl2pPr>
             <a:lvl3pPr>
-              <a:defRPr sz="2400"/>
+              <a:defRPr sz="3780"/>
             </a:lvl3pPr>
             <a:lvl4pPr>
-              <a:defRPr sz="2000"/>
+              <a:defRPr sz="3150"/>
             </a:lvl4pPr>
             <a:lvl5pPr>
-              <a:defRPr sz="2000"/>
+              <a:defRPr sz="3150"/>
             </a:lvl5pPr>
             <a:lvl6pPr>
-              <a:defRPr sz="2000"/>
+              <a:defRPr sz="3150"/>
             </a:lvl6pPr>
             <a:lvl7pPr>
-              <a:defRPr sz="2000"/>
+              <a:defRPr sz="3150"/>
             </a:lvl7pPr>
             <a:lvl8pPr>
-              <a:defRPr sz="2000"/>
+              <a:defRPr sz="3150"/>
             </a:lvl8pPr>
             <a:lvl9pPr>
-              <a:defRPr sz="2000"/>
+              <a:defRPr sz="3150"/>
             </a:lvl9pPr>
           </a:lstStyle>
           <a:p>
@@ -2283,18 +2014,13 @@
               <a:rPr lang="ko-KR" altLang="en-US"/>
               <a:t>다섯 번째 수준</a:t>
             </a:r>
-          </a:p>
-        </p:txBody>
-      </p:sp>
-      <p:sp>
-        <p:nvSpPr>
-          <p:cNvPr id="4" name="텍스트 개체 틀 3">
-            <a:extLst>
-              <a:ext uri="{FF2B5EF4-FFF2-40B4-BE49-F238E27FC236}">
-                <a16:creationId xmlns:a16="http://schemas.microsoft.com/office/drawing/2014/main" id="{974EE391-B646-37B4-062A-250D1429E134}"/>
-              </a:ext>
-            </a:extLst>
-          </p:cNvPr>
+            <a:endParaRPr lang="en-US" dirty="0"/>
+          </a:p>
+        </p:txBody>
+      </p:sp>
+      <p:sp>
+        <p:nvSpPr>
+          <p:cNvPr id="4" name="Text Placeholder 3"/>
           <p:cNvSpPr>
             <a:spLocks noGrp="1"/>
           </p:cNvSpPr>
@@ -2304,8 +2030,8 @@
         </p:nvSpPr>
         <p:spPr>
           <a:xfrm>
-            <a:off x="839788" y="2057400"/>
-            <a:ext cx="3932237" cy="3811588"/>
+            <a:off x="1487782" y="3239929"/>
+            <a:ext cx="6966408" cy="6002369"/>
           </a:xfrm>
         </p:spPr>
         <p:txBody>
@@ -2313,39 +2039,39 @@
           <a:lstStyle>
             <a:lvl1pPr marL="0" indent="0">
               <a:buNone/>
-              <a:defRPr sz="1600"/>
+              <a:defRPr sz="2520"/>
             </a:lvl1pPr>
-            <a:lvl2pPr marL="457200" indent="0">
+            <a:lvl2pPr marL="719999" indent="0">
               <a:buNone/>
-              <a:defRPr sz="1400"/>
+              <a:defRPr sz="2205"/>
             </a:lvl2pPr>
-            <a:lvl3pPr marL="914400" indent="0">
+            <a:lvl3pPr marL="1439997" indent="0">
               <a:buNone/>
-              <a:defRPr sz="1200"/>
+              <a:defRPr sz="1890"/>
             </a:lvl3pPr>
-            <a:lvl4pPr marL="1371600" indent="0">
+            <a:lvl4pPr marL="2159996" indent="0">
               <a:buNone/>
-              <a:defRPr sz="1000"/>
+              <a:defRPr sz="1575"/>
             </a:lvl4pPr>
-            <a:lvl5pPr marL="1828800" indent="0">
+            <a:lvl5pPr marL="2879994" indent="0">
               <a:buNone/>
-              <a:defRPr sz="1000"/>
+              <a:defRPr sz="1575"/>
             </a:lvl5pPr>
-            <a:lvl6pPr marL="2286000" indent="0">
+            <a:lvl6pPr marL="3599993" indent="0">
               <a:buNone/>
-              <a:defRPr sz="1000"/>
+              <a:defRPr sz="1575"/>
             </a:lvl6pPr>
-            <a:lvl7pPr marL="2743200" indent="0">
+            <a:lvl7pPr marL="4319991" indent="0">
               <a:buNone/>
-              <a:defRPr sz="1000"/>
+              <a:defRPr sz="1575"/>
             </a:lvl7pPr>
-            <a:lvl8pPr marL="3200400" indent="0">
+            <a:lvl8pPr marL="5039990" indent="0">
               <a:buNone/>
-              <a:defRPr sz="1000"/>
+              <a:defRPr sz="1575"/>
             </a:lvl8pPr>
-            <a:lvl9pPr marL="3657600" indent="0">
+            <a:lvl9pPr marL="5759988" indent="0">
               <a:buNone/>
-              <a:defRPr sz="1000"/>
+              <a:defRPr sz="1575"/>
             </a:lvl9pPr>
           </a:lstStyle>
           <a:p>
@@ -2359,13 +2085,7 @@
       </p:sp>
       <p:sp>
         <p:nvSpPr>
-          <p:cNvPr id="5" name="날짜 개체 틀 4">
-            <a:extLst>
-              <a:ext uri="{FF2B5EF4-FFF2-40B4-BE49-F238E27FC236}">
-                <a16:creationId xmlns:a16="http://schemas.microsoft.com/office/drawing/2014/main" id="{C2F89A17-EDE8-F8AB-BFEE-C2D3AAAAFFE4}"/>
-              </a:ext>
-            </a:extLst>
-          </p:cNvPr>
+          <p:cNvPr id="5" name="Date Placeholder 4"/>
           <p:cNvSpPr>
             <a:spLocks noGrp="1"/>
           </p:cNvSpPr>
@@ -2380,7 +2100,7 @@
           <a:p>
             <a:fld id="{505BB82E-C503-4E54-B9F4-7F874FE65A6C}" type="datetimeFigureOut">
               <a:rPr lang="ko-KR" altLang="en-US" smtClean="0"/>
-              <a:t>2025-07-13</a:t>
+              <a:t>2025-09-01</a:t>
             </a:fld>
             <a:endParaRPr lang="ko-KR" altLang="en-US"/>
           </a:p>
@@ -2388,13 +2108,7 @@
       </p:sp>
       <p:sp>
         <p:nvSpPr>
-          <p:cNvPr id="6" name="바닥글 개체 틀 5">
-            <a:extLst>
-              <a:ext uri="{FF2B5EF4-FFF2-40B4-BE49-F238E27FC236}">
-                <a16:creationId xmlns:a16="http://schemas.microsoft.com/office/drawing/2014/main" id="{EBE21489-82A1-7C12-1AB9-3D334087CB80}"/>
-              </a:ext>
-            </a:extLst>
-          </p:cNvPr>
+          <p:cNvPr id="6" name="Footer Placeholder 5"/>
           <p:cNvSpPr>
             <a:spLocks noGrp="1"/>
           </p:cNvSpPr>
@@ -2413,13 +2127,7 @@
       </p:sp>
       <p:sp>
         <p:nvSpPr>
-          <p:cNvPr id="7" name="슬라이드 번호 개체 틀 6">
-            <a:extLst>
-              <a:ext uri="{FF2B5EF4-FFF2-40B4-BE49-F238E27FC236}">
-                <a16:creationId xmlns:a16="http://schemas.microsoft.com/office/drawing/2014/main" id="{7A55E1D1-C681-8DC3-BB9B-C67922D49E2D}"/>
-              </a:ext>
-            </a:extLst>
-          </p:cNvPr>
+          <p:cNvPr id="7" name="Slide Number Placeholder 6"/>
           <p:cNvSpPr>
             <a:spLocks noGrp="1"/>
           </p:cNvSpPr>
@@ -2443,7 +2151,7 @@
     </p:spTree>
     <p:extLst>
       <p:ext uri="{BB962C8B-B14F-4D97-AF65-F5344CB8AC3E}">
-        <p14:creationId xmlns:p14="http://schemas.microsoft.com/office/powerpoint/2010/main" val="1661128823"/>
+        <p14:creationId xmlns:p14="http://schemas.microsoft.com/office/powerpoint/2010/main" val="2148199754"/>
       </p:ext>
     </p:extLst>
   </p:cSld>
@@ -2472,13 +2180,7 @@
       </p:grpSpPr>
       <p:sp>
         <p:nvSpPr>
-          <p:cNvPr id="2" name="제목 1">
-            <a:extLst>
-              <a:ext uri="{FF2B5EF4-FFF2-40B4-BE49-F238E27FC236}">
-                <a16:creationId xmlns:a16="http://schemas.microsoft.com/office/drawing/2014/main" id="{24CC11CE-3AEF-E414-32B8-9318F062BF45}"/>
-              </a:ext>
-            </a:extLst>
-          </p:cNvPr>
+          <p:cNvPr id="2" name="Title 1"/>
           <p:cNvSpPr>
             <a:spLocks noGrp="1"/>
           </p:cNvSpPr>
@@ -2488,15 +2190,15 @@
         </p:nvSpPr>
         <p:spPr>
           <a:xfrm>
-            <a:off x="839788" y="457200"/>
-            <a:ext cx="3932237" cy="1600200"/>
+            <a:off x="1487782" y="719984"/>
+            <a:ext cx="6966408" cy="2519945"/>
           </a:xfrm>
         </p:spPr>
         <p:txBody>
           <a:bodyPr anchor="b"/>
           <a:lstStyle>
             <a:lvl1pPr>
-              <a:defRPr sz="3200"/>
+              <a:defRPr sz="5039"/>
             </a:lvl1pPr>
           </a:lstStyle>
           <a:p>
@@ -2504,20 +2206,15 @@
               <a:rPr lang="ko-KR" altLang="en-US"/>
               <a:t>마스터 제목 스타일 편집</a:t>
             </a:r>
-          </a:p>
-        </p:txBody>
-      </p:sp>
-      <p:sp>
-        <p:nvSpPr>
-          <p:cNvPr id="3" name="그림 개체 틀 2">
-            <a:extLst>
-              <a:ext uri="{FF2B5EF4-FFF2-40B4-BE49-F238E27FC236}">
-                <a16:creationId xmlns:a16="http://schemas.microsoft.com/office/drawing/2014/main" id="{2D54A22F-5CD5-9F39-8B3F-07F61D88FEAE}"/>
-              </a:ext>
-            </a:extLst>
-          </p:cNvPr>
+            <a:endParaRPr lang="en-US" dirty="0"/>
+          </a:p>
+        </p:txBody>
+      </p:sp>
+      <p:sp>
+        <p:nvSpPr>
+          <p:cNvPr id="3" name="Picture Placeholder 2"/>
           <p:cNvSpPr>
-            <a:spLocks noGrp="1"/>
+            <a:spLocks noGrp="1" noChangeAspect="1"/>
           </p:cNvSpPr>
           <p:nvPr>
             <p:ph type="pic" idx="1"/>
@@ -2525,64 +2222,62 @@
         </p:nvSpPr>
         <p:spPr>
           <a:xfrm>
-            <a:off x="5183188" y="987425"/>
-            <a:ext cx="6172200" cy="4873625"/>
-          </a:xfrm>
-        </p:spPr>
-        <p:txBody>
-          <a:bodyPr/>
+            <a:off x="9182611" y="1554966"/>
+            <a:ext cx="10934760" cy="7674832"/>
+          </a:xfrm>
+        </p:spPr>
+        <p:txBody>
+          <a:bodyPr anchor="t"/>
           <a:lstStyle>
             <a:lvl1pPr marL="0" indent="0">
               <a:buNone/>
-              <a:defRPr sz="3200"/>
+              <a:defRPr sz="5039"/>
             </a:lvl1pPr>
-            <a:lvl2pPr marL="457200" indent="0">
+            <a:lvl2pPr marL="719999" indent="0">
               <a:buNone/>
-              <a:defRPr sz="2800"/>
+              <a:defRPr sz="4409"/>
             </a:lvl2pPr>
-            <a:lvl3pPr marL="914400" indent="0">
+            <a:lvl3pPr marL="1439997" indent="0">
               <a:buNone/>
-              <a:defRPr sz="2400"/>
+              <a:defRPr sz="3780"/>
             </a:lvl3pPr>
-            <a:lvl4pPr marL="1371600" indent="0">
+            <a:lvl4pPr marL="2159996" indent="0">
               <a:buNone/>
-              <a:defRPr sz="2000"/>
+              <a:defRPr sz="3150"/>
             </a:lvl4pPr>
-            <a:lvl5pPr marL="1828800" indent="0">
+            <a:lvl5pPr marL="2879994" indent="0">
               <a:buNone/>
-              <a:defRPr sz="2000"/>
+              <a:defRPr sz="3150"/>
             </a:lvl5pPr>
-            <a:lvl6pPr marL="2286000" indent="0">
+            <a:lvl6pPr marL="3599993" indent="0">
               <a:buNone/>
-              <a:defRPr sz="2000"/>
+              <a:defRPr sz="3150"/>
             </a:lvl6pPr>
-            <a:lvl7pPr marL="2743200" indent="0">
+            <a:lvl7pPr marL="4319991" indent="0">
               <a:buNone/>
-              <a:defRPr sz="2000"/>
+              <a:defRPr sz="3150"/>
             </a:lvl7pPr>
-            <a:lvl8pPr marL="3200400" indent="0">
+            <a:lvl8pPr marL="5039990" indent="0">
               <a:buNone/>
-              <a:defRPr sz="2000"/>
+              <a:defRPr sz="3150"/>
             </a:lvl8pPr>
-            <a:lvl9pPr marL="3657600" indent="0">
+            <a:lvl9pPr marL="5759988" indent="0">
               <a:buNone/>
-              <a:defRPr sz="2000"/>
+              <a:defRPr sz="3150"/>
             </a:lvl9pPr>
           </a:lstStyle>
           <a:p>
-            <a:endParaRPr lang="ko-KR" altLang="en-US"/>
-          </a:p>
-        </p:txBody>
-      </p:sp>
-      <p:sp>
-        <p:nvSpPr>
-          <p:cNvPr id="4" name="텍스트 개체 틀 3">
-            <a:extLst>
-              <a:ext uri="{FF2B5EF4-FFF2-40B4-BE49-F238E27FC236}">
-                <a16:creationId xmlns:a16="http://schemas.microsoft.com/office/drawing/2014/main" id="{84D6D424-E4FE-C4AA-FF07-AFC607188299}"/>
-              </a:ext>
-            </a:extLst>
-          </p:cNvPr>
+            <a:r>
+              <a:rPr lang="ko-KR" altLang="en-US"/>
+              <a:t>그림을 추가하려면 아이콘을 클릭하십시오</a:t>
+            </a:r>
+            <a:endParaRPr lang="en-US" dirty="0"/>
+          </a:p>
+        </p:txBody>
+      </p:sp>
+      <p:sp>
+        <p:nvSpPr>
+          <p:cNvPr id="4" name="Text Placeholder 3"/>
           <p:cNvSpPr>
             <a:spLocks noGrp="1"/>
           </p:cNvSpPr>
@@ -2592,8 +2287,8 @@
         </p:nvSpPr>
         <p:spPr>
           <a:xfrm>
-            <a:off x="839788" y="2057400"/>
-            <a:ext cx="3932237" cy="3811588"/>
+            <a:off x="1487782" y="3239929"/>
+            <a:ext cx="6966408" cy="6002369"/>
           </a:xfrm>
         </p:spPr>
         <p:txBody>
@@ -2601,39 +2296,39 @@
           <a:lstStyle>
             <a:lvl1pPr marL="0" indent="0">
               <a:buNone/>
-              <a:defRPr sz="1600"/>
+              <a:defRPr sz="2520"/>
             </a:lvl1pPr>
-            <a:lvl2pPr marL="457200" indent="0">
+            <a:lvl2pPr marL="719999" indent="0">
               <a:buNone/>
-              <a:defRPr sz="1400"/>
+              <a:defRPr sz="2205"/>
             </a:lvl2pPr>
-            <a:lvl3pPr marL="914400" indent="0">
+            <a:lvl3pPr marL="1439997" indent="0">
               <a:buNone/>
-              <a:defRPr sz="1200"/>
+              <a:defRPr sz="1890"/>
             </a:lvl3pPr>
-            <a:lvl4pPr marL="1371600" indent="0">
+            <a:lvl4pPr marL="2159996" indent="0">
               <a:buNone/>
-              <a:defRPr sz="1000"/>
+              <a:defRPr sz="1575"/>
             </a:lvl4pPr>
-            <a:lvl5pPr marL="1828800" indent="0">
+            <a:lvl5pPr marL="2879994" indent="0">
               <a:buNone/>
-              <a:defRPr sz="1000"/>
+              <a:defRPr sz="1575"/>
             </a:lvl5pPr>
-            <a:lvl6pPr marL="2286000" indent="0">
+            <a:lvl6pPr marL="3599993" indent="0">
               <a:buNone/>
-              <a:defRPr sz="1000"/>
+              <a:defRPr sz="1575"/>
             </a:lvl6pPr>
-            <a:lvl7pPr marL="2743200" indent="0">
+            <a:lvl7pPr marL="4319991" indent="0">
               <a:buNone/>
-              <a:defRPr sz="1000"/>
+              <a:defRPr sz="1575"/>
             </a:lvl7pPr>
-            <a:lvl8pPr marL="3200400" indent="0">
+            <a:lvl8pPr marL="5039990" indent="0">
               <a:buNone/>
-              <a:defRPr sz="1000"/>
+              <a:defRPr sz="1575"/>
             </a:lvl8pPr>
-            <a:lvl9pPr marL="3657600" indent="0">
+            <a:lvl9pPr marL="5759988" indent="0">
               <a:buNone/>
-              <a:defRPr sz="1000"/>
+              <a:defRPr sz="1575"/>
             </a:lvl9pPr>
           </a:lstStyle>
           <a:p>
@@ -2647,13 +2342,7 @@
       </p:sp>
       <p:sp>
         <p:nvSpPr>
-          <p:cNvPr id="5" name="날짜 개체 틀 4">
-            <a:extLst>
-              <a:ext uri="{FF2B5EF4-FFF2-40B4-BE49-F238E27FC236}">
-                <a16:creationId xmlns:a16="http://schemas.microsoft.com/office/drawing/2014/main" id="{1286B1F8-C35E-8BF7-4170-F40AC8509CFF}"/>
-              </a:ext>
-            </a:extLst>
-          </p:cNvPr>
+          <p:cNvPr id="5" name="Date Placeholder 4"/>
           <p:cNvSpPr>
             <a:spLocks noGrp="1"/>
           </p:cNvSpPr>
@@ -2668,7 +2357,7 @@
           <a:p>
             <a:fld id="{505BB82E-C503-4E54-B9F4-7F874FE65A6C}" type="datetimeFigureOut">
               <a:rPr lang="ko-KR" altLang="en-US" smtClean="0"/>
-              <a:t>2025-07-13</a:t>
+              <a:t>2025-09-01</a:t>
             </a:fld>
             <a:endParaRPr lang="ko-KR" altLang="en-US"/>
           </a:p>
@@ -2676,13 +2365,7 @@
       </p:sp>
       <p:sp>
         <p:nvSpPr>
-          <p:cNvPr id="6" name="바닥글 개체 틀 5">
-            <a:extLst>
-              <a:ext uri="{FF2B5EF4-FFF2-40B4-BE49-F238E27FC236}">
-                <a16:creationId xmlns:a16="http://schemas.microsoft.com/office/drawing/2014/main" id="{EDB59B18-7EA3-1820-DAD9-1109150020D7}"/>
-              </a:ext>
-            </a:extLst>
-          </p:cNvPr>
+          <p:cNvPr id="6" name="Footer Placeholder 5"/>
           <p:cNvSpPr>
             <a:spLocks noGrp="1"/>
           </p:cNvSpPr>
@@ -2701,13 +2384,7 @@
       </p:sp>
       <p:sp>
         <p:nvSpPr>
-          <p:cNvPr id="7" name="슬라이드 번호 개체 틀 6">
-            <a:extLst>
-              <a:ext uri="{FF2B5EF4-FFF2-40B4-BE49-F238E27FC236}">
-                <a16:creationId xmlns:a16="http://schemas.microsoft.com/office/drawing/2014/main" id="{69990CAD-876F-07B0-E57F-D859E0A7D7CA}"/>
-              </a:ext>
-            </a:extLst>
-          </p:cNvPr>
+          <p:cNvPr id="7" name="Slide Number Placeholder 6"/>
           <p:cNvSpPr>
             <a:spLocks noGrp="1"/>
           </p:cNvSpPr>
@@ -2731,7 +2408,7 @@
     </p:spTree>
     <p:extLst>
       <p:ext uri="{BB962C8B-B14F-4D97-AF65-F5344CB8AC3E}">
-        <p14:creationId xmlns:p14="http://schemas.microsoft.com/office/powerpoint/2010/main" val="1057088865"/>
+        <p14:creationId xmlns:p14="http://schemas.microsoft.com/office/powerpoint/2010/main" val="812708621"/>
       </p:ext>
     </p:extLst>
   </p:cSld>
@@ -2765,13 +2442,7 @@
       </p:grpSpPr>
       <p:sp>
         <p:nvSpPr>
-          <p:cNvPr id="2" name="제목 개체 틀 1">
-            <a:extLst>
-              <a:ext uri="{FF2B5EF4-FFF2-40B4-BE49-F238E27FC236}">
-                <a16:creationId xmlns:a16="http://schemas.microsoft.com/office/drawing/2014/main" id="{FBAF7CE3-5CC6-9D65-9452-58DA6215B442}"/>
-              </a:ext>
-            </a:extLst>
-          </p:cNvPr>
+          <p:cNvPr id="2" name="Title Placeholder 1"/>
           <p:cNvSpPr>
             <a:spLocks noGrp="1"/>
           </p:cNvSpPr>
@@ -2781,8 +2452,8 @@
         </p:nvSpPr>
         <p:spPr>
           <a:xfrm>
-            <a:off x="838200" y="365125"/>
-            <a:ext cx="10515600" cy="1325563"/>
+            <a:off x="1484968" y="574988"/>
+            <a:ext cx="18629590" cy="2087455"/>
           </a:xfrm>
           <a:prstGeom prst="rect">
             <a:avLst/>
@@ -2798,18 +2469,13 @@
               <a:rPr lang="ko-KR" altLang="en-US"/>
               <a:t>마스터 제목 스타일 편집</a:t>
             </a:r>
-          </a:p>
-        </p:txBody>
-      </p:sp>
-      <p:sp>
-        <p:nvSpPr>
-          <p:cNvPr id="3" name="텍스트 개체 틀 2">
-            <a:extLst>
-              <a:ext uri="{FF2B5EF4-FFF2-40B4-BE49-F238E27FC236}">
-                <a16:creationId xmlns:a16="http://schemas.microsoft.com/office/drawing/2014/main" id="{D684EFFE-DD03-04FD-27B1-1EB4E1267C63}"/>
-              </a:ext>
-            </a:extLst>
-          </p:cNvPr>
+            <a:endParaRPr lang="en-US" dirty="0"/>
+          </a:p>
+        </p:txBody>
+      </p:sp>
+      <p:sp>
+        <p:nvSpPr>
+          <p:cNvPr id="3" name="Text Placeholder 2"/>
           <p:cNvSpPr>
             <a:spLocks noGrp="1"/>
           </p:cNvSpPr>
@@ -2819,8 +2485,8 @@
         </p:nvSpPr>
         <p:spPr>
           <a:xfrm>
-            <a:off x="838200" y="1825625"/>
-            <a:ext cx="10515600" cy="4351338"/>
+            <a:off x="1484968" y="2874937"/>
+            <a:ext cx="18629590" cy="6852350"/>
           </a:xfrm>
           <a:prstGeom prst="rect">
             <a:avLst/>
@@ -2865,18 +2531,13 @@
               <a:rPr lang="ko-KR" altLang="en-US"/>
               <a:t>다섯 번째 수준</a:t>
             </a:r>
-          </a:p>
-        </p:txBody>
-      </p:sp>
-      <p:sp>
-        <p:nvSpPr>
-          <p:cNvPr id="4" name="날짜 개체 틀 3">
-            <a:extLst>
-              <a:ext uri="{FF2B5EF4-FFF2-40B4-BE49-F238E27FC236}">
-                <a16:creationId xmlns:a16="http://schemas.microsoft.com/office/drawing/2014/main" id="{5B42357D-4AFD-311D-5382-69FEC7B79F35}"/>
-              </a:ext>
-            </a:extLst>
-          </p:cNvPr>
+            <a:endParaRPr lang="en-US" dirty="0"/>
+          </a:p>
+        </p:txBody>
+      </p:sp>
+      <p:sp>
+        <p:nvSpPr>
+          <p:cNvPr id="4" name="Date Placeholder 3"/>
           <p:cNvSpPr>
             <a:spLocks noGrp="1"/>
           </p:cNvSpPr>
@@ -2886,8 +2547,8 @@
         </p:nvSpPr>
         <p:spPr>
           <a:xfrm>
-            <a:off x="838200" y="6356350"/>
-            <a:ext cx="2743200" cy="365125"/>
+            <a:off x="1484967" y="10009781"/>
+            <a:ext cx="4859893" cy="574987"/>
           </a:xfrm>
           <a:prstGeom prst="rect">
             <a:avLst/>
@@ -2897,7 +2558,7 @@
           <a:bodyPr vert="horz" lIns="91440" tIns="45720" rIns="91440" bIns="45720" rtlCol="0" anchor="ctr"/>
           <a:lstStyle>
             <a:lvl1pPr algn="l">
-              <a:defRPr sz="1200">
+              <a:defRPr sz="1890">
                 <a:solidFill>
                   <a:schemeClr val="tx1">
                     <a:tint val="75000"/>
@@ -2909,7 +2570,7 @@
           <a:p>
             <a:fld id="{505BB82E-C503-4E54-B9F4-7F874FE65A6C}" type="datetimeFigureOut">
               <a:rPr lang="ko-KR" altLang="en-US" smtClean="0"/>
-              <a:t>2025-07-13</a:t>
+              <a:t>2025-09-01</a:t>
             </a:fld>
             <a:endParaRPr lang="ko-KR" altLang="en-US"/>
           </a:p>
@@ -2917,13 +2578,7 @@
       </p:sp>
       <p:sp>
         <p:nvSpPr>
-          <p:cNvPr id="5" name="바닥글 개체 틀 4">
-            <a:extLst>
-              <a:ext uri="{FF2B5EF4-FFF2-40B4-BE49-F238E27FC236}">
-                <a16:creationId xmlns:a16="http://schemas.microsoft.com/office/drawing/2014/main" id="{91B16524-2FAD-AD6D-A413-D51AF766A058}"/>
-              </a:ext>
-            </a:extLst>
-          </p:cNvPr>
+          <p:cNvPr id="5" name="Footer Placeholder 4"/>
           <p:cNvSpPr>
             <a:spLocks noGrp="1"/>
           </p:cNvSpPr>
@@ -2933,8 +2588,8 @@
         </p:nvSpPr>
         <p:spPr>
           <a:xfrm>
-            <a:off x="4038600" y="6356350"/>
-            <a:ext cx="4114800" cy="365125"/>
+            <a:off x="7154843" y="10009781"/>
+            <a:ext cx="7289840" cy="574987"/>
           </a:xfrm>
           <a:prstGeom prst="rect">
             <a:avLst/>
@@ -2944,7 +2599,7 @@
           <a:bodyPr vert="horz" lIns="91440" tIns="45720" rIns="91440" bIns="45720" rtlCol="0" anchor="ctr"/>
           <a:lstStyle>
             <a:lvl1pPr algn="ctr">
-              <a:defRPr sz="1200">
+              <a:defRPr sz="1890">
                 <a:solidFill>
                   <a:schemeClr val="tx1">
                     <a:tint val="75000"/>
@@ -2960,13 +2615,7 @@
       </p:sp>
       <p:sp>
         <p:nvSpPr>
-          <p:cNvPr id="6" name="슬라이드 번호 개체 틀 5">
-            <a:extLst>
-              <a:ext uri="{FF2B5EF4-FFF2-40B4-BE49-F238E27FC236}">
-                <a16:creationId xmlns:a16="http://schemas.microsoft.com/office/drawing/2014/main" id="{CB1551B9-E325-0592-61D3-390083F17B69}"/>
-              </a:ext>
-            </a:extLst>
-          </p:cNvPr>
+          <p:cNvPr id="6" name="Slide Number Placeholder 5"/>
           <p:cNvSpPr>
             <a:spLocks noGrp="1"/>
           </p:cNvSpPr>
@@ -2976,8 +2625,8 @@
         </p:nvSpPr>
         <p:spPr>
           <a:xfrm>
-            <a:off x="8610600" y="6356350"/>
-            <a:ext cx="2743200" cy="365125"/>
+            <a:off x="15254665" y="10009781"/>
+            <a:ext cx="4859893" cy="574987"/>
           </a:xfrm>
           <a:prstGeom prst="rect">
             <a:avLst/>
@@ -2987,7 +2636,7 @@
           <a:bodyPr vert="horz" lIns="91440" tIns="45720" rIns="91440" bIns="45720" rtlCol="0" anchor="ctr"/>
           <a:lstStyle>
             <a:lvl1pPr algn="r">
-              <a:defRPr sz="1200">
+              <a:defRPr sz="1890">
                 <a:solidFill>
                   <a:schemeClr val="tx1">
                     <a:tint val="75000"/>
@@ -3008,27 +2657,27 @@
     </p:spTree>
     <p:extLst>
       <p:ext uri="{BB962C8B-B14F-4D97-AF65-F5344CB8AC3E}">
-        <p14:creationId xmlns:p14="http://schemas.microsoft.com/office/powerpoint/2010/main" val="3162706397"/>
+        <p14:creationId xmlns:p14="http://schemas.microsoft.com/office/powerpoint/2010/main" val="3203708401"/>
       </p:ext>
     </p:extLst>
   </p:cSld>
   <p:clrMap bg1="lt1" tx1="dk1" bg2="lt2" tx2="dk2" accent1="accent1" accent2="accent2" accent3="accent3" accent4="accent4" accent5="accent5" accent6="accent6" hlink="hlink" folHlink="folHlink"/>
   <p:sldLayoutIdLst>
-    <p:sldLayoutId id="2147483649" r:id="rId1"/>
-    <p:sldLayoutId id="2147483650" r:id="rId2"/>
-    <p:sldLayoutId id="2147483651" r:id="rId3"/>
-    <p:sldLayoutId id="2147483652" r:id="rId4"/>
-    <p:sldLayoutId id="2147483653" r:id="rId5"/>
-    <p:sldLayoutId id="2147483654" r:id="rId6"/>
-    <p:sldLayoutId id="2147483655" r:id="rId7"/>
-    <p:sldLayoutId id="2147483656" r:id="rId8"/>
-    <p:sldLayoutId id="2147483657" r:id="rId9"/>
-    <p:sldLayoutId id="2147483658" r:id="rId10"/>
-    <p:sldLayoutId id="2147483659" r:id="rId11"/>
+    <p:sldLayoutId id="2147483661" r:id="rId1"/>
+    <p:sldLayoutId id="2147483662" r:id="rId2"/>
+    <p:sldLayoutId id="2147483663" r:id="rId3"/>
+    <p:sldLayoutId id="2147483664" r:id="rId4"/>
+    <p:sldLayoutId id="2147483665" r:id="rId5"/>
+    <p:sldLayoutId id="2147483666" r:id="rId6"/>
+    <p:sldLayoutId id="2147483667" r:id="rId7"/>
+    <p:sldLayoutId id="2147483668" r:id="rId8"/>
+    <p:sldLayoutId id="2147483669" r:id="rId9"/>
+    <p:sldLayoutId id="2147483670" r:id="rId10"/>
+    <p:sldLayoutId id="2147483671" r:id="rId11"/>
   </p:sldLayoutIdLst>
   <p:txStyles>
     <p:titleStyle>
-      <a:lvl1pPr algn="l" defTabSz="914400" rtl="0" eaLnBrk="1" latinLnBrk="1" hangingPunct="1">
+      <a:lvl1pPr algn="l" defTabSz="1439997" rtl="0" eaLnBrk="1" latinLnBrk="1" hangingPunct="1">
         <a:lnSpc>
           <a:spcPct val="90000"/>
         </a:lnSpc>
@@ -3036,7 +2685,7 @@
           <a:spcPct val="0"/>
         </a:spcBef>
         <a:buNone/>
-        <a:defRPr sz="4400" kern="1200">
+        <a:defRPr sz="6929" kern="1200">
           <a:solidFill>
             <a:schemeClr val="tx1"/>
           </a:solidFill>
@@ -3047,16 +2696,16 @@
       </a:lvl1pPr>
     </p:titleStyle>
     <p:bodyStyle>
-      <a:lvl1pPr marL="228600" indent="-228600" algn="l" defTabSz="914400" rtl="0" eaLnBrk="1" latinLnBrk="1" hangingPunct="1">
+      <a:lvl1pPr marL="359999" indent="-359999" algn="l" defTabSz="1439997" rtl="0" eaLnBrk="1" latinLnBrk="1" hangingPunct="1">
         <a:lnSpc>
           <a:spcPct val="90000"/>
         </a:lnSpc>
         <a:spcBef>
-          <a:spcPts val="1000"/>
+          <a:spcPts val="1575"/>
         </a:spcBef>
         <a:buFont typeface="Arial" panose="020B0604020202020204" pitchFamily="34" charset="0"/>
         <a:buChar char="•"/>
-        <a:defRPr sz="2800" kern="1200">
+        <a:defRPr sz="4409" kern="1200">
           <a:solidFill>
             <a:schemeClr val="tx1"/>
           </a:solidFill>
@@ -3065,16 +2714,16 @@
           <a:cs typeface="+mn-cs"/>
         </a:defRPr>
       </a:lvl1pPr>
-      <a:lvl2pPr marL="685800" indent="-228600" algn="l" defTabSz="914400" rtl="0" eaLnBrk="1" latinLnBrk="1" hangingPunct="1">
+      <a:lvl2pPr marL="1079998" indent="-359999" algn="l" defTabSz="1439997" rtl="0" eaLnBrk="1" latinLnBrk="1" hangingPunct="1">
         <a:lnSpc>
           <a:spcPct val="90000"/>
         </a:lnSpc>
         <a:spcBef>
-          <a:spcPts val="500"/>
+          <a:spcPts val="787"/>
         </a:spcBef>
         <a:buFont typeface="Arial" panose="020B0604020202020204" pitchFamily="34" charset="0"/>
         <a:buChar char="•"/>
-        <a:defRPr sz="2400" kern="1200">
+        <a:defRPr sz="3780" kern="1200">
           <a:solidFill>
             <a:schemeClr val="tx1"/>
           </a:solidFill>
@@ -3083,16 +2732,16 @@
           <a:cs typeface="+mn-cs"/>
         </a:defRPr>
       </a:lvl2pPr>
-      <a:lvl3pPr marL="1143000" indent="-228600" algn="l" defTabSz="914400" rtl="0" eaLnBrk="1" latinLnBrk="1" hangingPunct="1">
+      <a:lvl3pPr marL="1799996" indent="-359999" algn="l" defTabSz="1439997" rtl="0" eaLnBrk="1" latinLnBrk="1" hangingPunct="1">
         <a:lnSpc>
           <a:spcPct val="90000"/>
         </a:lnSpc>
         <a:spcBef>
-          <a:spcPts val="500"/>
+          <a:spcPts val="787"/>
         </a:spcBef>
         <a:buFont typeface="Arial" panose="020B0604020202020204" pitchFamily="34" charset="0"/>
         <a:buChar char="•"/>
-        <a:defRPr sz="2000" kern="1200">
+        <a:defRPr sz="3150" kern="1200">
           <a:solidFill>
             <a:schemeClr val="tx1"/>
           </a:solidFill>
@@ -3101,16 +2750,16 @@
           <a:cs typeface="+mn-cs"/>
         </a:defRPr>
       </a:lvl3pPr>
-      <a:lvl4pPr marL="1600200" indent="-228600" algn="l" defTabSz="914400" rtl="0" eaLnBrk="1" latinLnBrk="1" hangingPunct="1">
+      <a:lvl4pPr marL="2519995" indent="-359999" algn="l" defTabSz="1439997" rtl="0" eaLnBrk="1" latinLnBrk="1" hangingPunct="1">
         <a:lnSpc>
           <a:spcPct val="90000"/>
         </a:lnSpc>
         <a:spcBef>
-          <a:spcPts val="500"/>
+          <a:spcPts val="787"/>
         </a:spcBef>
         <a:buFont typeface="Arial" panose="020B0604020202020204" pitchFamily="34" charset="0"/>
         <a:buChar char="•"/>
-        <a:defRPr sz="1800" kern="1200">
+        <a:defRPr sz="2835" kern="1200">
           <a:solidFill>
             <a:schemeClr val="tx1"/>
           </a:solidFill>
@@ -3119,16 +2768,16 @@
           <a:cs typeface="+mn-cs"/>
         </a:defRPr>
       </a:lvl4pPr>
-      <a:lvl5pPr marL="2057400" indent="-228600" algn="l" defTabSz="914400" rtl="0" eaLnBrk="1" latinLnBrk="1" hangingPunct="1">
+      <a:lvl5pPr marL="3239994" indent="-359999" algn="l" defTabSz="1439997" rtl="0" eaLnBrk="1" latinLnBrk="1" hangingPunct="1">
         <a:lnSpc>
           <a:spcPct val="90000"/>
         </a:lnSpc>
         <a:spcBef>
-          <a:spcPts val="500"/>
+          <a:spcPts val="787"/>
         </a:spcBef>
         <a:buFont typeface="Arial" panose="020B0604020202020204" pitchFamily="34" charset="0"/>
         <a:buChar char="•"/>
-        <a:defRPr sz="1800" kern="1200">
+        <a:defRPr sz="2835" kern="1200">
           <a:solidFill>
             <a:schemeClr val="tx1"/>
           </a:solidFill>
@@ -3137,16 +2786,16 @@
           <a:cs typeface="+mn-cs"/>
         </a:defRPr>
       </a:lvl5pPr>
-      <a:lvl6pPr marL="2514600" indent="-228600" algn="l" defTabSz="914400" rtl="0" eaLnBrk="1" latinLnBrk="1" hangingPunct="1">
+      <a:lvl6pPr marL="3959992" indent="-359999" algn="l" defTabSz="1439997" rtl="0" eaLnBrk="1" latinLnBrk="1" hangingPunct="1">
         <a:lnSpc>
           <a:spcPct val="90000"/>
         </a:lnSpc>
         <a:spcBef>
-          <a:spcPts val="500"/>
+          <a:spcPts val="787"/>
         </a:spcBef>
         <a:buFont typeface="Arial" panose="020B0604020202020204" pitchFamily="34" charset="0"/>
         <a:buChar char="•"/>
-        <a:defRPr sz="1800" kern="1200">
+        <a:defRPr sz="2835" kern="1200">
           <a:solidFill>
             <a:schemeClr val="tx1"/>
           </a:solidFill>
@@ -3155,16 +2804,16 @@
           <a:cs typeface="+mn-cs"/>
         </a:defRPr>
       </a:lvl6pPr>
-      <a:lvl7pPr marL="2971800" indent="-228600" algn="l" defTabSz="914400" rtl="0" eaLnBrk="1" latinLnBrk="1" hangingPunct="1">
+      <a:lvl7pPr marL="4679991" indent="-359999" algn="l" defTabSz="1439997" rtl="0" eaLnBrk="1" latinLnBrk="1" hangingPunct="1">
         <a:lnSpc>
           <a:spcPct val="90000"/>
         </a:lnSpc>
         <a:spcBef>
-          <a:spcPts val="500"/>
+          <a:spcPts val="787"/>
         </a:spcBef>
         <a:buFont typeface="Arial" panose="020B0604020202020204" pitchFamily="34" charset="0"/>
         <a:buChar char="•"/>
-        <a:defRPr sz="1800" kern="1200">
+        <a:defRPr sz="2835" kern="1200">
           <a:solidFill>
             <a:schemeClr val="tx1"/>
           </a:solidFill>
@@ -3173,16 +2822,16 @@
           <a:cs typeface="+mn-cs"/>
         </a:defRPr>
       </a:lvl7pPr>
-      <a:lvl8pPr marL="3429000" indent="-228600" algn="l" defTabSz="914400" rtl="0" eaLnBrk="1" latinLnBrk="1" hangingPunct="1">
+      <a:lvl8pPr marL="5399989" indent="-359999" algn="l" defTabSz="1439997" rtl="0" eaLnBrk="1" latinLnBrk="1" hangingPunct="1">
         <a:lnSpc>
           <a:spcPct val="90000"/>
         </a:lnSpc>
         <a:spcBef>
-          <a:spcPts val="500"/>
+          <a:spcPts val="787"/>
         </a:spcBef>
         <a:buFont typeface="Arial" panose="020B0604020202020204" pitchFamily="34" charset="0"/>
         <a:buChar char="•"/>
-        <a:defRPr sz="1800" kern="1200">
+        <a:defRPr sz="2835" kern="1200">
           <a:solidFill>
             <a:schemeClr val="tx1"/>
           </a:solidFill>
@@ -3191,16 +2840,16 @@
           <a:cs typeface="+mn-cs"/>
         </a:defRPr>
       </a:lvl8pPr>
-      <a:lvl9pPr marL="3886200" indent="-228600" algn="l" defTabSz="914400" rtl="0" eaLnBrk="1" latinLnBrk="1" hangingPunct="1">
+      <a:lvl9pPr marL="6119988" indent="-359999" algn="l" defTabSz="1439997" rtl="0" eaLnBrk="1" latinLnBrk="1" hangingPunct="1">
         <a:lnSpc>
           <a:spcPct val="90000"/>
         </a:lnSpc>
         <a:spcBef>
-          <a:spcPts val="500"/>
+          <a:spcPts val="787"/>
         </a:spcBef>
         <a:buFont typeface="Arial" panose="020B0604020202020204" pitchFamily="34" charset="0"/>
         <a:buChar char="•"/>
-        <a:defRPr sz="1800" kern="1200">
+        <a:defRPr sz="2835" kern="1200">
           <a:solidFill>
             <a:schemeClr val="tx1"/>
           </a:solidFill>
@@ -3212,10 +2861,10 @@
     </p:bodyStyle>
     <p:otherStyle>
       <a:defPPr>
-        <a:defRPr lang="ko-KR"/>
+        <a:defRPr lang="en-US"/>
       </a:defPPr>
-      <a:lvl1pPr marL="0" algn="l" defTabSz="914400" rtl="0" eaLnBrk="1" latinLnBrk="1" hangingPunct="1">
-        <a:defRPr sz="1800" kern="1200">
+      <a:lvl1pPr marL="0" algn="l" defTabSz="1439997" rtl="0" eaLnBrk="1" latinLnBrk="1" hangingPunct="1">
+        <a:defRPr sz="2835" kern="1200">
           <a:solidFill>
             <a:schemeClr val="tx1"/>
           </a:solidFill>
@@ -3224,8 +2873,8 @@
           <a:cs typeface="+mn-cs"/>
         </a:defRPr>
       </a:lvl1pPr>
-      <a:lvl2pPr marL="457200" algn="l" defTabSz="914400" rtl="0" eaLnBrk="1" latinLnBrk="1" hangingPunct="1">
-        <a:defRPr sz="1800" kern="1200">
+      <a:lvl2pPr marL="719999" algn="l" defTabSz="1439997" rtl="0" eaLnBrk="1" latinLnBrk="1" hangingPunct="1">
+        <a:defRPr sz="2835" kern="1200">
           <a:solidFill>
             <a:schemeClr val="tx1"/>
           </a:solidFill>
@@ -3234,8 +2883,8 @@
           <a:cs typeface="+mn-cs"/>
         </a:defRPr>
       </a:lvl2pPr>
-      <a:lvl3pPr marL="914400" algn="l" defTabSz="914400" rtl="0" eaLnBrk="1" latinLnBrk="1" hangingPunct="1">
-        <a:defRPr sz="1800" kern="1200">
+      <a:lvl3pPr marL="1439997" algn="l" defTabSz="1439997" rtl="0" eaLnBrk="1" latinLnBrk="1" hangingPunct="1">
+        <a:defRPr sz="2835" kern="1200">
           <a:solidFill>
             <a:schemeClr val="tx1"/>
           </a:solidFill>
@@ -3244,8 +2893,8 @@
           <a:cs typeface="+mn-cs"/>
         </a:defRPr>
       </a:lvl3pPr>
-      <a:lvl4pPr marL="1371600" algn="l" defTabSz="914400" rtl="0" eaLnBrk="1" latinLnBrk="1" hangingPunct="1">
-        <a:defRPr sz="1800" kern="1200">
+      <a:lvl4pPr marL="2159996" algn="l" defTabSz="1439997" rtl="0" eaLnBrk="1" latinLnBrk="1" hangingPunct="1">
+        <a:defRPr sz="2835" kern="1200">
           <a:solidFill>
             <a:schemeClr val="tx1"/>
           </a:solidFill>
@@ -3254,8 +2903,8 @@
           <a:cs typeface="+mn-cs"/>
         </a:defRPr>
       </a:lvl4pPr>
-      <a:lvl5pPr marL="1828800" algn="l" defTabSz="914400" rtl="0" eaLnBrk="1" latinLnBrk="1" hangingPunct="1">
-        <a:defRPr sz="1800" kern="1200">
+      <a:lvl5pPr marL="2879994" algn="l" defTabSz="1439997" rtl="0" eaLnBrk="1" latinLnBrk="1" hangingPunct="1">
+        <a:defRPr sz="2835" kern="1200">
           <a:solidFill>
             <a:schemeClr val="tx1"/>
           </a:solidFill>
@@ -3264,8 +2913,8 @@
           <a:cs typeface="+mn-cs"/>
         </a:defRPr>
       </a:lvl5pPr>
-      <a:lvl6pPr marL="2286000" algn="l" defTabSz="914400" rtl="0" eaLnBrk="1" latinLnBrk="1" hangingPunct="1">
-        <a:defRPr sz="1800" kern="1200">
+      <a:lvl6pPr marL="3599993" algn="l" defTabSz="1439997" rtl="0" eaLnBrk="1" latinLnBrk="1" hangingPunct="1">
+        <a:defRPr sz="2835" kern="1200">
           <a:solidFill>
             <a:schemeClr val="tx1"/>
           </a:solidFill>
@@ -3274,8 +2923,8 @@
           <a:cs typeface="+mn-cs"/>
         </a:defRPr>
       </a:lvl6pPr>
-      <a:lvl7pPr marL="2743200" algn="l" defTabSz="914400" rtl="0" eaLnBrk="1" latinLnBrk="1" hangingPunct="1">
-        <a:defRPr sz="1800" kern="1200">
+      <a:lvl7pPr marL="4319991" algn="l" defTabSz="1439997" rtl="0" eaLnBrk="1" latinLnBrk="1" hangingPunct="1">
+        <a:defRPr sz="2835" kern="1200">
           <a:solidFill>
             <a:schemeClr val="tx1"/>
           </a:solidFill>
@@ -3284,8 +2933,8 @@
           <a:cs typeface="+mn-cs"/>
         </a:defRPr>
       </a:lvl7pPr>
-      <a:lvl8pPr marL="3200400" algn="l" defTabSz="914400" rtl="0" eaLnBrk="1" latinLnBrk="1" hangingPunct="1">
-        <a:defRPr sz="1800" kern="1200">
+      <a:lvl8pPr marL="5039990" algn="l" defTabSz="1439997" rtl="0" eaLnBrk="1" latinLnBrk="1" hangingPunct="1">
+        <a:defRPr sz="2835" kern="1200">
           <a:solidFill>
             <a:schemeClr val="tx1"/>
           </a:solidFill>
@@ -3294,8 +2943,8 @@
           <a:cs typeface="+mn-cs"/>
         </a:defRPr>
       </a:lvl8pPr>
-      <a:lvl9pPr marL="3657600" algn="l" defTabSz="914400" rtl="0" eaLnBrk="1" latinLnBrk="1" hangingPunct="1">
-        <a:defRPr sz="1800" kern="1200">
+      <a:lvl9pPr marL="5759988" algn="l" defTabSz="1439997" rtl="0" eaLnBrk="1" latinLnBrk="1" hangingPunct="1">
+        <a:defRPr sz="2835" kern="1200">
           <a:solidFill>
             <a:schemeClr val="tx1"/>
           </a:solidFill>
@@ -3340,7 +2989,7 @@
         </p:nvGrpSpPr>
         <p:grpSpPr>
           <a:xfrm>
-            <a:off x="764771" y="1052944"/>
+            <a:off x="5468533" y="3023825"/>
             <a:ext cx="10626348" cy="4320000"/>
             <a:chOff x="764771" y="1052944"/>
             <a:chExt cx="10626348" cy="4320000"/>
@@ -4076,7 +3725,7 @@
           <p:spPr>
             <a:xfrm>
               <a:off x="764771" y="4373613"/>
-              <a:ext cx="180000" cy="369332"/>
+              <a:ext cx="180000" cy="563359"/>
             </a:xfrm>
             <a:prstGeom prst="rect">
               <a:avLst/>
@@ -4116,8 +3765,8 @@
         </p:nvSpPr>
         <p:spPr>
           <a:xfrm>
-            <a:off x="764771" y="6040207"/>
-            <a:ext cx="7498080" cy="369332"/>
+            <a:off x="5468533" y="8011088"/>
+            <a:ext cx="7498080" cy="1034386"/>
           </a:xfrm>
           <a:prstGeom prst="rect">
             <a:avLst/>
@@ -4156,10 +3805,2717 @@
 </p:sld>
 </file>
 
+<file path=ppt/slides/slide2.xml><?xml version="1.0" encoding="utf-8"?>
+<p:sld xmlns:a="http://schemas.openxmlformats.org/drawingml/2006/main" xmlns:r="http://schemas.openxmlformats.org/officeDocument/2006/relationships" xmlns:p="http://schemas.openxmlformats.org/presentationml/2006/main">
+  <p:cSld>
+    <p:spTree>
+      <p:nvGrpSpPr>
+        <p:cNvPr id="1" name="">
+          <a:extLst>
+            <a:ext uri="{FF2B5EF4-FFF2-40B4-BE49-F238E27FC236}">
+              <a16:creationId xmlns:a16="http://schemas.microsoft.com/office/drawing/2014/main" id="{AE71A9D2-E2B1-7C72-4174-BC57F143639A}"/>
+            </a:ext>
+          </a:extLst>
+        </p:cNvPr>
+        <p:cNvGrpSpPr/>
+        <p:nvPr/>
+      </p:nvGrpSpPr>
+      <p:grpSpPr>
+        <a:xfrm>
+          <a:off x="0" y="0"/>
+          <a:ext cx="0" cy="0"/>
+          <a:chOff x="0" y="0"/>
+          <a:chExt cx="0" cy="0"/>
+        </a:xfrm>
+      </p:grpSpPr>
+      <p:sp>
+        <p:nvSpPr>
+          <p:cNvPr id="28" name="직사각형 27">
+            <a:extLst>
+              <a:ext uri="{FF2B5EF4-FFF2-40B4-BE49-F238E27FC236}">
+                <a16:creationId xmlns:a16="http://schemas.microsoft.com/office/drawing/2014/main" id="{AC5F1EA3-0734-B1BC-7D12-F8425FCC67D2}"/>
+              </a:ext>
+            </a:extLst>
+          </p:cNvPr>
+          <p:cNvSpPr/>
+          <p:nvPr/>
+        </p:nvSpPr>
+        <p:spPr>
+          <a:xfrm>
+            <a:off x="12458393" y="4358274"/>
+            <a:ext cx="1980000" cy="1800000"/>
+          </a:xfrm>
+          <a:prstGeom prst="rect">
+            <a:avLst/>
+          </a:prstGeom>
+          <a:noFill/>
+          <a:ln>
+            <a:solidFill>
+              <a:schemeClr val="tx1"/>
+            </a:solidFill>
+            <a:prstDash val="dash"/>
+          </a:ln>
+        </p:spPr>
+        <p:style>
+          <a:lnRef idx="2">
+            <a:schemeClr val="accent1">
+              <a:shade val="15000"/>
+            </a:schemeClr>
+          </a:lnRef>
+          <a:fillRef idx="1">
+            <a:schemeClr val="accent1"/>
+          </a:fillRef>
+          <a:effectRef idx="0">
+            <a:schemeClr val="accent1"/>
+          </a:effectRef>
+          <a:fontRef idx="minor">
+            <a:schemeClr val="lt1"/>
+          </a:fontRef>
+        </p:style>
+        <p:txBody>
+          <a:bodyPr rtlCol="0" anchor="ctr"/>
+          <a:lstStyle/>
+          <a:p>
+            <a:pPr algn="ctr"/>
+            <a:endParaRPr lang="ko-KR" altLang="en-US">
+              <a:latin typeface="KoPub돋움체_Pro Light" panose="00000300000000000000" pitchFamily="50" charset="-127"/>
+              <a:ea typeface="KoPub돋움체_Pro Light" panose="00000300000000000000" pitchFamily="50" charset="-127"/>
+            </a:endParaRPr>
+          </a:p>
+        </p:txBody>
+      </p:sp>
+      <p:sp>
+        <p:nvSpPr>
+          <p:cNvPr id="27" name="직사각형 26">
+            <a:extLst>
+              <a:ext uri="{FF2B5EF4-FFF2-40B4-BE49-F238E27FC236}">
+                <a16:creationId xmlns:a16="http://schemas.microsoft.com/office/drawing/2014/main" id="{8549086B-CA06-F6DE-48FD-F91992FFCE3F}"/>
+              </a:ext>
+            </a:extLst>
+          </p:cNvPr>
+          <p:cNvSpPr/>
+          <p:nvPr/>
+        </p:nvSpPr>
+        <p:spPr>
+          <a:xfrm>
+            <a:off x="5258393" y="4358274"/>
+            <a:ext cx="3780000" cy="3780000"/>
+          </a:xfrm>
+          <a:prstGeom prst="rect">
+            <a:avLst/>
+          </a:prstGeom>
+          <a:noFill/>
+          <a:ln>
+            <a:solidFill>
+              <a:schemeClr val="tx1"/>
+            </a:solidFill>
+            <a:prstDash val="dash"/>
+          </a:ln>
+        </p:spPr>
+        <p:style>
+          <a:lnRef idx="2">
+            <a:schemeClr val="accent1">
+              <a:shade val="15000"/>
+            </a:schemeClr>
+          </a:lnRef>
+          <a:fillRef idx="1">
+            <a:schemeClr val="accent1"/>
+          </a:fillRef>
+          <a:effectRef idx="0">
+            <a:schemeClr val="accent1"/>
+          </a:effectRef>
+          <a:fontRef idx="minor">
+            <a:schemeClr val="lt1"/>
+          </a:fontRef>
+        </p:style>
+        <p:txBody>
+          <a:bodyPr rtlCol="0" anchor="ctr"/>
+          <a:lstStyle/>
+          <a:p>
+            <a:pPr algn="ctr"/>
+            <a:endParaRPr lang="ko-KR" altLang="en-US">
+              <a:latin typeface="KoPub돋움체_Pro Light" panose="00000300000000000000" pitchFamily="50" charset="-127"/>
+              <a:ea typeface="KoPub돋움체_Pro Light" panose="00000300000000000000" pitchFamily="50" charset="-127"/>
+            </a:endParaRPr>
+          </a:p>
+        </p:txBody>
+      </p:sp>
+      <p:sp>
+        <p:nvSpPr>
+          <p:cNvPr id="26" name="직사각형 25">
+            <a:extLst>
+              <a:ext uri="{FF2B5EF4-FFF2-40B4-BE49-F238E27FC236}">
+                <a16:creationId xmlns:a16="http://schemas.microsoft.com/office/drawing/2014/main" id="{9B11D4FF-E3F1-EE32-BC5D-2D5D1BC5E728}"/>
+              </a:ext>
+            </a:extLst>
+          </p:cNvPr>
+          <p:cNvSpPr/>
+          <p:nvPr/>
+        </p:nvSpPr>
+        <p:spPr>
+          <a:xfrm>
+            <a:off x="9758393" y="4358274"/>
+            <a:ext cx="1980000" cy="3780000"/>
+          </a:xfrm>
+          <a:prstGeom prst="rect">
+            <a:avLst/>
+          </a:prstGeom>
+          <a:noFill/>
+          <a:ln>
+            <a:solidFill>
+              <a:schemeClr val="tx1"/>
+            </a:solidFill>
+            <a:prstDash val="dash"/>
+          </a:ln>
+        </p:spPr>
+        <p:style>
+          <a:lnRef idx="2">
+            <a:schemeClr val="accent1">
+              <a:shade val="15000"/>
+            </a:schemeClr>
+          </a:lnRef>
+          <a:fillRef idx="1">
+            <a:schemeClr val="accent1"/>
+          </a:fillRef>
+          <a:effectRef idx="0">
+            <a:schemeClr val="accent1"/>
+          </a:effectRef>
+          <a:fontRef idx="minor">
+            <a:schemeClr val="lt1"/>
+          </a:fontRef>
+        </p:style>
+        <p:txBody>
+          <a:bodyPr rtlCol="0" anchor="ctr"/>
+          <a:lstStyle/>
+          <a:p>
+            <a:pPr algn="ctr"/>
+            <a:endParaRPr lang="ko-KR" altLang="en-US">
+              <a:latin typeface="KoPub돋움체_Pro Light" panose="00000300000000000000" pitchFamily="50" charset="-127"/>
+              <a:ea typeface="KoPub돋움체_Pro Light" panose="00000300000000000000" pitchFamily="50" charset="-127"/>
+            </a:endParaRPr>
+          </a:p>
+        </p:txBody>
+      </p:sp>
+      <p:sp>
+        <p:nvSpPr>
+          <p:cNvPr id="3" name="직사각형 2">
+            <a:extLst>
+              <a:ext uri="{FF2B5EF4-FFF2-40B4-BE49-F238E27FC236}">
+                <a16:creationId xmlns:a16="http://schemas.microsoft.com/office/drawing/2014/main" id="{EEB49526-62BA-B0DF-88FF-B99D697D1B3C}"/>
+              </a:ext>
+            </a:extLst>
+          </p:cNvPr>
+          <p:cNvSpPr/>
+          <p:nvPr/>
+        </p:nvSpPr>
+        <p:spPr>
+          <a:xfrm>
+            <a:off x="10028393" y="4628275"/>
+            <a:ext cx="1440000" cy="1260000"/>
+          </a:xfrm>
+          <a:prstGeom prst="rect">
+            <a:avLst/>
+          </a:prstGeom>
+          <a:solidFill>
+            <a:schemeClr val="bg1"/>
+          </a:solidFill>
+          <a:ln>
+            <a:solidFill>
+              <a:schemeClr val="tx1"/>
+            </a:solidFill>
+          </a:ln>
+        </p:spPr>
+        <p:style>
+          <a:lnRef idx="2">
+            <a:schemeClr val="accent1">
+              <a:shade val="15000"/>
+            </a:schemeClr>
+          </a:lnRef>
+          <a:fillRef idx="1">
+            <a:schemeClr val="accent1"/>
+          </a:fillRef>
+          <a:effectRef idx="0">
+            <a:schemeClr val="accent1"/>
+          </a:effectRef>
+          <a:fontRef idx="minor">
+            <a:schemeClr val="lt1"/>
+          </a:fontRef>
+        </p:style>
+        <p:txBody>
+          <a:bodyPr rtlCol="0" anchor="ctr"/>
+          <a:lstStyle/>
+          <a:p>
+            <a:pPr algn="ctr"/>
+            <a:r>
+              <a:rPr lang="en-US" altLang="ko-KR" dirty="0">
+                <a:solidFill>
+                  <a:sysClr val="windowText" lastClr="000000"/>
+                </a:solidFill>
+                <a:latin typeface="KoPub돋움체_Pro Light" panose="00000300000000000000" pitchFamily="50" charset="-127"/>
+                <a:ea typeface="KoPub돋움체_Pro Light" panose="00000300000000000000" pitchFamily="50" charset="-127"/>
+              </a:rPr>
+              <a:t>Main</a:t>
+            </a:r>
+            <a:br>
+              <a:rPr lang="en-US" altLang="ko-KR" dirty="0">
+                <a:solidFill>
+                  <a:sysClr val="windowText" lastClr="000000"/>
+                </a:solidFill>
+                <a:latin typeface="KoPub돋움체_Pro Light" panose="00000300000000000000" pitchFamily="50" charset="-127"/>
+                <a:ea typeface="KoPub돋움체_Pro Light" panose="00000300000000000000" pitchFamily="50" charset="-127"/>
+              </a:rPr>
+            </a:br>
+            <a:r>
+              <a:rPr lang="en-US" altLang="ko-KR" dirty="0">
+                <a:solidFill>
+                  <a:sysClr val="windowText" lastClr="000000"/>
+                </a:solidFill>
+                <a:latin typeface="KoPub돋움체_Pro Light" panose="00000300000000000000" pitchFamily="50" charset="-127"/>
+                <a:ea typeface="KoPub돋움체_Pro Light" panose="00000300000000000000" pitchFamily="50" charset="-127"/>
+              </a:rPr>
+              <a:t>BE* Server</a:t>
+            </a:r>
+            <a:endParaRPr lang="ko-KR" altLang="en-US" dirty="0">
+              <a:solidFill>
+                <a:sysClr val="windowText" lastClr="000000"/>
+              </a:solidFill>
+              <a:latin typeface="KoPub돋움체_Pro Light" panose="00000300000000000000" pitchFamily="50" charset="-127"/>
+              <a:ea typeface="KoPub돋움체_Pro Light" panose="00000300000000000000" pitchFamily="50" charset="-127"/>
+            </a:endParaRPr>
+          </a:p>
+        </p:txBody>
+      </p:sp>
+      <p:sp>
+        <p:nvSpPr>
+          <p:cNvPr id="4" name="직사각형 3">
+            <a:extLst>
+              <a:ext uri="{FF2B5EF4-FFF2-40B4-BE49-F238E27FC236}">
+                <a16:creationId xmlns:a16="http://schemas.microsoft.com/office/drawing/2014/main" id="{8A042203-B508-6ED1-787F-48FF779E6F7A}"/>
+              </a:ext>
+            </a:extLst>
+          </p:cNvPr>
+          <p:cNvSpPr/>
+          <p:nvPr/>
+        </p:nvSpPr>
+        <p:spPr>
+          <a:xfrm>
+            <a:off x="5528392" y="4628275"/>
+            <a:ext cx="1440000" cy="1260000"/>
+          </a:xfrm>
+          <a:prstGeom prst="rect">
+            <a:avLst/>
+          </a:prstGeom>
+          <a:solidFill>
+            <a:schemeClr val="bg1"/>
+          </a:solidFill>
+          <a:ln>
+            <a:solidFill>
+              <a:schemeClr val="tx1"/>
+            </a:solidFill>
+          </a:ln>
+        </p:spPr>
+        <p:style>
+          <a:lnRef idx="2">
+            <a:schemeClr val="accent1">
+              <a:shade val="15000"/>
+            </a:schemeClr>
+          </a:lnRef>
+          <a:fillRef idx="1">
+            <a:schemeClr val="accent1"/>
+          </a:fillRef>
+          <a:effectRef idx="0">
+            <a:schemeClr val="accent1"/>
+          </a:effectRef>
+          <a:fontRef idx="minor">
+            <a:schemeClr val="lt1"/>
+          </a:fontRef>
+        </p:style>
+        <p:txBody>
+          <a:bodyPr rtlCol="0" anchor="ctr"/>
+          <a:lstStyle/>
+          <a:p>
+            <a:pPr algn="ctr"/>
+            <a:r>
+              <a:rPr lang="en-US" altLang="ko-KR" dirty="0">
+                <a:solidFill>
+                  <a:sysClr val="windowText" lastClr="000000"/>
+                </a:solidFill>
+                <a:latin typeface="KoPub돋움체_Pro Light" panose="00000300000000000000" pitchFamily="50" charset="-127"/>
+                <a:ea typeface="KoPub돋움체_Pro Light" panose="00000300000000000000" pitchFamily="50" charset="-127"/>
+              </a:rPr>
+              <a:t>Bot Server</a:t>
+            </a:r>
+            <a:endParaRPr lang="ko-KR" altLang="en-US" dirty="0">
+              <a:solidFill>
+                <a:sysClr val="windowText" lastClr="000000"/>
+              </a:solidFill>
+              <a:latin typeface="KoPub돋움체_Pro Light" panose="00000300000000000000" pitchFamily="50" charset="-127"/>
+              <a:ea typeface="KoPub돋움체_Pro Light" panose="00000300000000000000" pitchFamily="50" charset="-127"/>
+            </a:endParaRPr>
+          </a:p>
+        </p:txBody>
+      </p:sp>
+      <p:sp>
+        <p:nvSpPr>
+          <p:cNvPr id="5" name="직사각형 4">
+            <a:extLst>
+              <a:ext uri="{FF2B5EF4-FFF2-40B4-BE49-F238E27FC236}">
+                <a16:creationId xmlns:a16="http://schemas.microsoft.com/office/drawing/2014/main" id="{6124179C-8F49-F57E-6F74-CE4B469B4950}"/>
+              </a:ext>
+            </a:extLst>
+          </p:cNvPr>
+          <p:cNvSpPr/>
+          <p:nvPr/>
+        </p:nvSpPr>
+        <p:spPr>
+          <a:xfrm>
+            <a:off x="12728393" y="4628275"/>
+            <a:ext cx="1440000" cy="1260000"/>
+          </a:xfrm>
+          <a:prstGeom prst="rect">
+            <a:avLst/>
+          </a:prstGeom>
+          <a:solidFill>
+            <a:schemeClr val="bg1"/>
+          </a:solidFill>
+          <a:ln>
+            <a:solidFill>
+              <a:schemeClr val="tx1"/>
+            </a:solidFill>
+          </a:ln>
+        </p:spPr>
+        <p:style>
+          <a:lnRef idx="2">
+            <a:schemeClr val="accent1">
+              <a:shade val="15000"/>
+            </a:schemeClr>
+          </a:lnRef>
+          <a:fillRef idx="1">
+            <a:schemeClr val="accent1"/>
+          </a:fillRef>
+          <a:effectRef idx="0">
+            <a:schemeClr val="accent1"/>
+          </a:effectRef>
+          <a:fontRef idx="minor">
+            <a:schemeClr val="lt1"/>
+          </a:fontRef>
+        </p:style>
+        <p:txBody>
+          <a:bodyPr rtlCol="0" anchor="ctr"/>
+          <a:lstStyle/>
+          <a:p>
+            <a:pPr algn="ctr"/>
+            <a:r>
+              <a:rPr lang="en-US" altLang="ko-KR" dirty="0">
+                <a:solidFill>
+                  <a:sysClr val="windowText" lastClr="000000"/>
+                </a:solidFill>
+                <a:latin typeface="KoPub돋움체_Pro Light" panose="00000300000000000000" pitchFamily="50" charset="-127"/>
+                <a:ea typeface="KoPub돋움체_Pro Light" panose="00000300000000000000" pitchFamily="50" charset="-127"/>
+              </a:rPr>
+              <a:t>BFF Server</a:t>
+            </a:r>
+            <a:endParaRPr lang="ko-KR" altLang="en-US" dirty="0">
+              <a:solidFill>
+                <a:sysClr val="windowText" lastClr="000000"/>
+              </a:solidFill>
+              <a:latin typeface="KoPub돋움체_Pro Light" panose="00000300000000000000" pitchFamily="50" charset="-127"/>
+              <a:ea typeface="KoPub돋움체_Pro Light" panose="00000300000000000000" pitchFamily="50" charset="-127"/>
+            </a:endParaRPr>
+          </a:p>
+        </p:txBody>
+      </p:sp>
+      <p:cxnSp>
+        <p:nvCxnSpPr>
+          <p:cNvPr id="7" name="직선 화살표 연결선 6">
+            <a:extLst>
+              <a:ext uri="{FF2B5EF4-FFF2-40B4-BE49-F238E27FC236}">
+                <a16:creationId xmlns:a16="http://schemas.microsoft.com/office/drawing/2014/main" id="{5B535E01-17B3-4A91-8AFF-80EF2D28F97E}"/>
+              </a:ext>
+            </a:extLst>
+          </p:cNvPr>
+          <p:cNvCxnSpPr>
+            <a:cxnSpLocks/>
+            <a:stCxn id="3" idx="3"/>
+            <a:endCxn id="5" idx="1"/>
+          </p:cNvCxnSpPr>
+          <p:nvPr/>
+        </p:nvCxnSpPr>
+        <p:spPr>
+          <a:xfrm>
+            <a:off x="11468393" y="5258275"/>
+            <a:ext cx="1260000" cy="0"/>
+          </a:xfrm>
+          <a:prstGeom prst="straightConnector1">
+            <a:avLst/>
+          </a:prstGeom>
+          <a:ln w="12700">
+            <a:solidFill>
+              <a:schemeClr val="tx1"/>
+            </a:solidFill>
+            <a:headEnd type="triangle"/>
+            <a:tailEnd type="triangle"/>
+          </a:ln>
+        </p:spPr>
+        <p:style>
+          <a:lnRef idx="1">
+            <a:schemeClr val="accent1"/>
+          </a:lnRef>
+          <a:fillRef idx="0">
+            <a:schemeClr val="accent1"/>
+          </a:fillRef>
+          <a:effectRef idx="0">
+            <a:schemeClr val="accent1"/>
+          </a:effectRef>
+          <a:fontRef idx="minor">
+            <a:schemeClr val="tx1"/>
+          </a:fontRef>
+        </p:style>
+      </p:cxnSp>
+      <p:cxnSp>
+        <p:nvCxnSpPr>
+          <p:cNvPr id="9" name="직선 화살표 연결선 8">
+            <a:extLst>
+              <a:ext uri="{FF2B5EF4-FFF2-40B4-BE49-F238E27FC236}">
+                <a16:creationId xmlns:a16="http://schemas.microsoft.com/office/drawing/2014/main" id="{2E4364E9-ECE1-8E57-4ECA-E1FC136F2E0B}"/>
+              </a:ext>
+            </a:extLst>
+          </p:cNvPr>
+          <p:cNvCxnSpPr>
+            <a:cxnSpLocks/>
+            <a:stCxn id="4" idx="3"/>
+            <a:endCxn id="3" idx="1"/>
+          </p:cNvCxnSpPr>
+          <p:nvPr/>
+        </p:nvCxnSpPr>
+        <p:spPr>
+          <a:xfrm>
+            <a:off x="6968392" y="5258275"/>
+            <a:ext cx="3060001" cy="0"/>
+          </a:xfrm>
+          <a:prstGeom prst="straightConnector1">
+            <a:avLst/>
+          </a:prstGeom>
+          <a:ln w="12700">
+            <a:solidFill>
+              <a:schemeClr val="tx1"/>
+            </a:solidFill>
+            <a:headEnd type="triangle"/>
+            <a:tailEnd type="triangle"/>
+          </a:ln>
+        </p:spPr>
+        <p:style>
+          <a:lnRef idx="1">
+            <a:schemeClr val="accent1"/>
+          </a:lnRef>
+          <a:fillRef idx="0">
+            <a:schemeClr val="accent1"/>
+          </a:fillRef>
+          <a:effectRef idx="0">
+            <a:schemeClr val="accent1"/>
+          </a:effectRef>
+          <a:fontRef idx="minor">
+            <a:schemeClr val="tx1"/>
+          </a:fontRef>
+        </p:style>
+      </p:cxnSp>
+      <p:sp>
+        <p:nvSpPr>
+          <p:cNvPr id="10" name="원통형 9">
+            <a:extLst>
+              <a:ext uri="{FF2B5EF4-FFF2-40B4-BE49-F238E27FC236}">
+                <a16:creationId xmlns:a16="http://schemas.microsoft.com/office/drawing/2014/main" id="{1785C959-C15C-CB67-B1E3-44579E6BEF88}"/>
+              </a:ext>
+            </a:extLst>
+          </p:cNvPr>
+          <p:cNvSpPr/>
+          <p:nvPr/>
+        </p:nvSpPr>
+        <p:spPr>
+          <a:xfrm>
+            <a:off x="10028393" y="6587668"/>
+            <a:ext cx="1440000" cy="1260000"/>
+          </a:xfrm>
+          <a:prstGeom prst="can">
+            <a:avLst/>
+          </a:prstGeom>
+          <a:solidFill>
+            <a:schemeClr val="bg1"/>
+          </a:solidFill>
+          <a:ln>
+            <a:solidFill>
+              <a:schemeClr val="tx1"/>
+            </a:solidFill>
+          </a:ln>
+        </p:spPr>
+        <p:style>
+          <a:lnRef idx="2">
+            <a:schemeClr val="accent1">
+              <a:shade val="15000"/>
+            </a:schemeClr>
+          </a:lnRef>
+          <a:fillRef idx="1">
+            <a:schemeClr val="accent1"/>
+          </a:fillRef>
+          <a:effectRef idx="0">
+            <a:schemeClr val="accent1"/>
+          </a:effectRef>
+          <a:fontRef idx="minor">
+            <a:schemeClr val="lt1"/>
+          </a:fontRef>
+        </p:style>
+        <p:txBody>
+          <a:bodyPr rtlCol="0" anchor="ctr"/>
+          <a:lstStyle/>
+          <a:p>
+            <a:pPr algn="ctr"/>
+            <a:r>
+              <a:rPr lang="en-US" altLang="ko-KR" dirty="0">
+                <a:solidFill>
+                  <a:sysClr val="windowText" lastClr="000000"/>
+                </a:solidFill>
+                <a:latin typeface="KoPub돋움체_Pro Light" panose="00000300000000000000" pitchFamily="50" charset="-127"/>
+                <a:ea typeface="KoPub돋움체_Pro Light" panose="00000300000000000000" pitchFamily="50" charset="-127"/>
+              </a:rPr>
+              <a:t>SQLite DB</a:t>
+            </a:r>
+            <a:endParaRPr lang="ko-KR" altLang="en-US" dirty="0">
+              <a:solidFill>
+                <a:sysClr val="windowText" lastClr="000000"/>
+              </a:solidFill>
+              <a:latin typeface="KoPub돋움체_Pro Light" panose="00000300000000000000" pitchFamily="50" charset="-127"/>
+              <a:ea typeface="KoPub돋움체_Pro Light" panose="00000300000000000000" pitchFamily="50" charset="-127"/>
+            </a:endParaRPr>
+          </a:p>
+        </p:txBody>
+      </p:sp>
+      <p:cxnSp>
+        <p:nvCxnSpPr>
+          <p:cNvPr id="12" name="직선 화살표 연결선 11">
+            <a:extLst>
+              <a:ext uri="{FF2B5EF4-FFF2-40B4-BE49-F238E27FC236}">
+                <a16:creationId xmlns:a16="http://schemas.microsoft.com/office/drawing/2014/main" id="{EB8F24DF-1AC7-7E41-ADEF-A62818A856CB}"/>
+              </a:ext>
+            </a:extLst>
+          </p:cNvPr>
+          <p:cNvCxnSpPr>
+            <a:stCxn id="3" idx="2"/>
+            <a:endCxn id="10" idx="1"/>
+          </p:cNvCxnSpPr>
+          <p:nvPr/>
+        </p:nvCxnSpPr>
+        <p:spPr>
+          <a:xfrm>
+            <a:off x="10748393" y="5888275"/>
+            <a:ext cx="0" cy="699393"/>
+          </a:xfrm>
+          <a:prstGeom prst="straightConnector1">
+            <a:avLst/>
+          </a:prstGeom>
+          <a:ln w="12700">
+            <a:solidFill>
+              <a:schemeClr val="tx1"/>
+            </a:solidFill>
+            <a:headEnd type="triangle"/>
+            <a:tailEnd type="triangle"/>
+          </a:ln>
+        </p:spPr>
+        <p:style>
+          <a:lnRef idx="1">
+            <a:schemeClr val="accent1"/>
+          </a:lnRef>
+          <a:fillRef idx="0">
+            <a:schemeClr val="accent1"/>
+          </a:fillRef>
+          <a:effectRef idx="0">
+            <a:schemeClr val="accent1"/>
+          </a:effectRef>
+          <a:fontRef idx="minor">
+            <a:schemeClr val="tx1"/>
+          </a:fontRef>
+        </p:style>
+      </p:cxnSp>
+      <p:sp>
+        <p:nvSpPr>
+          <p:cNvPr id="14" name="직사각형 13">
+            <a:extLst>
+              <a:ext uri="{FF2B5EF4-FFF2-40B4-BE49-F238E27FC236}">
+                <a16:creationId xmlns:a16="http://schemas.microsoft.com/office/drawing/2014/main" id="{054D72AF-1443-D641-4896-8898ECCA8DA9}"/>
+              </a:ext>
+            </a:extLst>
+          </p:cNvPr>
+          <p:cNvSpPr/>
+          <p:nvPr/>
+        </p:nvSpPr>
+        <p:spPr>
+          <a:xfrm>
+            <a:off x="7416295" y="5042274"/>
+            <a:ext cx="1260000" cy="432000"/>
+          </a:xfrm>
+          <a:prstGeom prst="rect">
+            <a:avLst/>
+          </a:prstGeom>
+          <a:solidFill>
+            <a:schemeClr val="bg1"/>
+          </a:solidFill>
+          <a:ln>
+            <a:solidFill>
+              <a:schemeClr val="tx1"/>
+            </a:solidFill>
+          </a:ln>
+        </p:spPr>
+        <p:style>
+          <a:lnRef idx="2">
+            <a:schemeClr val="accent1">
+              <a:shade val="15000"/>
+            </a:schemeClr>
+          </a:lnRef>
+          <a:fillRef idx="1">
+            <a:schemeClr val="accent1"/>
+          </a:fillRef>
+          <a:effectRef idx="0">
+            <a:schemeClr val="accent1"/>
+          </a:effectRef>
+          <a:fontRef idx="minor">
+            <a:schemeClr val="lt1"/>
+          </a:fontRef>
+        </p:style>
+        <p:txBody>
+          <a:bodyPr rtlCol="0" anchor="ctr"/>
+          <a:lstStyle/>
+          <a:p>
+            <a:pPr algn="ctr"/>
+            <a:r>
+              <a:rPr lang="en-US" altLang="ko-KR" sz="1600" dirty="0">
+                <a:solidFill>
+                  <a:sysClr val="windowText" lastClr="000000"/>
+                </a:solidFill>
+                <a:latin typeface="KoPub돋움체_Pro Light" panose="00000300000000000000" pitchFamily="50" charset="-127"/>
+                <a:ea typeface="KoPub돋움체_Pro Light" panose="00000300000000000000" pitchFamily="50" charset="-127"/>
+              </a:rPr>
+              <a:t>RabbitMQ</a:t>
+            </a:r>
+            <a:endParaRPr lang="ko-KR" altLang="en-US" sz="1600" dirty="0">
+              <a:solidFill>
+                <a:sysClr val="windowText" lastClr="000000"/>
+              </a:solidFill>
+              <a:latin typeface="KoPub돋움체_Pro Light" panose="00000300000000000000" pitchFamily="50" charset="-127"/>
+              <a:ea typeface="KoPub돋움체_Pro Light" panose="00000300000000000000" pitchFamily="50" charset="-127"/>
+            </a:endParaRPr>
+          </a:p>
+        </p:txBody>
+      </p:sp>
+      <p:sp>
+        <p:nvSpPr>
+          <p:cNvPr id="25" name="TextBox 24">
+            <a:extLst>
+              <a:ext uri="{FF2B5EF4-FFF2-40B4-BE49-F238E27FC236}">
+                <a16:creationId xmlns:a16="http://schemas.microsoft.com/office/drawing/2014/main" id="{F27ABADC-D7AA-3C33-1B3C-A63A00576D26}"/>
+              </a:ext>
+            </a:extLst>
+          </p:cNvPr>
+          <p:cNvSpPr txBox="1"/>
+          <p:nvPr/>
+        </p:nvSpPr>
+        <p:spPr>
+          <a:xfrm>
+            <a:off x="5468533" y="9453934"/>
+            <a:ext cx="7498080" cy="1034386"/>
+          </a:xfrm>
+          <a:prstGeom prst="rect">
+            <a:avLst/>
+          </a:prstGeom>
+          <a:noFill/>
+        </p:spPr>
+        <p:txBody>
+          <a:bodyPr wrap="square" rtlCol="0">
+            <a:spAutoFit/>
+          </a:bodyPr>
+          <a:lstStyle/>
+          <a:p>
+            <a:r>
+              <a:rPr lang="en-US" altLang="ko-KR" dirty="0">
+                <a:latin typeface="KoPub돋움체_Pro Light" panose="00000300000000000000" pitchFamily="50" charset="-127"/>
+                <a:ea typeface="KoPub돋움체_Pro Light" panose="00000300000000000000" pitchFamily="50" charset="-127"/>
+              </a:rPr>
+              <a:t>* Technically, this is not Backend Server. This works like internal server</a:t>
+            </a:r>
+            <a:endParaRPr lang="ko-KR" altLang="en-US" dirty="0">
+              <a:latin typeface="KoPub돋움체_Pro Light" panose="00000300000000000000" pitchFamily="50" charset="-127"/>
+              <a:ea typeface="KoPub돋움체_Pro Light" panose="00000300000000000000" pitchFamily="50" charset="-127"/>
+            </a:endParaRPr>
+          </a:p>
+        </p:txBody>
+      </p:sp>
+      <p:cxnSp>
+        <p:nvCxnSpPr>
+          <p:cNvPr id="13" name="직선 화살표 연결선 12">
+            <a:extLst>
+              <a:ext uri="{FF2B5EF4-FFF2-40B4-BE49-F238E27FC236}">
+                <a16:creationId xmlns:a16="http://schemas.microsoft.com/office/drawing/2014/main" id="{FDF82326-5EB4-C584-101D-51235D09972F}"/>
+              </a:ext>
+            </a:extLst>
+          </p:cNvPr>
+          <p:cNvCxnSpPr>
+            <a:cxnSpLocks/>
+            <a:stCxn id="18" idx="2"/>
+            <a:endCxn id="3" idx="0"/>
+          </p:cNvCxnSpPr>
+          <p:nvPr/>
+        </p:nvCxnSpPr>
+        <p:spPr>
+          <a:xfrm>
+            <a:off x="10748393" y="3368274"/>
+            <a:ext cx="0" cy="1260001"/>
+          </a:xfrm>
+          <a:prstGeom prst="straightConnector1">
+            <a:avLst/>
+          </a:prstGeom>
+          <a:ln w="12700">
+            <a:solidFill>
+              <a:schemeClr val="tx1"/>
+            </a:solidFill>
+            <a:headEnd type="triangle"/>
+            <a:tailEnd type="triangle"/>
+          </a:ln>
+        </p:spPr>
+        <p:style>
+          <a:lnRef idx="1">
+            <a:schemeClr val="accent1"/>
+          </a:lnRef>
+          <a:fillRef idx="0">
+            <a:schemeClr val="accent1"/>
+          </a:fillRef>
+          <a:effectRef idx="0">
+            <a:schemeClr val="accent1"/>
+          </a:effectRef>
+          <a:fontRef idx="minor">
+            <a:schemeClr val="tx1"/>
+          </a:fontRef>
+        </p:style>
+      </p:cxnSp>
+      <p:sp>
+        <p:nvSpPr>
+          <p:cNvPr id="17" name="직사각형 16">
+            <a:extLst>
+              <a:ext uri="{FF2B5EF4-FFF2-40B4-BE49-F238E27FC236}">
+                <a16:creationId xmlns:a16="http://schemas.microsoft.com/office/drawing/2014/main" id="{DCDEE24E-9A3C-A397-A92A-D75BFF9C5AC6}"/>
+              </a:ext>
+            </a:extLst>
+          </p:cNvPr>
+          <p:cNvSpPr/>
+          <p:nvPr/>
+        </p:nvSpPr>
+        <p:spPr>
+          <a:xfrm>
+            <a:off x="9758393" y="1835745"/>
+            <a:ext cx="1980000" cy="1800000"/>
+          </a:xfrm>
+          <a:prstGeom prst="rect">
+            <a:avLst/>
+          </a:prstGeom>
+          <a:noFill/>
+          <a:ln>
+            <a:solidFill>
+              <a:schemeClr val="tx1"/>
+            </a:solidFill>
+            <a:prstDash val="dash"/>
+          </a:ln>
+        </p:spPr>
+        <p:style>
+          <a:lnRef idx="2">
+            <a:schemeClr val="accent1">
+              <a:shade val="15000"/>
+            </a:schemeClr>
+          </a:lnRef>
+          <a:fillRef idx="1">
+            <a:schemeClr val="accent1"/>
+          </a:fillRef>
+          <a:effectRef idx="0">
+            <a:schemeClr val="accent1"/>
+          </a:effectRef>
+          <a:fontRef idx="minor">
+            <a:schemeClr val="lt1"/>
+          </a:fontRef>
+        </p:style>
+        <p:txBody>
+          <a:bodyPr rtlCol="0" anchor="ctr"/>
+          <a:lstStyle/>
+          <a:p>
+            <a:pPr algn="ctr"/>
+            <a:endParaRPr lang="ko-KR" altLang="en-US">
+              <a:latin typeface="KoPub돋움체_Pro Light" panose="00000300000000000000" pitchFamily="50" charset="-127"/>
+              <a:ea typeface="KoPub돋움체_Pro Light" panose="00000300000000000000" pitchFamily="50" charset="-127"/>
+            </a:endParaRPr>
+          </a:p>
+        </p:txBody>
+      </p:sp>
+      <p:sp>
+        <p:nvSpPr>
+          <p:cNvPr id="18" name="직사각형 17">
+            <a:extLst>
+              <a:ext uri="{FF2B5EF4-FFF2-40B4-BE49-F238E27FC236}">
+                <a16:creationId xmlns:a16="http://schemas.microsoft.com/office/drawing/2014/main" id="{6443BD26-EDAE-6E7A-4B07-9E0111CF37B2}"/>
+              </a:ext>
+            </a:extLst>
+          </p:cNvPr>
+          <p:cNvSpPr/>
+          <p:nvPr/>
+        </p:nvSpPr>
+        <p:spPr>
+          <a:xfrm>
+            <a:off x="10028393" y="2108274"/>
+            <a:ext cx="1440000" cy="1260000"/>
+          </a:xfrm>
+          <a:prstGeom prst="rect">
+            <a:avLst/>
+          </a:prstGeom>
+          <a:solidFill>
+            <a:schemeClr val="bg1"/>
+          </a:solidFill>
+          <a:ln>
+            <a:solidFill>
+              <a:schemeClr val="tx1"/>
+            </a:solidFill>
+          </a:ln>
+        </p:spPr>
+        <p:style>
+          <a:lnRef idx="2">
+            <a:schemeClr val="accent1">
+              <a:shade val="15000"/>
+            </a:schemeClr>
+          </a:lnRef>
+          <a:fillRef idx="1">
+            <a:schemeClr val="accent1"/>
+          </a:fillRef>
+          <a:effectRef idx="0">
+            <a:schemeClr val="accent1"/>
+          </a:effectRef>
+          <a:fontRef idx="minor">
+            <a:schemeClr val="lt1"/>
+          </a:fontRef>
+        </p:style>
+        <p:txBody>
+          <a:bodyPr rtlCol="0" anchor="ctr"/>
+          <a:lstStyle/>
+          <a:p>
+            <a:pPr algn="ctr"/>
+            <a:r>
+              <a:rPr lang="en-US" altLang="ko-KR" dirty="0">
+                <a:solidFill>
+                  <a:sysClr val="windowText" lastClr="000000"/>
+                </a:solidFill>
+                <a:latin typeface="KoPub돋움체_Pro Light" panose="00000300000000000000" pitchFamily="50" charset="-127"/>
+                <a:ea typeface="KoPub돋움체_Pro Light" panose="00000300000000000000" pitchFamily="50" charset="-127"/>
+              </a:rPr>
+              <a:t>User </a:t>
+            </a:r>
+            <a:r>
+              <a:rPr lang="en-US" altLang="ko-KR" dirty="0" err="1">
+                <a:solidFill>
+                  <a:sysClr val="windowText" lastClr="000000"/>
+                </a:solidFill>
+                <a:latin typeface="KoPub돋움체_Pro Light" panose="00000300000000000000" pitchFamily="50" charset="-127"/>
+                <a:ea typeface="KoPub돋움체_Pro Light" panose="00000300000000000000" pitchFamily="50" charset="-127"/>
+              </a:rPr>
+              <a:t>Mng</a:t>
+            </a:r>
+            <a:r>
+              <a:rPr lang="en-US" altLang="ko-KR" dirty="0">
+                <a:solidFill>
+                  <a:sysClr val="windowText" lastClr="000000"/>
+                </a:solidFill>
+                <a:latin typeface="KoPub돋움체_Pro Light" panose="00000300000000000000" pitchFamily="50" charset="-127"/>
+                <a:ea typeface="KoPub돋움체_Pro Light" panose="00000300000000000000" pitchFamily="50" charset="-127"/>
+              </a:rPr>
+              <a:t> Application</a:t>
+            </a:r>
+            <a:endParaRPr lang="ko-KR" altLang="en-US" dirty="0">
+              <a:solidFill>
+                <a:sysClr val="windowText" lastClr="000000"/>
+              </a:solidFill>
+              <a:latin typeface="KoPub돋움체_Pro Light" panose="00000300000000000000" pitchFamily="50" charset="-127"/>
+              <a:ea typeface="KoPub돋움체_Pro Light" panose="00000300000000000000" pitchFamily="50" charset="-127"/>
+            </a:endParaRPr>
+          </a:p>
+        </p:txBody>
+      </p:sp>
+      <p:cxnSp>
+        <p:nvCxnSpPr>
+          <p:cNvPr id="31" name="직선 화살표 연결선 30">
+            <a:extLst>
+              <a:ext uri="{FF2B5EF4-FFF2-40B4-BE49-F238E27FC236}">
+                <a16:creationId xmlns:a16="http://schemas.microsoft.com/office/drawing/2014/main" id="{B664CA24-B1BA-2C7F-A99A-0889544ACB99}"/>
+              </a:ext>
+            </a:extLst>
+          </p:cNvPr>
+          <p:cNvCxnSpPr>
+            <a:cxnSpLocks/>
+            <a:stCxn id="60" idx="2"/>
+            <a:endCxn id="4" idx="0"/>
+          </p:cNvCxnSpPr>
+          <p:nvPr/>
+        </p:nvCxnSpPr>
+        <p:spPr>
+          <a:xfrm>
+            <a:off x="6248392" y="3368274"/>
+            <a:ext cx="0" cy="1260001"/>
+          </a:xfrm>
+          <a:prstGeom prst="straightConnector1">
+            <a:avLst/>
+          </a:prstGeom>
+          <a:ln w="12700">
+            <a:solidFill>
+              <a:schemeClr val="tx1"/>
+            </a:solidFill>
+            <a:headEnd type="triangle"/>
+            <a:tailEnd type="triangle"/>
+          </a:ln>
+        </p:spPr>
+        <p:style>
+          <a:lnRef idx="1">
+            <a:schemeClr val="accent1"/>
+          </a:lnRef>
+          <a:fillRef idx="0">
+            <a:schemeClr val="accent1"/>
+          </a:fillRef>
+          <a:effectRef idx="0">
+            <a:schemeClr val="accent1"/>
+          </a:effectRef>
+          <a:fontRef idx="minor">
+            <a:schemeClr val="tx1"/>
+          </a:fontRef>
+        </p:style>
+      </p:cxnSp>
+      <p:sp>
+        <p:nvSpPr>
+          <p:cNvPr id="44" name="직사각형 43">
+            <a:extLst>
+              <a:ext uri="{FF2B5EF4-FFF2-40B4-BE49-F238E27FC236}">
+                <a16:creationId xmlns:a16="http://schemas.microsoft.com/office/drawing/2014/main" id="{BA49ADB3-C5C8-E757-F9A8-F8576F9192D0}"/>
+              </a:ext>
+            </a:extLst>
+          </p:cNvPr>
+          <p:cNvSpPr/>
+          <p:nvPr/>
+        </p:nvSpPr>
+        <p:spPr>
+          <a:xfrm>
+            <a:off x="14168393" y="9563126"/>
+            <a:ext cx="270000" cy="270000"/>
+          </a:xfrm>
+          <a:prstGeom prst="rect">
+            <a:avLst/>
+          </a:prstGeom>
+          <a:ln>
+            <a:noFill/>
+          </a:ln>
+        </p:spPr>
+        <p:style>
+          <a:lnRef idx="2">
+            <a:schemeClr val="accent1">
+              <a:shade val="15000"/>
+            </a:schemeClr>
+          </a:lnRef>
+          <a:fillRef idx="1">
+            <a:schemeClr val="accent1"/>
+          </a:fillRef>
+          <a:effectRef idx="0">
+            <a:schemeClr val="accent1"/>
+          </a:effectRef>
+          <a:fontRef idx="minor">
+            <a:schemeClr val="lt1"/>
+          </a:fontRef>
+        </p:style>
+        <p:txBody>
+          <a:bodyPr rtlCol="0" anchor="ctr"/>
+          <a:lstStyle/>
+          <a:p>
+            <a:pPr algn="ctr"/>
+            <a:endParaRPr lang="ko-KR" altLang="en-US"/>
+          </a:p>
+        </p:txBody>
+      </p:sp>
+      <p:sp>
+        <p:nvSpPr>
+          <p:cNvPr id="59" name="직사각형 58">
+            <a:extLst>
+              <a:ext uri="{FF2B5EF4-FFF2-40B4-BE49-F238E27FC236}">
+                <a16:creationId xmlns:a16="http://schemas.microsoft.com/office/drawing/2014/main" id="{BCC8A94A-E1B1-EAC1-FBBA-6A9E07F0CEE9}"/>
+              </a:ext>
+            </a:extLst>
+          </p:cNvPr>
+          <p:cNvSpPr/>
+          <p:nvPr/>
+        </p:nvSpPr>
+        <p:spPr>
+          <a:xfrm>
+            <a:off x="5258392" y="1835745"/>
+            <a:ext cx="1980000" cy="1800000"/>
+          </a:xfrm>
+          <a:prstGeom prst="rect">
+            <a:avLst/>
+          </a:prstGeom>
+          <a:noFill/>
+          <a:ln>
+            <a:solidFill>
+              <a:schemeClr val="tx1"/>
+            </a:solidFill>
+            <a:prstDash val="dash"/>
+          </a:ln>
+        </p:spPr>
+        <p:style>
+          <a:lnRef idx="2">
+            <a:schemeClr val="accent1">
+              <a:shade val="15000"/>
+            </a:schemeClr>
+          </a:lnRef>
+          <a:fillRef idx="1">
+            <a:schemeClr val="accent1"/>
+          </a:fillRef>
+          <a:effectRef idx="0">
+            <a:schemeClr val="accent1"/>
+          </a:effectRef>
+          <a:fontRef idx="minor">
+            <a:schemeClr val="lt1"/>
+          </a:fontRef>
+        </p:style>
+        <p:txBody>
+          <a:bodyPr rtlCol="0" anchor="ctr"/>
+          <a:lstStyle/>
+          <a:p>
+            <a:pPr algn="ctr"/>
+            <a:endParaRPr lang="ko-KR" altLang="en-US">
+              <a:latin typeface="KoPub돋움체_Pro Light" panose="00000300000000000000" pitchFamily="50" charset="-127"/>
+              <a:ea typeface="KoPub돋움체_Pro Light" panose="00000300000000000000" pitchFamily="50" charset="-127"/>
+            </a:endParaRPr>
+          </a:p>
+        </p:txBody>
+      </p:sp>
+      <p:sp>
+        <p:nvSpPr>
+          <p:cNvPr id="60" name="직사각형 59">
+            <a:extLst>
+              <a:ext uri="{FF2B5EF4-FFF2-40B4-BE49-F238E27FC236}">
+                <a16:creationId xmlns:a16="http://schemas.microsoft.com/office/drawing/2014/main" id="{F1B25C5D-ED7D-0217-C54A-327F29DFDF93}"/>
+              </a:ext>
+            </a:extLst>
+          </p:cNvPr>
+          <p:cNvSpPr/>
+          <p:nvPr/>
+        </p:nvSpPr>
+        <p:spPr>
+          <a:xfrm>
+            <a:off x="5528392" y="2108274"/>
+            <a:ext cx="1440000" cy="1260000"/>
+          </a:xfrm>
+          <a:prstGeom prst="rect">
+            <a:avLst/>
+          </a:prstGeom>
+          <a:solidFill>
+            <a:schemeClr val="bg1"/>
+          </a:solidFill>
+          <a:ln>
+            <a:solidFill>
+              <a:schemeClr val="tx1"/>
+            </a:solidFill>
+          </a:ln>
+        </p:spPr>
+        <p:style>
+          <a:lnRef idx="2">
+            <a:schemeClr val="accent1">
+              <a:shade val="15000"/>
+            </a:schemeClr>
+          </a:lnRef>
+          <a:fillRef idx="1">
+            <a:schemeClr val="accent1"/>
+          </a:fillRef>
+          <a:effectRef idx="0">
+            <a:schemeClr val="accent1"/>
+          </a:effectRef>
+          <a:fontRef idx="minor">
+            <a:schemeClr val="lt1"/>
+          </a:fontRef>
+        </p:style>
+        <p:txBody>
+          <a:bodyPr rtlCol="0" anchor="ctr"/>
+          <a:lstStyle/>
+          <a:p>
+            <a:pPr algn="ctr"/>
+            <a:r>
+              <a:rPr lang="en-US" altLang="ko-KR" dirty="0">
+                <a:solidFill>
+                  <a:sysClr val="windowText" lastClr="000000"/>
+                </a:solidFill>
+                <a:latin typeface="KoPub돋움체_Pro Light" panose="00000300000000000000" pitchFamily="50" charset="-127"/>
+                <a:ea typeface="KoPub돋움체_Pro Light" panose="00000300000000000000" pitchFamily="50" charset="-127"/>
+              </a:rPr>
+              <a:t>Kakao Bot</a:t>
+            </a:r>
+          </a:p>
+          <a:p>
+            <a:pPr algn="ctr"/>
+            <a:r>
+              <a:rPr lang="en-US" altLang="ko-KR" dirty="0">
+                <a:solidFill>
+                  <a:sysClr val="windowText" lastClr="000000"/>
+                </a:solidFill>
+                <a:latin typeface="KoPub돋움체_Pro Light" panose="00000300000000000000" pitchFamily="50" charset="-127"/>
+                <a:ea typeface="KoPub돋움체_Pro Light" panose="00000300000000000000" pitchFamily="50" charset="-127"/>
+              </a:rPr>
+              <a:t>Application</a:t>
+            </a:r>
+            <a:endParaRPr lang="ko-KR" altLang="en-US" dirty="0">
+              <a:solidFill>
+                <a:sysClr val="windowText" lastClr="000000"/>
+              </a:solidFill>
+              <a:latin typeface="KoPub돋움체_Pro Light" panose="00000300000000000000" pitchFamily="50" charset="-127"/>
+              <a:ea typeface="KoPub돋움체_Pro Light" panose="00000300000000000000" pitchFamily="50" charset="-127"/>
+            </a:endParaRPr>
+          </a:p>
+        </p:txBody>
+      </p:sp>
+      <p:sp>
+        <p:nvSpPr>
+          <p:cNvPr id="66" name="사각형: 둥근 모서리 65">
+            <a:extLst>
+              <a:ext uri="{FF2B5EF4-FFF2-40B4-BE49-F238E27FC236}">
+                <a16:creationId xmlns:a16="http://schemas.microsoft.com/office/drawing/2014/main" id="{7A5E9DF4-EA78-0AF1-0A45-A7636B01463C}"/>
+              </a:ext>
+            </a:extLst>
+          </p:cNvPr>
+          <p:cNvSpPr/>
+          <p:nvPr/>
+        </p:nvSpPr>
+        <p:spPr>
+          <a:xfrm>
+            <a:off x="5528392" y="6587668"/>
+            <a:ext cx="1440000" cy="1260000"/>
+          </a:xfrm>
+          <a:prstGeom prst="roundRect">
+            <a:avLst>
+              <a:gd name="adj" fmla="val 28258"/>
+            </a:avLst>
+          </a:prstGeom>
+          <a:solidFill>
+            <a:schemeClr val="bg1"/>
+          </a:solidFill>
+          <a:ln>
+            <a:solidFill>
+              <a:schemeClr val="tx1"/>
+            </a:solidFill>
+          </a:ln>
+        </p:spPr>
+        <p:style>
+          <a:lnRef idx="2">
+            <a:schemeClr val="accent1">
+              <a:shade val="15000"/>
+            </a:schemeClr>
+          </a:lnRef>
+          <a:fillRef idx="1">
+            <a:schemeClr val="accent1"/>
+          </a:fillRef>
+          <a:effectRef idx="0">
+            <a:schemeClr val="accent1"/>
+          </a:effectRef>
+          <a:fontRef idx="minor">
+            <a:schemeClr val="lt1"/>
+          </a:fontRef>
+        </p:style>
+        <p:txBody>
+          <a:bodyPr rtlCol="0" anchor="ctr"/>
+          <a:lstStyle/>
+          <a:p>
+            <a:pPr algn="ctr"/>
+            <a:r>
+              <a:rPr lang="en-US" altLang="ko-KR" dirty="0">
+                <a:solidFill>
+                  <a:sysClr val="windowText" lastClr="000000"/>
+                </a:solidFill>
+                <a:latin typeface="KoPub돋움체_Pro Light" panose="00000300000000000000" pitchFamily="50" charset="-127"/>
+                <a:ea typeface="KoPub돋움체_Pro Light" panose="00000300000000000000" pitchFamily="50" charset="-127"/>
+              </a:rPr>
+              <a:t>Redis</a:t>
+            </a:r>
+            <a:endParaRPr lang="ko-KR" altLang="en-US" dirty="0">
+              <a:solidFill>
+                <a:sysClr val="windowText" lastClr="000000"/>
+              </a:solidFill>
+              <a:latin typeface="KoPub돋움체_Pro Light" panose="00000300000000000000" pitchFamily="50" charset="-127"/>
+              <a:ea typeface="KoPub돋움체_Pro Light" panose="00000300000000000000" pitchFamily="50" charset="-127"/>
+            </a:endParaRPr>
+          </a:p>
+        </p:txBody>
+      </p:sp>
+      <p:cxnSp>
+        <p:nvCxnSpPr>
+          <p:cNvPr id="67" name="직선 화살표 연결선 66">
+            <a:extLst>
+              <a:ext uri="{FF2B5EF4-FFF2-40B4-BE49-F238E27FC236}">
+                <a16:creationId xmlns:a16="http://schemas.microsoft.com/office/drawing/2014/main" id="{19722804-4A7E-8180-CE99-361C62B0E226}"/>
+              </a:ext>
+            </a:extLst>
+          </p:cNvPr>
+          <p:cNvCxnSpPr>
+            <a:cxnSpLocks/>
+            <a:stCxn id="4" idx="2"/>
+          </p:cNvCxnSpPr>
+          <p:nvPr/>
+        </p:nvCxnSpPr>
+        <p:spPr>
+          <a:xfrm>
+            <a:off x="6248392" y="5888275"/>
+            <a:ext cx="0" cy="699393"/>
+          </a:xfrm>
+          <a:prstGeom prst="straightConnector1">
+            <a:avLst/>
+          </a:prstGeom>
+          <a:ln w="12700">
+            <a:solidFill>
+              <a:schemeClr val="tx1"/>
+            </a:solidFill>
+            <a:headEnd type="triangle"/>
+            <a:tailEnd type="triangle"/>
+          </a:ln>
+        </p:spPr>
+        <p:style>
+          <a:lnRef idx="1">
+            <a:schemeClr val="accent1"/>
+          </a:lnRef>
+          <a:fillRef idx="0">
+            <a:schemeClr val="accent1"/>
+          </a:fillRef>
+          <a:effectRef idx="0">
+            <a:schemeClr val="accent1"/>
+          </a:effectRef>
+          <a:fontRef idx="minor">
+            <a:schemeClr val="tx1"/>
+          </a:fontRef>
+        </p:style>
+      </p:cxnSp>
+      <p:sp>
+        <p:nvSpPr>
+          <p:cNvPr id="72" name="직사각형 71">
+            <a:extLst>
+              <a:ext uri="{FF2B5EF4-FFF2-40B4-BE49-F238E27FC236}">
+                <a16:creationId xmlns:a16="http://schemas.microsoft.com/office/drawing/2014/main" id="{BE778AA4-DD65-C050-D9A8-23E17B61C200}"/>
+              </a:ext>
+            </a:extLst>
+          </p:cNvPr>
+          <p:cNvSpPr/>
+          <p:nvPr/>
+        </p:nvSpPr>
+        <p:spPr>
+          <a:xfrm>
+            <a:off x="4988392" y="4088274"/>
+            <a:ext cx="7020001" cy="4320000"/>
+          </a:xfrm>
+          <a:prstGeom prst="rect">
+            <a:avLst/>
+          </a:prstGeom>
+          <a:noFill/>
+          <a:ln>
+            <a:solidFill>
+              <a:schemeClr val="tx1"/>
+            </a:solidFill>
+            <a:prstDash val="dash"/>
+          </a:ln>
+        </p:spPr>
+        <p:style>
+          <a:lnRef idx="2">
+            <a:schemeClr val="accent1">
+              <a:shade val="15000"/>
+            </a:schemeClr>
+          </a:lnRef>
+          <a:fillRef idx="1">
+            <a:schemeClr val="accent1"/>
+          </a:fillRef>
+          <a:effectRef idx="0">
+            <a:schemeClr val="accent1"/>
+          </a:effectRef>
+          <a:fontRef idx="minor">
+            <a:schemeClr val="lt1"/>
+          </a:fontRef>
+        </p:style>
+        <p:txBody>
+          <a:bodyPr rtlCol="0" anchor="ctr"/>
+          <a:lstStyle/>
+          <a:p>
+            <a:pPr algn="ctr"/>
+            <a:endParaRPr lang="ko-KR" altLang="en-US">
+              <a:latin typeface="KoPub돋움체_Pro Light" panose="00000300000000000000" pitchFamily="50" charset="-127"/>
+              <a:ea typeface="KoPub돋움체_Pro Light" panose="00000300000000000000" pitchFamily="50" charset="-127"/>
+            </a:endParaRPr>
+          </a:p>
+        </p:txBody>
+      </p:sp>
+    </p:spTree>
+    <p:extLst>
+      <p:ext uri="{BB962C8B-B14F-4D97-AF65-F5344CB8AC3E}">
+        <p14:creationId xmlns:p14="http://schemas.microsoft.com/office/powerpoint/2010/main" val="1981276674"/>
+      </p:ext>
+    </p:extLst>
+  </p:cSld>
+  <p:clrMapOvr>
+    <a:masterClrMapping/>
+  </p:clrMapOvr>
+</p:sld>
+</file>
+
+<file path=ppt/slides/slide3.xml><?xml version="1.0" encoding="utf-8"?>
+<p:sld xmlns:a="http://schemas.openxmlformats.org/drawingml/2006/main" xmlns:r="http://schemas.openxmlformats.org/officeDocument/2006/relationships" xmlns:p="http://schemas.openxmlformats.org/presentationml/2006/main">
+  <p:cSld>
+    <p:spTree>
+      <p:nvGrpSpPr>
+        <p:cNvPr id="1" name="">
+          <a:extLst>
+            <a:ext uri="{FF2B5EF4-FFF2-40B4-BE49-F238E27FC236}">
+              <a16:creationId xmlns:a16="http://schemas.microsoft.com/office/drawing/2014/main" id="{DA21CE93-191C-6480-D76C-FFF551273F75}"/>
+            </a:ext>
+          </a:extLst>
+        </p:cNvPr>
+        <p:cNvGrpSpPr/>
+        <p:nvPr/>
+      </p:nvGrpSpPr>
+      <p:grpSpPr>
+        <a:xfrm>
+          <a:off x="0" y="0"/>
+          <a:ext cx="0" cy="0"/>
+          <a:chOff x="0" y="0"/>
+          <a:chExt cx="0" cy="0"/>
+        </a:xfrm>
+      </p:grpSpPr>
+      <p:sp>
+        <p:nvSpPr>
+          <p:cNvPr id="28" name="직사각형 27">
+            <a:extLst>
+              <a:ext uri="{FF2B5EF4-FFF2-40B4-BE49-F238E27FC236}">
+                <a16:creationId xmlns:a16="http://schemas.microsoft.com/office/drawing/2014/main" id="{5958FCCA-77C7-EE83-A6C8-A4A3633547A9}"/>
+              </a:ext>
+            </a:extLst>
+          </p:cNvPr>
+          <p:cNvSpPr/>
+          <p:nvPr/>
+        </p:nvSpPr>
+        <p:spPr>
+          <a:xfrm>
+            <a:off x="12458393" y="4358274"/>
+            <a:ext cx="1980000" cy="1800000"/>
+          </a:xfrm>
+          <a:prstGeom prst="rect">
+            <a:avLst/>
+          </a:prstGeom>
+          <a:noFill/>
+          <a:ln>
+            <a:solidFill>
+              <a:schemeClr val="tx1"/>
+            </a:solidFill>
+            <a:prstDash val="dash"/>
+          </a:ln>
+        </p:spPr>
+        <p:style>
+          <a:lnRef idx="2">
+            <a:schemeClr val="accent1">
+              <a:shade val="15000"/>
+            </a:schemeClr>
+          </a:lnRef>
+          <a:fillRef idx="1">
+            <a:schemeClr val="accent1"/>
+          </a:fillRef>
+          <a:effectRef idx="0">
+            <a:schemeClr val="accent1"/>
+          </a:effectRef>
+          <a:fontRef idx="minor">
+            <a:schemeClr val="lt1"/>
+          </a:fontRef>
+        </p:style>
+        <p:txBody>
+          <a:bodyPr rtlCol="0" anchor="ctr"/>
+          <a:lstStyle/>
+          <a:p>
+            <a:pPr algn="ctr"/>
+            <a:endParaRPr lang="ko-KR" altLang="en-US">
+              <a:latin typeface="KoPub돋움체_Pro Light" panose="00000300000000000000" pitchFamily="50" charset="-127"/>
+              <a:ea typeface="KoPub돋움체_Pro Light" panose="00000300000000000000" pitchFamily="50" charset="-127"/>
+            </a:endParaRPr>
+          </a:p>
+        </p:txBody>
+      </p:sp>
+      <p:sp>
+        <p:nvSpPr>
+          <p:cNvPr id="27" name="직사각형 26">
+            <a:extLst>
+              <a:ext uri="{FF2B5EF4-FFF2-40B4-BE49-F238E27FC236}">
+                <a16:creationId xmlns:a16="http://schemas.microsoft.com/office/drawing/2014/main" id="{AD52B030-E424-0208-7649-0E6EFF1654B5}"/>
+              </a:ext>
+            </a:extLst>
+          </p:cNvPr>
+          <p:cNvSpPr/>
+          <p:nvPr/>
+        </p:nvSpPr>
+        <p:spPr>
+          <a:xfrm>
+            <a:off x="5258393" y="4358274"/>
+            <a:ext cx="3780000" cy="3780000"/>
+          </a:xfrm>
+          <a:prstGeom prst="rect">
+            <a:avLst/>
+          </a:prstGeom>
+          <a:noFill/>
+          <a:ln>
+            <a:solidFill>
+              <a:schemeClr val="tx1"/>
+            </a:solidFill>
+            <a:prstDash val="dash"/>
+          </a:ln>
+        </p:spPr>
+        <p:style>
+          <a:lnRef idx="2">
+            <a:schemeClr val="accent1">
+              <a:shade val="15000"/>
+            </a:schemeClr>
+          </a:lnRef>
+          <a:fillRef idx="1">
+            <a:schemeClr val="accent1"/>
+          </a:fillRef>
+          <a:effectRef idx="0">
+            <a:schemeClr val="accent1"/>
+          </a:effectRef>
+          <a:fontRef idx="minor">
+            <a:schemeClr val="lt1"/>
+          </a:fontRef>
+        </p:style>
+        <p:txBody>
+          <a:bodyPr rtlCol="0" anchor="ctr"/>
+          <a:lstStyle/>
+          <a:p>
+            <a:pPr algn="ctr"/>
+            <a:endParaRPr lang="ko-KR" altLang="en-US">
+              <a:latin typeface="KoPub돋움체_Pro Light" panose="00000300000000000000" pitchFamily="50" charset="-127"/>
+              <a:ea typeface="KoPub돋움체_Pro Light" panose="00000300000000000000" pitchFamily="50" charset="-127"/>
+            </a:endParaRPr>
+          </a:p>
+        </p:txBody>
+      </p:sp>
+      <p:sp>
+        <p:nvSpPr>
+          <p:cNvPr id="26" name="직사각형 25">
+            <a:extLst>
+              <a:ext uri="{FF2B5EF4-FFF2-40B4-BE49-F238E27FC236}">
+                <a16:creationId xmlns:a16="http://schemas.microsoft.com/office/drawing/2014/main" id="{CDF2FEC6-E2DC-CC34-4E99-0308FECFA90B}"/>
+              </a:ext>
+            </a:extLst>
+          </p:cNvPr>
+          <p:cNvSpPr/>
+          <p:nvPr/>
+        </p:nvSpPr>
+        <p:spPr>
+          <a:xfrm>
+            <a:off x="9758393" y="4358274"/>
+            <a:ext cx="1980000" cy="3780000"/>
+          </a:xfrm>
+          <a:prstGeom prst="rect">
+            <a:avLst/>
+          </a:prstGeom>
+          <a:noFill/>
+          <a:ln>
+            <a:solidFill>
+              <a:schemeClr val="tx1"/>
+            </a:solidFill>
+            <a:prstDash val="dash"/>
+          </a:ln>
+        </p:spPr>
+        <p:style>
+          <a:lnRef idx="2">
+            <a:schemeClr val="accent1">
+              <a:shade val="15000"/>
+            </a:schemeClr>
+          </a:lnRef>
+          <a:fillRef idx="1">
+            <a:schemeClr val="accent1"/>
+          </a:fillRef>
+          <a:effectRef idx="0">
+            <a:schemeClr val="accent1"/>
+          </a:effectRef>
+          <a:fontRef idx="minor">
+            <a:schemeClr val="lt1"/>
+          </a:fontRef>
+        </p:style>
+        <p:txBody>
+          <a:bodyPr rtlCol="0" anchor="ctr"/>
+          <a:lstStyle/>
+          <a:p>
+            <a:pPr algn="ctr"/>
+            <a:endParaRPr lang="ko-KR" altLang="en-US">
+              <a:latin typeface="KoPub돋움체_Pro Light" panose="00000300000000000000" pitchFamily="50" charset="-127"/>
+              <a:ea typeface="KoPub돋움체_Pro Light" panose="00000300000000000000" pitchFamily="50" charset="-127"/>
+            </a:endParaRPr>
+          </a:p>
+        </p:txBody>
+      </p:sp>
+      <p:sp>
+        <p:nvSpPr>
+          <p:cNvPr id="3" name="직사각형 2">
+            <a:extLst>
+              <a:ext uri="{FF2B5EF4-FFF2-40B4-BE49-F238E27FC236}">
+                <a16:creationId xmlns:a16="http://schemas.microsoft.com/office/drawing/2014/main" id="{8EF777C9-2F26-7937-1BF9-46554D446A73}"/>
+              </a:ext>
+            </a:extLst>
+          </p:cNvPr>
+          <p:cNvSpPr/>
+          <p:nvPr/>
+        </p:nvSpPr>
+        <p:spPr>
+          <a:xfrm>
+            <a:off x="10028393" y="4628275"/>
+            <a:ext cx="1440000" cy="1260000"/>
+          </a:xfrm>
+          <a:prstGeom prst="rect">
+            <a:avLst/>
+          </a:prstGeom>
+          <a:solidFill>
+            <a:schemeClr val="bg1"/>
+          </a:solidFill>
+          <a:ln>
+            <a:solidFill>
+              <a:schemeClr val="tx1"/>
+            </a:solidFill>
+          </a:ln>
+        </p:spPr>
+        <p:style>
+          <a:lnRef idx="2">
+            <a:schemeClr val="accent1">
+              <a:shade val="15000"/>
+            </a:schemeClr>
+          </a:lnRef>
+          <a:fillRef idx="1">
+            <a:schemeClr val="accent1"/>
+          </a:fillRef>
+          <a:effectRef idx="0">
+            <a:schemeClr val="accent1"/>
+          </a:effectRef>
+          <a:fontRef idx="minor">
+            <a:schemeClr val="lt1"/>
+          </a:fontRef>
+        </p:style>
+        <p:txBody>
+          <a:bodyPr rtlCol="0" anchor="ctr"/>
+          <a:lstStyle/>
+          <a:p>
+            <a:pPr algn="ctr"/>
+            <a:r>
+              <a:rPr lang="en-US" altLang="ko-KR" dirty="0">
+                <a:solidFill>
+                  <a:sysClr val="windowText" lastClr="000000"/>
+                </a:solidFill>
+                <a:latin typeface="KoPub돋움체_Pro Light" panose="00000300000000000000" pitchFamily="50" charset="-127"/>
+                <a:ea typeface="KoPub돋움체_Pro Light" panose="00000300000000000000" pitchFamily="50" charset="-127"/>
+              </a:rPr>
+              <a:t>Main</a:t>
+            </a:r>
+            <a:br>
+              <a:rPr lang="en-US" altLang="ko-KR" dirty="0">
+                <a:solidFill>
+                  <a:sysClr val="windowText" lastClr="000000"/>
+                </a:solidFill>
+                <a:latin typeface="KoPub돋움체_Pro Light" panose="00000300000000000000" pitchFamily="50" charset="-127"/>
+                <a:ea typeface="KoPub돋움체_Pro Light" panose="00000300000000000000" pitchFamily="50" charset="-127"/>
+              </a:rPr>
+            </a:br>
+            <a:r>
+              <a:rPr lang="en-US" altLang="ko-KR" dirty="0">
+                <a:solidFill>
+                  <a:sysClr val="windowText" lastClr="000000"/>
+                </a:solidFill>
+                <a:latin typeface="KoPub돋움체_Pro Light" panose="00000300000000000000" pitchFamily="50" charset="-127"/>
+                <a:ea typeface="KoPub돋움체_Pro Light" panose="00000300000000000000" pitchFamily="50" charset="-127"/>
+              </a:rPr>
+              <a:t>BE* Server</a:t>
+            </a:r>
+            <a:endParaRPr lang="ko-KR" altLang="en-US" dirty="0">
+              <a:solidFill>
+                <a:sysClr val="windowText" lastClr="000000"/>
+              </a:solidFill>
+              <a:latin typeface="KoPub돋움체_Pro Light" panose="00000300000000000000" pitchFamily="50" charset="-127"/>
+              <a:ea typeface="KoPub돋움체_Pro Light" panose="00000300000000000000" pitchFamily="50" charset="-127"/>
+            </a:endParaRPr>
+          </a:p>
+        </p:txBody>
+      </p:sp>
+      <p:sp>
+        <p:nvSpPr>
+          <p:cNvPr id="4" name="직사각형 3">
+            <a:extLst>
+              <a:ext uri="{FF2B5EF4-FFF2-40B4-BE49-F238E27FC236}">
+                <a16:creationId xmlns:a16="http://schemas.microsoft.com/office/drawing/2014/main" id="{6D6FE26F-56D6-A539-CA72-9D09261A7F25}"/>
+              </a:ext>
+            </a:extLst>
+          </p:cNvPr>
+          <p:cNvSpPr/>
+          <p:nvPr/>
+        </p:nvSpPr>
+        <p:spPr>
+          <a:xfrm>
+            <a:off x="5528392" y="4628275"/>
+            <a:ext cx="1440000" cy="1260000"/>
+          </a:xfrm>
+          <a:prstGeom prst="rect">
+            <a:avLst/>
+          </a:prstGeom>
+          <a:solidFill>
+            <a:schemeClr val="bg1"/>
+          </a:solidFill>
+          <a:ln>
+            <a:solidFill>
+              <a:schemeClr val="tx1"/>
+            </a:solidFill>
+          </a:ln>
+        </p:spPr>
+        <p:style>
+          <a:lnRef idx="2">
+            <a:schemeClr val="accent1">
+              <a:shade val="15000"/>
+            </a:schemeClr>
+          </a:lnRef>
+          <a:fillRef idx="1">
+            <a:schemeClr val="accent1"/>
+          </a:fillRef>
+          <a:effectRef idx="0">
+            <a:schemeClr val="accent1"/>
+          </a:effectRef>
+          <a:fontRef idx="minor">
+            <a:schemeClr val="lt1"/>
+          </a:fontRef>
+        </p:style>
+        <p:txBody>
+          <a:bodyPr rtlCol="0" anchor="ctr"/>
+          <a:lstStyle/>
+          <a:p>
+            <a:pPr algn="ctr"/>
+            <a:r>
+              <a:rPr lang="en-US" altLang="ko-KR" dirty="0">
+                <a:solidFill>
+                  <a:sysClr val="windowText" lastClr="000000"/>
+                </a:solidFill>
+                <a:latin typeface="KoPub돋움체_Pro Light" panose="00000300000000000000" pitchFamily="50" charset="-127"/>
+                <a:ea typeface="KoPub돋움체_Pro Light" panose="00000300000000000000" pitchFamily="50" charset="-127"/>
+              </a:rPr>
+              <a:t>Bot Server</a:t>
+            </a:r>
+            <a:endParaRPr lang="ko-KR" altLang="en-US" dirty="0">
+              <a:solidFill>
+                <a:sysClr val="windowText" lastClr="000000"/>
+              </a:solidFill>
+              <a:latin typeface="KoPub돋움체_Pro Light" panose="00000300000000000000" pitchFamily="50" charset="-127"/>
+              <a:ea typeface="KoPub돋움체_Pro Light" panose="00000300000000000000" pitchFamily="50" charset="-127"/>
+            </a:endParaRPr>
+          </a:p>
+        </p:txBody>
+      </p:sp>
+      <p:sp>
+        <p:nvSpPr>
+          <p:cNvPr id="5" name="직사각형 4">
+            <a:extLst>
+              <a:ext uri="{FF2B5EF4-FFF2-40B4-BE49-F238E27FC236}">
+                <a16:creationId xmlns:a16="http://schemas.microsoft.com/office/drawing/2014/main" id="{BBAEA5B8-2D09-DB10-E15B-57755A8D9AF0}"/>
+              </a:ext>
+            </a:extLst>
+          </p:cNvPr>
+          <p:cNvSpPr/>
+          <p:nvPr/>
+        </p:nvSpPr>
+        <p:spPr>
+          <a:xfrm>
+            <a:off x="12728393" y="4628275"/>
+            <a:ext cx="1440000" cy="1260000"/>
+          </a:xfrm>
+          <a:prstGeom prst="rect">
+            <a:avLst/>
+          </a:prstGeom>
+          <a:solidFill>
+            <a:schemeClr val="bg1"/>
+          </a:solidFill>
+          <a:ln>
+            <a:solidFill>
+              <a:schemeClr val="tx1"/>
+            </a:solidFill>
+          </a:ln>
+        </p:spPr>
+        <p:style>
+          <a:lnRef idx="2">
+            <a:schemeClr val="accent1">
+              <a:shade val="15000"/>
+            </a:schemeClr>
+          </a:lnRef>
+          <a:fillRef idx="1">
+            <a:schemeClr val="accent1"/>
+          </a:fillRef>
+          <a:effectRef idx="0">
+            <a:schemeClr val="accent1"/>
+          </a:effectRef>
+          <a:fontRef idx="minor">
+            <a:schemeClr val="lt1"/>
+          </a:fontRef>
+        </p:style>
+        <p:txBody>
+          <a:bodyPr rtlCol="0" anchor="ctr"/>
+          <a:lstStyle/>
+          <a:p>
+            <a:pPr algn="ctr"/>
+            <a:r>
+              <a:rPr lang="en-US" altLang="ko-KR" dirty="0">
+                <a:solidFill>
+                  <a:sysClr val="windowText" lastClr="000000"/>
+                </a:solidFill>
+                <a:latin typeface="KoPub돋움체_Pro Light" panose="00000300000000000000" pitchFamily="50" charset="-127"/>
+                <a:ea typeface="KoPub돋움체_Pro Light" panose="00000300000000000000" pitchFamily="50" charset="-127"/>
+              </a:rPr>
+              <a:t>BFF Server</a:t>
+            </a:r>
+            <a:endParaRPr lang="ko-KR" altLang="en-US" dirty="0">
+              <a:solidFill>
+                <a:sysClr val="windowText" lastClr="000000"/>
+              </a:solidFill>
+              <a:latin typeface="KoPub돋움체_Pro Light" panose="00000300000000000000" pitchFamily="50" charset="-127"/>
+              <a:ea typeface="KoPub돋움체_Pro Light" panose="00000300000000000000" pitchFamily="50" charset="-127"/>
+            </a:endParaRPr>
+          </a:p>
+        </p:txBody>
+      </p:sp>
+      <p:cxnSp>
+        <p:nvCxnSpPr>
+          <p:cNvPr id="7" name="직선 화살표 연결선 6">
+            <a:extLst>
+              <a:ext uri="{FF2B5EF4-FFF2-40B4-BE49-F238E27FC236}">
+                <a16:creationId xmlns:a16="http://schemas.microsoft.com/office/drawing/2014/main" id="{7584FF86-E483-95C5-C7AB-65A16EDC3AAE}"/>
+              </a:ext>
+            </a:extLst>
+          </p:cNvPr>
+          <p:cNvCxnSpPr>
+            <a:stCxn id="3" idx="3"/>
+            <a:endCxn id="5" idx="1"/>
+          </p:cNvCxnSpPr>
+          <p:nvPr/>
+        </p:nvCxnSpPr>
+        <p:spPr>
+          <a:xfrm>
+            <a:off x="11468393" y="5258275"/>
+            <a:ext cx="1260000" cy="0"/>
+          </a:xfrm>
+          <a:prstGeom prst="straightConnector1">
+            <a:avLst/>
+          </a:prstGeom>
+          <a:ln w="12700">
+            <a:solidFill>
+              <a:schemeClr val="tx1"/>
+            </a:solidFill>
+            <a:headEnd type="triangle"/>
+            <a:tailEnd type="triangle"/>
+          </a:ln>
+        </p:spPr>
+        <p:style>
+          <a:lnRef idx="1">
+            <a:schemeClr val="accent1"/>
+          </a:lnRef>
+          <a:fillRef idx="0">
+            <a:schemeClr val="accent1"/>
+          </a:fillRef>
+          <a:effectRef idx="0">
+            <a:schemeClr val="accent1"/>
+          </a:effectRef>
+          <a:fontRef idx="minor">
+            <a:schemeClr val="tx1"/>
+          </a:fontRef>
+        </p:style>
+      </p:cxnSp>
+      <p:cxnSp>
+        <p:nvCxnSpPr>
+          <p:cNvPr id="9" name="직선 화살표 연결선 8">
+            <a:extLst>
+              <a:ext uri="{FF2B5EF4-FFF2-40B4-BE49-F238E27FC236}">
+                <a16:creationId xmlns:a16="http://schemas.microsoft.com/office/drawing/2014/main" id="{DC7B9F4D-85C0-FD8E-B17F-67AE51DACA31}"/>
+              </a:ext>
+            </a:extLst>
+          </p:cNvPr>
+          <p:cNvCxnSpPr>
+            <a:cxnSpLocks/>
+            <a:stCxn id="4" idx="3"/>
+            <a:endCxn id="3" idx="1"/>
+          </p:cNvCxnSpPr>
+          <p:nvPr/>
+        </p:nvCxnSpPr>
+        <p:spPr>
+          <a:xfrm>
+            <a:off x="6968392" y="5258275"/>
+            <a:ext cx="3060001" cy="0"/>
+          </a:xfrm>
+          <a:prstGeom prst="straightConnector1">
+            <a:avLst/>
+          </a:prstGeom>
+          <a:ln w="12700">
+            <a:solidFill>
+              <a:schemeClr val="tx1"/>
+            </a:solidFill>
+            <a:headEnd type="triangle"/>
+            <a:tailEnd type="triangle"/>
+          </a:ln>
+        </p:spPr>
+        <p:style>
+          <a:lnRef idx="1">
+            <a:schemeClr val="accent1"/>
+          </a:lnRef>
+          <a:fillRef idx="0">
+            <a:schemeClr val="accent1"/>
+          </a:fillRef>
+          <a:effectRef idx="0">
+            <a:schemeClr val="accent1"/>
+          </a:effectRef>
+          <a:fontRef idx="minor">
+            <a:schemeClr val="tx1"/>
+          </a:fontRef>
+        </p:style>
+      </p:cxnSp>
+      <p:sp>
+        <p:nvSpPr>
+          <p:cNvPr id="10" name="원통형 9">
+            <a:extLst>
+              <a:ext uri="{FF2B5EF4-FFF2-40B4-BE49-F238E27FC236}">
+                <a16:creationId xmlns:a16="http://schemas.microsoft.com/office/drawing/2014/main" id="{46790BA5-8D2B-D2D4-7CB5-BB5CEE0C9DA7}"/>
+              </a:ext>
+            </a:extLst>
+          </p:cNvPr>
+          <p:cNvSpPr/>
+          <p:nvPr/>
+        </p:nvSpPr>
+        <p:spPr>
+          <a:xfrm>
+            <a:off x="10028393" y="6587668"/>
+            <a:ext cx="1440000" cy="1260000"/>
+          </a:xfrm>
+          <a:prstGeom prst="can">
+            <a:avLst/>
+          </a:prstGeom>
+          <a:solidFill>
+            <a:schemeClr val="bg1"/>
+          </a:solidFill>
+          <a:ln>
+            <a:solidFill>
+              <a:schemeClr val="tx1"/>
+            </a:solidFill>
+          </a:ln>
+        </p:spPr>
+        <p:style>
+          <a:lnRef idx="2">
+            <a:schemeClr val="accent1">
+              <a:shade val="15000"/>
+            </a:schemeClr>
+          </a:lnRef>
+          <a:fillRef idx="1">
+            <a:schemeClr val="accent1"/>
+          </a:fillRef>
+          <a:effectRef idx="0">
+            <a:schemeClr val="accent1"/>
+          </a:effectRef>
+          <a:fontRef idx="minor">
+            <a:schemeClr val="lt1"/>
+          </a:fontRef>
+        </p:style>
+        <p:txBody>
+          <a:bodyPr rtlCol="0" anchor="ctr"/>
+          <a:lstStyle/>
+          <a:p>
+            <a:pPr algn="ctr"/>
+            <a:r>
+              <a:rPr lang="en-US" altLang="ko-KR" dirty="0">
+                <a:solidFill>
+                  <a:sysClr val="windowText" lastClr="000000"/>
+                </a:solidFill>
+                <a:latin typeface="KoPub돋움체_Pro Light" panose="00000300000000000000" pitchFamily="50" charset="-127"/>
+                <a:ea typeface="KoPub돋움체_Pro Light" panose="00000300000000000000" pitchFamily="50" charset="-127"/>
+              </a:rPr>
+              <a:t>SQLite DB</a:t>
+            </a:r>
+            <a:endParaRPr lang="ko-KR" altLang="en-US" dirty="0">
+              <a:solidFill>
+                <a:sysClr val="windowText" lastClr="000000"/>
+              </a:solidFill>
+              <a:latin typeface="KoPub돋움체_Pro Light" panose="00000300000000000000" pitchFamily="50" charset="-127"/>
+              <a:ea typeface="KoPub돋움체_Pro Light" panose="00000300000000000000" pitchFamily="50" charset="-127"/>
+            </a:endParaRPr>
+          </a:p>
+        </p:txBody>
+      </p:sp>
+      <p:cxnSp>
+        <p:nvCxnSpPr>
+          <p:cNvPr id="12" name="직선 화살표 연결선 11">
+            <a:extLst>
+              <a:ext uri="{FF2B5EF4-FFF2-40B4-BE49-F238E27FC236}">
+                <a16:creationId xmlns:a16="http://schemas.microsoft.com/office/drawing/2014/main" id="{89381A67-9AD8-EADB-2E42-AD8E99619BD6}"/>
+              </a:ext>
+            </a:extLst>
+          </p:cNvPr>
+          <p:cNvCxnSpPr>
+            <a:stCxn id="3" idx="2"/>
+            <a:endCxn id="10" idx="1"/>
+          </p:cNvCxnSpPr>
+          <p:nvPr/>
+        </p:nvCxnSpPr>
+        <p:spPr>
+          <a:xfrm>
+            <a:off x="10748393" y="5888275"/>
+            <a:ext cx="0" cy="699393"/>
+          </a:xfrm>
+          <a:prstGeom prst="straightConnector1">
+            <a:avLst/>
+          </a:prstGeom>
+          <a:ln w="12700">
+            <a:solidFill>
+              <a:schemeClr val="tx1"/>
+            </a:solidFill>
+            <a:headEnd type="triangle"/>
+            <a:tailEnd type="triangle"/>
+          </a:ln>
+        </p:spPr>
+        <p:style>
+          <a:lnRef idx="1">
+            <a:schemeClr val="accent1"/>
+          </a:lnRef>
+          <a:fillRef idx="0">
+            <a:schemeClr val="accent1"/>
+          </a:fillRef>
+          <a:effectRef idx="0">
+            <a:schemeClr val="accent1"/>
+          </a:effectRef>
+          <a:fontRef idx="minor">
+            <a:schemeClr val="tx1"/>
+          </a:fontRef>
+        </p:style>
+      </p:cxnSp>
+      <p:sp>
+        <p:nvSpPr>
+          <p:cNvPr id="14" name="직사각형 13">
+            <a:extLst>
+              <a:ext uri="{FF2B5EF4-FFF2-40B4-BE49-F238E27FC236}">
+                <a16:creationId xmlns:a16="http://schemas.microsoft.com/office/drawing/2014/main" id="{104BBA8A-4F1F-11F9-3241-9E73C1D02331}"/>
+              </a:ext>
+            </a:extLst>
+          </p:cNvPr>
+          <p:cNvSpPr/>
+          <p:nvPr/>
+        </p:nvSpPr>
+        <p:spPr>
+          <a:xfrm>
+            <a:off x="7416295" y="5042274"/>
+            <a:ext cx="1260000" cy="432000"/>
+          </a:xfrm>
+          <a:prstGeom prst="rect">
+            <a:avLst/>
+          </a:prstGeom>
+          <a:solidFill>
+            <a:schemeClr val="bg1"/>
+          </a:solidFill>
+          <a:ln>
+            <a:solidFill>
+              <a:schemeClr val="tx1"/>
+            </a:solidFill>
+          </a:ln>
+        </p:spPr>
+        <p:style>
+          <a:lnRef idx="2">
+            <a:schemeClr val="accent1">
+              <a:shade val="15000"/>
+            </a:schemeClr>
+          </a:lnRef>
+          <a:fillRef idx="1">
+            <a:schemeClr val="accent1"/>
+          </a:fillRef>
+          <a:effectRef idx="0">
+            <a:schemeClr val="accent1"/>
+          </a:effectRef>
+          <a:fontRef idx="minor">
+            <a:schemeClr val="lt1"/>
+          </a:fontRef>
+        </p:style>
+        <p:txBody>
+          <a:bodyPr rtlCol="0" anchor="ctr"/>
+          <a:lstStyle/>
+          <a:p>
+            <a:pPr algn="ctr"/>
+            <a:r>
+              <a:rPr lang="en-US" altLang="ko-KR" sz="1600" dirty="0">
+                <a:solidFill>
+                  <a:sysClr val="windowText" lastClr="000000"/>
+                </a:solidFill>
+                <a:latin typeface="KoPub돋움체_Pro Light" panose="00000300000000000000" pitchFamily="50" charset="-127"/>
+                <a:ea typeface="KoPub돋움체_Pro Light" panose="00000300000000000000" pitchFamily="50" charset="-127"/>
+              </a:rPr>
+              <a:t>RabbitMQ</a:t>
+            </a:r>
+            <a:endParaRPr lang="ko-KR" altLang="en-US" sz="1600" dirty="0">
+              <a:solidFill>
+                <a:sysClr val="windowText" lastClr="000000"/>
+              </a:solidFill>
+              <a:latin typeface="KoPub돋움체_Pro Light" panose="00000300000000000000" pitchFamily="50" charset="-127"/>
+              <a:ea typeface="KoPub돋움체_Pro Light" panose="00000300000000000000" pitchFamily="50" charset="-127"/>
+            </a:endParaRPr>
+          </a:p>
+        </p:txBody>
+      </p:sp>
+      <p:sp>
+        <p:nvSpPr>
+          <p:cNvPr id="25" name="TextBox 24">
+            <a:extLst>
+              <a:ext uri="{FF2B5EF4-FFF2-40B4-BE49-F238E27FC236}">
+                <a16:creationId xmlns:a16="http://schemas.microsoft.com/office/drawing/2014/main" id="{00B1D832-E731-1183-49C5-794B0C8CF76A}"/>
+              </a:ext>
+            </a:extLst>
+          </p:cNvPr>
+          <p:cNvSpPr txBox="1"/>
+          <p:nvPr/>
+        </p:nvSpPr>
+        <p:spPr>
+          <a:xfrm>
+            <a:off x="5468533" y="9453934"/>
+            <a:ext cx="7498080" cy="1034386"/>
+          </a:xfrm>
+          <a:prstGeom prst="rect">
+            <a:avLst/>
+          </a:prstGeom>
+          <a:noFill/>
+        </p:spPr>
+        <p:txBody>
+          <a:bodyPr wrap="square" rtlCol="0">
+            <a:spAutoFit/>
+          </a:bodyPr>
+          <a:lstStyle/>
+          <a:p>
+            <a:r>
+              <a:rPr lang="en-US" altLang="ko-KR" dirty="0">
+                <a:latin typeface="KoPub돋움체_Pro Light" panose="00000300000000000000" pitchFamily="50" charset="-127"/>
+                <a:ea typeface="KoPub돋움체_Pro Light" panose="00000300000000000000" pitchFamily="50" charset="-127"/>
+              </a:rPr>
+              <a:t>* Technically, this is not Backend Server. This works like internal server</a:t>
+            </a:r>
+            <a:endParaRPr lang="ko-KR" altLang="en-US" dirty="0">
+              <a:latin typeface="KoPub돋움체_Pro Light" panose="00000300000000000000" pitchFamily="50" charset="-127"/>
+              <a:ea typeface="KoPub돋움체_Pro Light" panose="00000300000000000000" pitchFamily="50" charset="-127"/>
+            </a:endParaRPr>
+          </a:p>
+        </p:txBody>
+      </p:sp>
+      <p:cxnSp>
+        <p:nvCxnSpPr>
+          <p:cNvPr id="13" name="직선 화살표 연결선 12">
+            <a:extLst>
+              <a:ext uri="{FF2B5EF4-FFF2-40B4-BE49-F238E27FC236}">
+                <a16:creationId xmlns:a16="http://schemas.microsoft.com/office/drawing/2014/main" id="{A315B280-1BBD-96FE-458C-2EB39F514D36}"/>
+              </a:ext>
+            </a:extLst>
+          </p:cNvPr>
+          <p:cNvCxnSpPr>
+            <a:cxnSpLocks/>
+            <a:stCxn id="18" idx="2"/>
+            <a:endCxn id="3" idx="0"/>
+          </p:cNvCxnSpPr>
+          <p:nvPr/>
+        </p:nvCxnSpPr>
+        <p:spPr>
+          <a:xfrm>
+            <a:off x="10748393" y="3368274"/>
+            <a:ext cx="0" cy="1260001"/>
+          </a:xfrm>
+          <a:prstGeom prst="straightConnector1">
+            <a:avLst/>
+          </a:prstGeom>
+          <a:ln w="12700">
+            <a:solidFill>
+              <a:schemeClr val="tx1"/>
+            </a:solidFill>
+            <a:headEnd type="triangle"/>
+            <a:tailEnd type="triangle"/>
+          </a:ln>
+        </p:spPr>
+        <p:style>
+          <a:lnRef idx="1">
+            <a:schemeClr val="accent1"/>
+          </a:lnRef>
+          <a:fillRef idx="0">
+            <a:schemeClr val="accent1"/>
+          </a:fillRef>
+          <a:effectRef idx="0">
+            <a:schemeClr val="accent1"/>
+          </a:effectRef>
+          <a:fontRef idx="minor">
+            <a:schemeClr val="tx1"/>
+          </a:fontRef>
+        </p:style>
+      </p:cxnSp>
+      <p:sp>
+        <p:nvSpPr>
+          <p:cNvPr id="18" name="직사각형 17">
+            <a:extLst>
+              <a:ext uri="{FF2B5EF4-FFF2-40B4-BE49-F238E27FC236}">
+                <a16:creationId xmlns:a16="http://schemas.microsoft.com/office/drawing/2014/main" id="{59365A0F-E3CF-53B1-362B-448B6D7732EF}"/>
+              </a:ext>
+            </a:extLst>
+          </p:cNvPr>
+          <p:cNvSpPr/>
+          <p:nvPr/>
+        </p:nvSpPr>
+        <p:spPr>
+          <a:xfrm>
+            <a:off x="10028393" y="2108274"/>
+            <a:ext cx="1440000" cy="1260000"/>
+          </a:xfrm>
+          <a:prstGeom prst="rect">
+            <a:avLst/>
+          </a:prstGeom>
+          <a:solidFill>
+            <a:schemeClr val="bg1"/>
+          </a:solidFill>
+          <a:ln>
+            <a:solidFill>
+              <a:schemeClr val="tx1"/>
+            </a:solidFill>
+          </a:ln>
+        </p:spPr>
+        <p:style>
+          <a:lnRef idx="2">
+            <a:schemeClr val="accent1">
+              <a:shade val="15000"/>
+            </a:schemeClr>
+          </a:lnRef>
+          <a:fillRef idx="1">
+            <a:schemeClr val="accent1"/>
+          </a:fillRef>
+          <a:effectRef idx="0">
+            <a:schemeClr val="accent1"/>
+          </a:effectRef>
+          <a:fontRef idx="minor">
+            <a:schemeClr val="lt1"/>
+          </a:fontRef>
+        </p:style>
+        <p:txBody>
+          <a:bodyPr rtlCol="0" anchor="ctr"/>
+          <a:lstStyle/>
+          <a:p>
+            <a:pPr algn="ctr"/>
+            <a:r>
+              <a:rPr lang="en-US" altLang="ko-KR" dirty="0">
+                <a:solidFill>
+                  <a:sysClr val="windowText" lastClr="000000"/>
+                </a:solidFill>
+                <a:latin typeface="KoPub돋움체_Pro Light" panose="00000300000000000000" pitchFamily="50" charset="-127"/>
+                <a:ea typeface="KoPub돋움체_Pro Light" panose="00000300000000000000" pitchFamily="50" charset="-127"/>
+              </a:rPr>
+              <a:t>Admin Application</a:t>
+            </a:r>
+            <a:endParaRPr lang="ko-KR" altLang="en-US" dirty="0">
+              <a:solidFill>
+                <a:sysClr val="windowText" lastClr="000000"/>
+              </a:solidFill>
+              <a:latin typeface="KoPub돋움체_Pro Light" panose="00000300000000000000" pitchFamily="50" charset="-127"/>
+              <a:ea typeface="KoPub돋움체_Pro Light" panose="00000300000000000000" pitchFamily="50" charset="-127"/>
+            </a:endParaRPr>
+          </a:p>
+        </p:txBody>
+      </p:sp>
+      <p:cxnSp>
+        <p:nvCxnSpPr>
+          <p:cNvPr id="31" name="직선 화살표 연결선 30">
+            <a:extLst>
+              <a:ext uri="{FF2B5EF4-FFF2-40B4-BE49-F238E27FC236}">
+                <a16:creationId xmlns:a16="http://schemas.microsoft.com/office/drawing/2014/main" id="{5CF953C6-8383-E5EB-9F87-7914749B81C7}"/>
+              </a:ext>
+            </a:extLst>
+          </p:cNvPr>
+          <p:cNvCxnSpPr>
+            <a:cxnSpLocks/>
+            <a:stCxn id="60" idx="2"/>
+            <a:endCxn id="4" idx="0"/>
+          </p:cNvCxnSpPr>
+          <p:nvPr/>
+        </p:nvCxnSpPr>
+        <p:spPr>
+          <a:xfrm>
+            <a:off x="6248392" y="3368274"/>
+            <a:ext cx="0" cy="1260001"/>
+          </a:xfrm>
+          <a:prstGeom prst="straightConnector1">
+            <a:avLst/>
+          </a:prstGeom>
+          <a:ln w="12700">
+            <a:solidFill>
+              <a:schemeClr val="tx1"/>
+            </a:solidFill>
+            <a:headEnd type="triangle"/>
+            <a:tailEnd type="triangle"/>
+          </a:ln>
+        </p:spPr>
+        <p:style>
+          <a:lnRef idx="1">
+            <a:schemeClr val="accent1"/>
+          </a:lnRef>
+          <a:fillRef idx="0">
+            <a:schemeClr val="accent1"/>
+          </a:fillRef>
+          <a:effectRef idx="0">
+            <a:schemeClr val="accent1"/>
+          </a:effectRef>
+          <a:fontRef idx="minor">
+            <a:schemeClr val="tx1"/>
+          </a:fontRef>
+        </p:style>
+      </p:cxnSp>
+      <p:sp>
+        <p:nvSpPr>
+          <p:cNvPr id="44" name="직사각형 43">
+            <a:extLst>
+              <a:ext uri="{FF2B5EF4-FFF2-40B4-BE49-F238E27FC236}">
+                <a16:creationId xmlns:a16="http://schemas.microsoft.com/office/drawing/2014/main" id="{B502FC3E-B1FF-DEB2-A6F7-922486188BE4}"/>
+              </a:ext>
+            </a:extLst>
+          </p:cNvPr>
+          <p:cNvSpPr/>
+          <p:nvPr/>
+        </p:nvSpPr>
+        <p:spPr>
+          <a:xfrm>
+            <a:off x="14168393" y="9563126"/>
+            <a:ext cx="270000" cy="270000"/>
+          </a:xfrm>
+          <a:prstGeom prst="rect">
+            <a:avLst/>
+          </a:prstGeom>
+          <a:ln>
+            <a:noFill/>
+          </a:ln>
+        </p:spPr>
+        <p:style>
+          <a:lnRef idx="2">
+            <a:schemeClr val="accent1">
+              <a:shade val="15000"/>
+            </a:schemeClr>
+          </a:lnRef>
+          <a:fillRef idx="1">
+            <a:schemeClr val="accent1"/>
+          </a:fillRef>
+          <a:effectRef idx="0">
+            <a:schemeClr val="accent1"/>
+          </a:effectRef>
+          <a:fontRef idx="minor">
+            <a:schemeClr val="lt1"/>
+          </a:fontRef>
+        </p:style>
+        <p:txBody>
+          <a:bodyPr rtlCol="0" anchor="ctr"/>
+          <a:lstStyle/>
+          <a:p>
+            <a:pPr algn="ctr"/>
+            <a:endParaRPr lang="ko-KR" altLang="en-US"/>
+          </a:p>
+        </p:txBody>
+      </p:sp>
+      <p:sp>
+        <p:nvSpPr>
+          <p:cNvPr id="59" name="직사각형 58">
+            <a:extLst>
+              <a:ext uri="{FF2B5EF4-FFF2-40B4-BE49-F238E27FC236}">
+                <a16:creationId xmlns:a16="http://schemas.microsoft.com/office/drawing/2014/main" id="{2AE1B3FF-BC3E-1F7B-207D-78C84EF42B4D}"/>
+              </a:ext>
+            </a:extLst>
+          </p:cNvPr>
+          <p:cNvSpPr/>
+          <p:nvPr/>
+        </p:nvSpPr>
+        <p:spPr>
+          <a:xfrm>
+            <a:off x="5258391" y="1835745"/>
+            <a:ext cx="6480001" cy="1800000"/>
+          </a:xfrm>
+          <a:prstGeom prst="rect">
+            <a:avLst/>
+          </a:prstGeom>
+          <a:noFill/>
+          <a:ln>
+            <a:solidFill>
+              <a:schemeClr val="tx1"/>
+            </a:solidFill>
+            <a:prstDash val="dash"/>
+          </a:ln>
+        </p:spPr>
+        <p:style>
+          <a:lnRef idx="2">
+            <a:schemeClr val="accent1">
+              <a:shade val="15000"/>
+            </a:schemeClr>
+          </a:lnRef>
+          <a:fillRef idx="1">
+            <a:schemeClr val="accent1"/>
+          </a:fillRef>
+          <a:effectRef idx="0">
+            <a:schemeClr val="accent1"/>
+          </a:effectRef>
+          <a:fontRef idx="minor">
+            <a:schemeClr val="lt1"/>
+          </a:fontRef>
+        </p:style>
+        <p:txBody>
+          <a:bodyPr rtlCol="0" anchor="ctr"/>
+          <a:lstStyle/>
+          <a:p>
+            <a:pPr algn="ctr"/>
+            <a:endParaRPr lang="ko-KR" altLang="en-US">
+              <a:latin typeface="KoPub돋움체_Pro Light" panose="00000300000000000000" pitchFamily="50" charset="-127"/>
+              <a:ea typeface="KoPub돋움체_Pro Light" panose="00000300000000000000" pitchFamily="50" charset="-127"/>
+            </a:endParaRPr>
+          </a:p>
+        </p:txBody>
+      </p:sp>
+      <p:sp>
+        <p:nvSpPr>
+          <p:cNvPr id="60" name="직사각형 59">
+            <a:extLst>
+              <a:ext uri="{FF2B5EF4-FFF2-40B4-BE49-F238E27FC236}">
+                <a16:creationId xmlns:a16="http://schemas.microsoft.com/office/drawing/2014/main" id="{A120F3C0-5596-7554-A103-0EF04F0AF238}"/>
+              </a:ext>
+            </a:extLst>
+          </p:cNvPr>
+          <p:cNvSpPr/>
+          <p:nvPr/>
+        </p:nvSpPr>
+        <p:spPr>
+          <a:xfrm>
+            <a:off x="5528392" y="2108274"/>
+            <a:ext cx="1440000" cy="1260000"/>
+          </a:xfrm>
+          <a:prstGeom prst="rect">
+            <a:avLst/>
+          </a:prstGeom>
+          <a:solidFill>
+            <a:schemeClr val="bg1"/>
+          </a:solidFill>
+          <a:ln>
+            <a:solidFill>
+              <a:schemeClr val="tx1"/>
+            </a:solidFill>
+          </a:ln>
+        </p:spPr>
+        <p:style>
+          <a:lnRef idx="2">
+            <a:schemeClr val="accent1">
+              <a:shade val="15000"/>
+            </a:schemeClr>
+          </a:lnRef>
+          <a:fillRef idx="1">
+            <a:schemeClr val="accent1"/>
+          </a:fillRef>
+          <a:effectRef idx="0">
+            <a:schemeClr val="accent1"/>
+          </a:effectRef>
+          <a:fontRef idx="minor">
+            <a:schemeClr val="lt1"/>
+          </a:fontRef>
+        </p:style>
+        <p:txBody>
+          <a:bodyPr rtlCol="0" anchor="ctr"/>
+          <a:lstStyle/>
+          <a:p>
+            <a:pPr algn="ctr"/>
+            <a:r>
+              <a:rPr lang="en-US" altLang="ko-KR" dirty="0">
+                <a:solidFill>
+                  <a:sysClr val="windowText" lastClr="000000"/>
+                </a:solidFill>
+                <a:latin typeface="KoPub돋움체_Pro Light" panose="00000300000000000000" pitchFamily="50" charset="-127"/>
+                <a:ea typeface="KoPub돋움체_Pro Light" panose="00000300000000000000" pitchFamily="50" charset="-127"/>
+              </a:rPr>
+              <a:t>Kakao</a:t>
+            </a:r>
+          </a:p>
+          <a:p>
+            <a:pPr algn="ctr"/>
+            <a:r>
+              <a:rPr lang="en-US" altLang="ko-KR" dirty="0">
+                <a:solidFill>
+                  <a:sysClr val="windowText" lastClr="000000"/>
+                </a:solidFill>
+                <a:latin typeface="KoPub돋움체_Pro Light" panose="00000300000000000000" pitchFamily="50" charset="-127"/>
+                <a:ea typeface="KoPub돋움체_Pro Light" panose="00000300000000000000" pitchFamily="50" charset="-127"/>
+              </a:rPr>
+              <a:t>Application</a:t>
+            </a:r>
+            <a:endParaRPr lang="ko-KR" altLang="en-US" dirty="0">
+              <a:solidFill>
+                <a:sysClr val="windowText" lastClr="000000"/>
+              </a:solidFill>
+              <a:latin typeface="KoPub돋움체_Pro Light" panose="00000300000000000000" pitchFamily="50" charset="-127"/>
+              <a:ea typeface="KoPub돋움체_Pro Light" panose="00000300000000000000" pitchFamily="50" charset="-127"/>
+            </a:endParaRPr>
+          </a:p>
+        </p:txBody>
+      </p:sp>
+      <p:sp>
+        <p:nvSpPr>
+          <p:cNvPr id="66" name="사각형: 둥근 모서리 65">
+            <a:extLst>
+              <a:ext uri="{FF2B5EF4-FFF2-40B4-BE49-F238E27FC236}">
+                <a16:creationId xmlns:a16="http://schemas.microsoft.com/office/drawing/2014/main" id="{65AF83E3-CE75-2B4F-CF86-3F60C533FBB3}"/>
+              </a:ext>
+            </a:extLst>
+          </p:cNvPr>
+          <p:cNvSpPr/>
+          <p:nvPr/>
+        </p:nvSpPr>
+        <p:spPr>
+          <a:xfrm>
+            <a:off x="5528392" y="6587668"/>
+            <a:ext cx="1440000" cy="1260000"/>
+          </a:xfrm>
+          <a:prstGeom prst="roundRect">
+            <a:avLst>
+              <a:gd name="adj" fmla="val 28258"/>
+            </a:avLst>
+          </a:prstGeom>
+          <a:solidFill>
+            <a:schemeClr val="bg1"/>
+          </a:solidFill>
+          <a:ln>
+            <a:solidFill>
+              <a:schemeClr val="tx1"/>
+            </a:solidFill>
+          </a:ln>
+        </p:spPr>
+        <p:style>
+          <a:lnRef idx="2">
+            <a:schemeClr val="accent1">
+              <a:shade val="15000"/>
+            </a:schemeClr>
+          </a:lnRef>
+          <a:fillRef idx="1">
+            <a:schemeClr val="accent1"/>
+          </a:fillRef>
+          <a:effectRef idx="0">
+            <a:schemeClr val="accent1"/>
+          </a:effectRef>
+          <a:fontRef idx="minor">
+            <a:schemeClr val="lt1"/>
+          </a:fontRef>
+        </p:style>
+        <p:txBody>
+          <a:bodyPr rtlCol="0" anchor="ctr"/>
+          <a:lstStyle/>
+          <a:p>
+            <a:pPr algn="ctr"/>
+            <a:r>
+              <a:rPr lang="en-US" altLang="ko-KR" dirty="0">
+                <a:solidFill>
+                  <a:sysClr val="windowText" lastClr="000000"/>
+                </a:solidFill>
+                <a:latin typeface="KoPub돋움체_Pro Light" panose="00000300000000000000" pitchFamily="50" charset="-127"/>
+                <a:ea typeface="KoPub돋움체_Pro Light" panose="00000300000000000000" pitchFamily="50" charset="-127"/>
+              </a:rPr>
+              <a:t>Redis</a:t>
+            </a:r>
+            <a:endParaRPr lang="ko-KR" altLang="en-US" dirty="0">
+              <a:solidFill>
+                <a:sysClr val="windowText" lastClr="000000"/>
+              </a:solidFill>
+              <a:latin typeface="KoPub돋움체_Pro Light" panose="00000300000000000000" pitchFamily="50" charset="-127"/>
+              <a:ea typeface="KoPub돋움체_Pro Light" panose="00000300000000000000" pitchFamily="50" charset="-127"/>
+            </a:endParaRPr>
+          </a:p>
+        </p:txBody>
+      </p:sp>
+      <p:cxnSp>
+        <p:nvCxnSpPr>
+          <p:cNvPr id="67" name="직선 화살표 연결선 66">
+            <a:extLst>
+              <a:ext uri="{FF2B5EF4-FFF2-40B4-BE49-F238E27FC236}">
+                <a16:creationId xmlns:a16="http://schemas.microsoft.com/office/drawing/2014/main" id="{8A55E7AD-4F0D-1A49-8E53-7E8506A939CA}"/>
+              </a:ext>
+            </a:extLst>
+          </p:cNvPr>
+          <p:cNvCxnSpPr>
+            <a:cxnSpLocks/>
+            <a:stCxn id="4" idx="2"/>
+          </p:cNvCxnSpPr>
+          <p:nvPr/>
+        </p:nvCxnSpPr>
+        <p:spPr>
+          <a:xfrm>
+            <a:off x="6248392" y="5888275"/>
+            <a:ext cx="0" cy="699393"/>
+          </a:xfrm>
+          <a:prstGeom prst="straightConnector1">
+            <a:avLst/>
+          </a:prstGeom>
+          <a:ln w="12700">
+            <a:solidFill>
+              <a:schemeClr val="tx1"/>
+            </a:solidFill>
+            <a:headEnd type="triangle"/>
+            <a:tailEnd type="triangle"/>
+          </a:ln>
+        </p:spPr>
+        <p:style>
+          <a:lnRef idx="1">
+            <a:schemeClr val="accent1"/>
+          </a:lnRef>
+          <a:fillRef idx="0">
+            <a:schemeClr val="accent1"/>
+          </a:fillRef>
+          <a:effectRef idx="0">
+            <a:schemeClr val="accent1"/>
+          </a:effectRef>
+          <a:fontRef idx="minor">
+            <a:schemeClr val="tx1"/>
+          </a:fontRef>
+        </p:style>
+      </p:cxnSp>
+      <p:sp>
+        <p:nvSpPr>
+          <p:cNvPr id="72" name="직사각형 71">
+            <a:extLst>
+              <a:ext uri="{FF2B5EF4-FFF2-40B4-BE49-F238E27FC236}">
+                <a16:creationId xmlns:a16="http://schemas.microsoft.com/office/drawing/2014/main" id="{43C1DAB0-E617-1472-F0C7-9DE63CF94132}"/>
+              </a:ext>
+            </a:extLst>
+          </p:cNvPr>
+          <p:cNvSpPr/>
+          <p:nvPr/>
+        </p:nvSpPr>
+        <p:spPr>
+          <a:xfrm>
+            <a:off x="4988392" y="4088274"/>
+            <a:ext cx="7020001" cy="4320000"/>
+          </a:xfrm>
+          <a:prstGeom prst="rect">
+            <a:avLst/>
+          </a:prstGeom>
+          <a:noFill/>
+          <a:ln>
+            <a:solidFill>
+              <a:schemeClr val="tx1"/>
+            </a:solidFill>
+            <a:prstDash val="dash"/>
+          </a:ln>
+        </p:spPr>
+        <p:style>
+          <a:lnRef idx="2">
+            <a:schemeClr val="accent1">
+              <a:shade val="15000"/>
+            </a:schemeClr>
+          </a:lnRef>
+          <a:fillRef idx="1">
+            <a:schemeClr val="accent1"/>
+          </a:fillRef>
+          <a:effectRef idx="0">
+            <a:schemeClr val="accent1"/>
+          </a:effectRef>
+          <a:fontRef idx="minor">
+            <a:schemeClr val="lt1"/>
+          </a:fontRef>
+        </p:style>
+        <p:txBody>
+          <a:bodyPr rtlCol="0" anchor="ctr"/>
+          <a:lstStyle/>
+          <a:p>
+            <a:pPr algn="ctr"/>
+            <a:endParaRPr lang="ko-KR" altLang="en-US">
+              <a:latin typeface="KoPub돋움체_Pro Light" panose="00000300000000000000" pitchFamily="50" charset="-127"/>
+              <a:ea typeface="KoPub돋움체_Pro Light" panose="00000300000000000000" pitchFamily="50" charset="-127"/>
+            </a:endParaRPr>
+          </a:p>
+        </p:txBody>
+      </p:sp>
+      <p:sp>
+        <p:nvSpPr>
+          <p:cNvPr id="6" name="직사각형 5">
+            <a:extLst>
+              <a:ext uri="{FF2B5EF4-FFF2-40B4-BE49-F238E27FC236}">
+                <a16:creationId xmlns:a16="http://schemas.microsoft.com/office/drawing/2014/main" id="{7A1CF6F5-7D1E-29E8-9E40-C6A7E71032A0}"/>
+              </a:ext>
+            </a:extLst>
+          </p:cNvPr>
+          <p:cNvSpPr/>
+          <p:nvPr/>
+        </p:nvSpPr>
+        <p:spPr>
+          <a:xfrm>
+            <a:off x="5528396" y="2108274"/>
+            <a:ext cx="5939997" cy="1260000"/>
+          </a:xfrm>
+          <a:prstGeom prst="rect">
+            <a:avLst/>
+          </a:prstGeom>
+          <a:solidFill>
+            <a:schemeClr val="bg1"/>
+          </a:solidFill>
+          <a:ln>
+            <a:solidFill>
+              <a:schemeClr val="tx1"/>
+            </a:solidFill>
+          </a:ln>
+        </p:spPr>
+        <p:style>
+          <a:lnRef idx="2">
+            <a:schemeClr val="accent1">
+              <a:shade val="15000"/>
+            </a:schemeClr>
+          </a:lnRef>
+          <a:fillRef idx="1">
+            <a:schemeClr val="accent1"/>
+          </a:fillRef>
+          <a:effectRef idx="0">
+            <a:schemeClr val="accent1"/>
+          </a:effectRef>
+          <a:fontRef idx="minor">
+            <a:schemeClr val="lt1"/>
+          </a:fontRef>
+        </p:style>
+        <p:txBody>
+          <a:bodyPr rtlCol="0" anchor="ctr"/>
+          <a:lstStyle/>
+          <a:p>
+            <a:pPr algn="ctr"/>
+            <a:r>
+              <a:rPr lang="en-US" altLang="ko-KR" dirty="0">
+                <a:solidFill>
+                  <a:sysClr val="windowText" lastClr="000000"/>
+                </a:solidFill>
+                <a:latin typeface="KoPub돋움체_Pro Light" panose="00000300000000000000" pitchFamily="50" charset="-127"/>
+                <a:ea typeface="KoPub돋움체_Pro Light" panose="00000300000000000000" pitchFamily="50" charset="-127"/>
+              </a:rPr>
+              <a:t>Admin – Bot Application</a:t>
+            </a:r>
+            <a:endParaRPr lang="ko-KR" altLang="en-US" dirty="0">
+              <a:solidFill>
+                <a:sysClr val="windowText" lastClr="000000"/>
+              </a:solidFill>
+              <a:latin typeface="KoPub돋움체_Pro Light" panose="00000300000000000000" pitchFamily="50" charset="-127"/>
+              <a:ea typeface="KoPub돋움체_Pro Light" panose="00000300000000000000" pitchFamily="50" charset="-127"/>
+            </a:endParaRPr>
+          </a:p>
+        </p:txBody>
+      </p:sp>
+    </p:spTree>
+    <p:extLst>
+      <p:ext uri="{BB962C8B-B14F-4D97-AF65-F5344CB8AC3E}">
+        <p14:creationId xmlns:p14="http://schemas.microsoft.com/office/powerpoint/2010/main" val="1899444541"/>
+      </p:ext>
+    </p:extLst>
+  </p:cSld>
+  <p:clrMapOvr>
+    <a:masterClrMapping/>
+  </p:clrMapOvr>
+</p:sld>
+</file>
+
 <file path=ppt/theme/theme1.xml><?xml version="1.0" encoding="utf-8"?>
 <a:theme xmlns:a="http://schemas.openxmlformats.org/drawingml/2006/main" name="Office 테마">
   <a:themeElements>
-    <a:clrScheme name="Office">
+    <a:clrScheme name="Office 테마">
       <a:dk1>
         <a:sysClr val="windowText" lastClr="000000"/>
       </a:dk1>
@@ -4197,9 +6553,9 @@
         <a:srgbClr val="954F72"/>
       </a:folHlink>
     </a:clrScheme>
-    <a:fontScheme name="Office">
+    <a:fontScheme name="Office 테마">
       <a:majorFont>
-        <a:latin typeface="맑은 고딕" panose="020F0302020204030204"/>
+        <a:latin typeface="Calibri Light" panose="020F0302020204030204"/>
         <a:ea typeface=""/>
         <a:cs typeface=""/>
         <a:font script="Jpan" typeface="游ゴシック Light"/>
@@ -4232,26 +6588,9 @@
         <a:font script="Viet" typeface="Times New Roman"/>
         <a:font script="Uigh" typeface="Microsoft Uighur"/>
         <a:font script="Geor" typeface="Sylfaen"/>
-        <a:font script="Armn" typeface="Arial"/>
-        <a:font script="Bugi" typeface="Leelawadee UI"/>
-        <a:font script="Bopo" typeface="Microsoft JhengHei"/>
-        <a:font script="Java" typeface="Javanese Text"/>
-        <a:font script="Lisu" typeface="Segoe UI"/>
-        <a:font script="Mymr" typeface="Myanmar Text"/>
-        <a:font script="Nkoo" typeface="Ebrima"/>
-        <a:font script="Olck" typeface="Nirmala UI"/>
-        <a:font script="Osma" typeface="Ebrima"/>
-        <a:font script="Phag" typeface="Phagspa"/>
-        <a:font script="Syrn" typeface="Estrangelo Edessa"/>
-        <a:font script="Syrj" typeface="Estrangelo Edessa"/>
-        <a:font script="Syre" typeface="Estrangelo Edessa"/>
-        <a:font script="Sora" typeface="Nirmala UI"/>
-        <a:font script="Tale" typeface="Microsoft Tai Le"/>
-        <a:font script="Talu" typeface="Microsoft New Tai Lue"/>
-        <a:font script="Tfng" typeface="Ebrima"/>
       </a:majorFont>
       <a:minorFont>
-        <a:latin typeface="맑은 고딕" panose="020F0502020204030204"/>
+        <a:latin typeface="Calibri" panose="020F0502020204030204"/>
         <a:ea typeface=""/>
         <a:cs typeface=""/>
         <a:font script="Jpan" typeface="游ゴシック"/>
@@ -4284,26 +6623,9 @@
         <a:font script="Viet" typeface="Arial"/>
         <a:font script="Uigh" typeface="Microsoft Uighur"/>
         <a:font script="Geor" typeface="Sylfaen"/>
-        <a:font script="Armn" typeface="Arial"/>
-        <a:font script="Bugi" typeface="Leelawadee UI"/>
-        <a:font script="Bopo" typeface="Microsoft JhengHei"/>
-        <a:font script="Java" typeface="Javanese Text"/>
-        <a:font script="Lisu" typeface="Segoe UI"/>
-        <a:font script="Mymr" typeface="Myanmar Text"/>
-        <a:font script="Nkoo" typeface="Ebrima"/>
-        <a:font script="Olck" typeface="Nirmala UI"/>
-        <a:font script="Osma" typeface="Ebrima"/>
-        <a:font script="Phag" typeface="Phagspa"/>
-        <a:font script="Syrn" typeface="Estrangelo Edessa"/>
-        <a:font script="Syrj" typeface="Estrangelo Edessa"/>
-        <a:font script="Syre" typeface="Estrangelo Edessa"/>
-        <a:font script="Sora" typeface="Nirmala UI"/>
-        <a:font script="Tale" typeface="Microsoft Tai Le"/>
-        <a:font script="Talu" typeface="Microsoft New Tai Lue"/>
-        <a:font script="Tfng" typeface="Ebrima"/>
       </a:minorFont>
     </a:fontScheme>
-    <a:fmtScheme name="Office">
+    <a:fmtScheme name="Office 테마">
       <a:fillStyleLst>
         <a:solidFill>
           <a:schemeClr val="phClr"/>
@@ -4445,7 +6767,7 @@
   <a:extraClrSchemeLst/>
   <a:extLst>
     <a:ext uri="{05A4C25C-085E-4340-85A3-A5531E510DB2}">
-      <thm15:themeFamily xmlns:thm15="http://schemas.microsoft.com/office/thememl/2012/main" name="Office Theme" id="{62F939B6-93AF-4DB8-9C6B-D6C7DFDC589F}" vid="{4A3C46E8-61CC-4603-A589-7422A47A8E4A}"/>
+      <thm15:themeFamily xmlns:thm15="http://schemas.microsoft.com/office/thememl/2012/main" name="Office 2013 - 2022 Theme" id="{62F939B6-93AF-4DB8-9C6B-D6C7DFDC589F}" vid="{4A3C46E8-61CC-4603-A589-7422A47A8E4A}"/>
     </a:ext>
   </a:extLst>
 </a:theme>
